--- a/docs/deck/S4-I-24_SridharVetrivel_LiveReview_RFPCriteria_v3.pptx
+++ b/docs/deck/S4-I-24_SridharVetrivel_LiveReview_RFPCriteria_v3.pptx
@@ -5,17 +5,18 @@
     <p:sldMasterId id="2147483648" r:id="rId4"/>
   </p:sldMasterIdLst>
   <p:notesMasterIdLst>
-    <p:notesMasterId r:id="rId13"/>
+    <p:notesMasterId r:id="rId14"/>
   </p:notesMasterIdLst>
   <p:sldIdLst>
     <p:sldId id="1359437" r:id="rId5"/>
     <p:sldId id="1359442" r:id="rId6"/>
     <p:sldId id="1359443" r:id="rId7"/>
-    <p:sldId id="1359444" r:id="rId8"/>
-    <p:sldId id="1359446" r:id="rId9"/>
-    <p:sldId id="1359447" r:id="rId10"/>
-    <p:sldId id="1359449" r:id="rId11"/>
-    <p:sldId id="1359451" r:id="rId12"/>
+    <p:sldId id="1359452" r:id="rId8"/>
+    <p:sldId id="1359444" r:id="rId9"/>
+    <p:sldId id="1359446" r:id="rId10"/>
+    <p:sldId id="1359447" r:id="rId11"/>
+    <p:sldId id="1359449" r:id="rId12"/>
+    <p:sldId id="1359451" r:id="rId13"/>
   </p:sldIdLst>
   <p:sldSz cx="12192000" cy="6858000"/>
   <p:notesSz cx="6858000" cy="9144000"/>
@@ -7451,14 +7452,6 @@
 <file path=ppt/slides/slide4.xml><?xml version="1.0" encoding="utf-8"?>
 <p:sld xmlns:a="http://schemas.openxmlformats.org/drawingml/2006/main" xmlns:r="http://schemas.openxmlformats.org/officeDocument/2006/relationships" xmlns:p="http://schemas.openxmlformats.org/presentationml/2006/main">
   <p:cSld>
-    <p:bg>
-      <p:bgPr>
-        <a:solidFill>
-          <a:schemeClr val="bg1"/>
-        </a:solidFill>
-        <a:effectLst/>
-      </p:bgPr>
-    </p:bg>
     <p:spTree>
       <p:nvGrpSpPr>
         <p:cNvPr id="1" name="">
@@ -7686,28 +7679,28 @@
           <a:lstStyle/>
           <a:p>
             <a:r>
-              <a:rPr lang="en-US" sz="2400" b="1">
+              <a:rPr lang="en-US" sz="2400" b="1" dirty="0">
                 <a:solidFill>
                   <a:srgbClr val="1F8E91"/>
                 </a:solidFill>
                 <a:ea typeface="Calibri"/>
                 <a:cs typeface="Calibri"/>
               </a:rPr>
-              <a:t>Solution Quality</a:t>
-            </a:r>
-          </a:p>
-        </p:txBody>
-      </p:sp>
-      <p:sp>
-        <p:nvSpPr>
-          <p:cNvPr id="1033" name="Rounded Rectangle 1032"/>
+              <a:t>Architecture</a:t>
+            </a:r>
+          </a:p>
+        </p:txBody>
+      </p:sp>
+      <p:sp>
+        <p:nvSpPr>
+          <p:cNvPr id="3001" name="Box 3001"/>
           <p:cNvSpPr/>
           <p:nvPr/>
         </p:nvSpPr>
         <p:spPr>
           <a:xfrm>
-            <a:off x="585215" y="1325880"/>
-            <a:ext cx="2514600" cy="1554480"/>
+            <a:off x="411480" y="914400"/>
+            <a:ext cx="9006840" cy="502920"/>
           </a:xfrm>
           <a:prstGeom prst="roundRect">
             <a:avLst>
@@ -7715,27 +7708,15 @@
             </a:avLst>
           </a:prstGeom>
           <a:solidFill>
-            <a:srgbClr val="EEF6F6"/>
+            <a:srgbClr val="DBE4FF"/>
           </a:solidFill>
-          <a:ln>
-            <a:noFill/>
+          <a:ln w="19050">
+            <a:solidFill>
+              <a:srgbClr val="1971C2"/>
+            </a:solidFill>
           </a:ln>
           <a:effectLst/>
         </p:spPr>
-        <p:style>
-          <a:lnRef idx="1">
-            <a:schemeClr val="accent1"/>
-          </a:lnRef>
-          <a:fillRef idx="3">
-            <a:schemeClr val="accent1"/>
-          </a:fillRef>
-          <a:effectRef idx="2">
-            <a:schemeClr val="accent1"/>
-          </a:effectRef>
-          <a:fontRef idx="minor">
-            <a:schemeClr val="lt1"/>
-          </a:fontRef>
-        </p:style>
         <p:txBody>
           <a:bodyPr rtlCol="0" anchor="ctr"/>
           <a:lstStyle/>
@@ -7747,14 +7728,14 @@
       </p:sp>
       <p:sp>
         <p:nvSpPr>
-          <p:cNvPr id="1034" name="TextBox 1033"/>
+          <p:cNvPr id="3002" name="Label 3002"/>
           <p:cNvSpPr txBox="1"/>
           <p:nvPr/>
         </p:nvSpPr>
         <p:spPr>
           <a:xfrm>
-            <a:off x="722375" y="1325880"/>
-            <a:ext cx="2240280" cy="1554480"/>
+            <a:off x="484632" y="914400"/>
+            <a:ext cx="8860536" cy="502920"/>
           </a:xfrm>
           <a:prstGeom prst="rect">
             <a:avLst/>
@@ -7763,52 +7744,43 @@
         </p:spPr>
         <p:txBody>
           <a:bodyPr wrap="square" lIns="0" tIns="0" rIns="0" bIns="0" anchor="ctr">
-            <a:spAutoFit/>
+            <a:normAutofit/>
           </a:bodyPr>
           <a:lstStyle/>
           <a:p>
             <a:pPr algn="ctr"/>
             <a:r>
-              <a:rPr sz="1400" b="1" i="0">
-                <a:solidFill>
-                  <a:srgbClr val="263030"/>
+              <a:rPr sz="1300" b="1" i="0">
+                <a:solidFill>
+                  <a:srgbClr val="1971C2"/>
                 </a:solidFill>
                 <a:latin typeface="Calibri"/>
               </a:rPr>
-              <a:t>Natural-Language</a:t>
-            </a:r>
-          </a:p>
-          <a:p>
-            <a:pPr algn="ctr"/>
-            <a:r>
-              <a:rPr sz="1400" b="1" i="0">
-                <a:solidFill>
-                  <a:srgbClr val="263030"/>
-                </a:solidFill>
-                <a:latin typeface="Calibri"/>
-              </a:rPr>
-              <a:t>Query</a:t>
+              <a:t>CLIENT / ACCESS LAYER</a:t>
             </a:r>
           </a:p>
         </p:txBody>
       </p:sp>
       <p:cxnSp>
         <p:nvCxnSpPr>
-          <p:cNvPr id="1035" name="Connector 1034"/>
-          <p:cNvCxnSpPr/>
+          <p:cNvPr id="3007" name="Arrow 3008"/>
+          <p:cNvCxnSpPr>
+            <a:cxnSpLocks/>
+            <a:stCxn id="3002" idx="2"/>
+          </p:cNvCxnSpPr>
           <p:nvPr/>
         </p:nvCxnSpPr>
         <p:spPr>
           <a:xfrm>
-            <a:off x="3099815" y="2103120"/>
-            <a:ext cx="320041" cy="0"/>
+            <a:off x="4914900" y="1417320"/>
+            <a:ext cx="0" cy="406591"/>
           </a:xfrm>
           <a:prstGeom prst="line">
             <a:avLst/>
           </a:prstGeom>
-          <a:ln w="31750">
+          <a:ln w="15875">
             <a:solidFill>
-              <a:srgbClr val="2DB6BB"/>
+              <a:srgbClr val="495057"/>
             </a:solidFill>
             <a:tailEnd type="triangle" w="med" len="med"/>
           </a:ln>
@@ -7830,14 +7802,14 @@
       </p:cxnSp>
       <p:sp>
         <p:nvSpPr>
-          <p:cNvPr id="1036" name="Rounded Rectangle 1035"/>
+          <p:cNvPr id="3009" name="Box 3009"/>
           <p:cNvSpPr/>
           <p:nvPr/>
         </p:nvSpPr>
         <p:spPr>
           <a:xfrm>
-            <a:off x="3419856" y="1325880"/>
-            <a:ext cx="2514600" cy="1554480"/>
+            <a:off x="640080" y="2134807"/>
+            <a:ext cx="8549640" cy="502920"/>
           </a:xfrm>
           <a:prstGeom prst="roundRect">
             <a:avLst>
@@ -7845,27 +7817,15 @@
             </a:avLst>
           </a:prstGeom>
           <a:solidFill>
-            <a:srgbClr val="1F8E91"/>
+            <a:srgbClr val="E7EDFF"/>
           </a:solidFill>
-          <a:ln>
-            <a:noFill/>
+          <a:ln w="19050">
+            <a:solidFill>
+              <a:srgbClr val="3B5BDB"/>
+            </a:solidFill>
           </a:ln>
           <a:effectLst/>
         </p:spPr>
-        <p:style>
-          <a:lnRef idx="1">
-            <a:schemeClr val="accent1"/>
-          </a:lnRef>
-          <a:fillRef idx="3">
-            <a:schemeClr val="accent1"/>
-          </a:fillRef>
-          <a:effectRef idx="2">
-            <a:schemeClr val="accent1"/>
-          </a:effectRef>
-          <a:fontRef idx="minor">
-            <a:schemeClr val="lt1"/>
-          </a:fontRef>
-        </p:style>
         <p:txBody>
           <a:bodyPr rtlCol="0" anchor="ctr"/>
           <a:lstStyle/>
@@ -7877,14 +7837,14 @@
       </p:sp>
       <p:sp>
         <p:nvSpPr>
-          <p:cNvPr id="1037" name="TextBox 1036"/>
+          <p:cNvPr id="3010" name="Label 3010"/>
           <p:cNvSpPr txBox="1"/>
           <p:nvPr/>
         </p:nvSpPr>
         <p:spPr>
           <a:xfrm>
-            <a:off x="3557015" y="1325880"/>
-            <a:ext cx="2240280" cy="1554480"/>
+            <a:off x="713232" y="2134807"/>
+            <a:ext cx="8403336" cy="502920"/>
           </a:xfrm>
           <a:prstGeom prst="rect">
             <a:avLst/>
@@ -7893,52 +7853,40 @@
         </p:spPr>
         <p:txBody>
           <a:bodyPr wrap="square" lIns="0" tIns="0" rIns="0" bIns="0" anchor="ctr">
-            <a:spAutoFit/>
+            <a:normAutofit/>
           </a:bodyPr>
           <a:lstStyle/>
           <a:p>
             <a:pPr algn="ctr"/>
             <a:r>
-              <a:rPr sz="1400" b="1" i="0">
-                <a:solidFill>
-                  <a:srgbClr val="FFFFFF"/>
+              <a:rPr sz="1300" b="1" i="0">
+                <a:solidFill>
+                  <a:srgbClr val="3B5BDB"/>
                 </a:solidFill>
                 <a:latin typeface="Calibri"/>
               </a:rPr>
-              <a:t>Coordinator</a:t>
-            </a:r>
-          </a:p>
-          <a:p>
-            <a:pPr algn="ctr"/>
-            <a:r>
-              <a:rPr sz="1400" b="1" i="0">
-                <a:solidFill>
-                  <a:srgbClr val="FFFFFF"/>
-                </a:solidFill>
-                <a:latin typeface="Calibri"/>
-              </a:rPr>
-              <a:t>(LLM Routing)</a:t>
+              <a:t>COORDINATOR AGENT</a:t>
             </a:r>
           </a:p>
         </p:txBody>
       </p:sp>
       <p:cxnSp>
         <p:nvCxnSpPr>
-          <p:cNvPr id="1038" name="Connector 1037"/>
+          <p:cNvPr id="3011" name="Fan 3012"/>
           <p:cNvCxnSpPr/>
           <p:nvPr/>
         </p:nvCxnSpPr>
         <p:spPr>
-          <a:xfrm>
-            <a:off x="5934456" y="2103120"/>
-            <a:ext cx="320040" cy="0"/>
+          <a:xfrm flipH="1">
+            <a:off x="1708785" y="2637727"/>
+            <a:ext cx="3206115" cy="219456"/>
           </a:xfrm>
           <a:prstGeom prst="line">
             <a:avLst/>
           </a:prstGeom>
-          <a:ln w="31750">
+          <a:ln w="15875">
             <a:solidFill>
-              <a:srgbClr val="2DB6BB"/>
+              <a:srgbClr val="3B5BDB"/>
             </a:solidFill>
             <a:tailEnd type="triangle" w="med" len="med"/>
           </a:ln>
@@ -7958,117 +7906,23 @@
           </a:fontRef>
         </p:style>
       </p:cxnSp>
-      <p:sp>
-        <p:nvSpPr>
-          <p:cNvPr id="1039" name="Rounded Rectangle 1038"/>
-          <p:cNvSpPr/>
-          <p:nvPr/>
-        </p:nvSpPr>
-        <p:spPr>
-          <a:xfrm>
-            <a:off x="6254496" y="1325880"/>
-            <a:ext cx="2514600" cy="1554480"/>
-          </a:xfrm>
-          <a:prstGeom prst="roundRect">
-            <a:avLst>
-              <a:gd name="adj" fmla="val 6000"/>
-            </a:avLst>
-          </a:prstGeom>
-          <a:solidFill>
-            <a:srgbClr val="EEF6F6"/>
-          </a:solidFill>
-          <a:ln>
-            <a:noFill/>
-          </a:ln>
-          <a:effectLst/>
-        </p:spPr>
-        <p:style>
-          <a:lnRef idx="1">
-            <a:schemeClr val="accent1"/>
-          </a:lnRef>
-          <a:fillRef idx="3">
-            <a:schemeClr val="accent1"/>
-          </a:fillRef>
-          <a:effectRef idx="2">
-            <a:schemeClr val="accent1"/>
-          </a:effectRef>
-          <a:fontRef idx="minor">
-            <a:schemeClr val="lt1"/>
-          </a:fontRef>
-        </p:style>
-        <p:txBody>
-          <a:bodyPr rtlCol="0" anchor="ctr"/>
-          <a:lstStyle/>
-          <a:p>
-            <a:pPr algn="ctr"/>
-            <a:endParaRPr/>
-          </a:p>
-        </p:txBody>
-      </p:sp>
-      <p:sp>
-        <p:nvSpPr>
-          <p:cNvPr id="1040" name="TextBox 1039"/>
-          <p:cNvSpPr txBox="1"/>
-          <p:nvPr/>
-        </p:nvSpPr>
-        <p:spPr>
-          <a:xfrm>
-            <a:off x="6391656" y="1325880"/>
-            <a:ext cx="2240280" cy="1554480"/>
-          </a:xfrm>
-          <a:prstGeom prst="rect">
-            <a:avLst/>
-          </a:prstGeom>
-          <a:noFill/>
-        </p:spPr>
-        <p:txBody>
-          <a:bodyPr wrap="square" lIns="0" tIns="0" rIns="0" bIns="0" anchor="ctr">
-            <a:spAutoFit/>
-          </a:bodyPr>
-          <a:lstStyle/>
-          <a:p>
-            <a:pPr algn="ctr"/>
-            <a:r>
-              <a:rPr sz="1400" b="1" i="0">
-                <a:solidFill>
-                  <a:srgbClr val="263030"/>
-                </a:solidFill>
-                <a:latin typeface="Calibri"/>
-              </a:rPr>
-              <a:t>Specialist</a:t>
-            </a:r>
-          </a:p>
-          <a:p>
-            <a:pPr algn="ctr"/>
-            <a:r>
-              <a:rPr sz="1400" b="1" i="0">
-                <a:solidFill>
-                  <a:srgbClr val="263030"/>
-                </a:solidFill>
-                <a:latin typeface="Calibri"/>
-              </a:rPr>
-              <a:t>Agent</a:t>
-            </a:r>
-          </a:p>
-        </p:txBody>
-      </p:sp>
       <p:cxnSp>
         <p:nvCxnSpPr>
-          <p:cNvPr id="1041" name="Connector 1040"/>
+          <p:cNvPr id="3013" name="Fan 3014"/>
           <p:cNvCxnSpPr/>
           <p:nvPr/>
         </p:nvCxnSpPr>
         <p:spPr>
-          <a:xfrm>
-            <a:off x="8769096" y="2103120"/>
-            <a:ext cx="320040" cy="0"/>
+          <a:xfrm flipH="1">
+            <a:off x="3846195" y="2637727"/>
+            <a:ext cx="1068705" cy="219456"/>
           </a:xfrm>
           <a:prstGeom prst="line">
             <a:avLst/>
           </a:prstGeom>
-          <a:ln w="31750">
+          <a:ln w="15875">
             <a:solidFill>
-              <a:srgbClr val="2DB6BB"/>
+              <a:srgbClr val="3B5BDB"/>
             </a:solidFill>
             <a:tailEnd type="triangle" w="med" len="med"/>
           </a:ln>
@@ -8088,16 +7942,88 @@
           </a:fontRef>
         </p:style>
       </p:cxnSp>
-      <p:sp>
-        <p:nvSpPr>
-          <p:cNvPr id="1042" name="Rounded Rectangle 1041"/>
+      <p:cxnSp>
+        <p:nvCxnSpPr>
+          <p:cNvPr id="3015" name="Fan 3016"/>
+          <p:cNvCxnSpPr/>
+          <p:nvPr/>
+        </p:nvCxnSpPr>
+        <p:spPr>
+          <a:xfrm>
+            <a:off x="4914900" y="2637727"/>
+            <a:ext cx="1068705" cy="219456"/>
+          </a:xfrm>
+          <a:prstGeom prst="line">
+            <a:avLst/>
+          </a:prstGeom>
+          <a:ln w="15875">
+            <a:solidFill>
+              <a:srgbClr val="3B5BDB"/>
+            </a:solidFill>
+            <a:tailEnd type="triangle" w="med" len="med"/>
+          </a:ln>
+        </p:spPr>
+        <p:style>
+          <a:lnRef idx="2">
+            <a:schemeClr val="accent1"/>
+          </a:lnRef>
+          <a:fillRef idx="0">
+            <a:schemeClr val="accent1"/>
+          </a:fillRef>
+          <a:effectRef idx="1">
+            <a:schemeClr val="accent1"/>
+          </a:effectRef>
+          <a:fontRef idx="minor">
+            <a:schemeClr val="tx1"/>
+          </a:fontRef>
+        </p:style>
+      </p:cxnSp>
+      <p:cxnSp>
+        <p:nvCxnSpPr>
+          <p:cNvPr id="3017" name="Fan 3018"/>
+          <p:cNvCxnSpPr/>
+          <p:nvPr/>
+        </p:nvCxnSpPr>
+        <p:spPr>
+          <a:xfrm>
+            <a:off x="4914900" y="2637727"/>
+            <a:ext cx="3206115" cy="219456"/>
+          </a:xfrm>
+          <a:prstGeom prst="line">
+            <a:avLst/>
+          </a:prstGeom>
+          <a:ln w="15875">
+            <a:solidFill>
+              <a:srgbClr val="3B5BDB"/>
+            </a:solidFill>
+            <a:tailEnd type="triangle" w="med" len="med"/>
+          </a:ln>
+        </p:spPr>
+        <p:style>
+          <a:lnRef idx="2">
+            <a:schemeClr val="accent1"/>
+          </a:lnRef>
+          <a:fillRef idx="0">
+            <a:schemeClr val="accent1"/>
+          </a:fillRef>
+          <a:effectRef idx="1">
+            <a:schemeClr val="accent1"/>
+          </a:effectRef>
+          <a:fontRef idx="minor">
+            <a:schemeClr val="tx1"/>
+          </a:fontRef>
+        </p:style>
+      </p:cxnSp>
+      <p:sp>
+        <p:nvSpPr>
+          <p:cNvPr id="3019" name="Box 3019"/>
           <p:cNvSpPr/>
           <p:nvPr/>
         </p:nvSpPr>
         <p:spPr>
           <a:xfrm>
-            <a:off x="9089136" y="1325880"/>
-            <a:ext cx="2514600" cy="1554480"/>
+            <a:off x="640080" y="2857183"/>
+            <a:ext cx="2000250" cy="594360"/>
           </a:xfrm>
           <a:prstGeom prst="roundRect">
             <a:avLst>
@@ -8105,27 +8031,15 @@
             </a:avLst>
           </a:prstGeom>
           <a:solidFill>
-            <a:srgbClr val="EEF6F6"/>
+            <a:srgbClr val="E3FAFC"/>
           </a:solidFill>
-          <a:ln>
-            <a:noFill/>
+          <a:ln w="19050">
+            <a:solidFill>
+              <a:srgbClr val="0C8599"/>
+            </a:solidFill>
           </a:ln>
           <a:effectLst/>
         </p:spPr>
-        <p:style>
-          <a:lnRef idx="1">
-            <a:schemeClr val="accent1"/>
-          </a:lnRef>
-          <a:fillRef idx="3">
-            <a:schemeClr val="accent1"/>
-          </a:fillRef>
-          <a:effectRef idx="2">
-            <a:schemeClr val="accent1"/>
-          </a:effectRef>
-          <a:fontRef idx="minor">
-            <a:schemeClr val="lt1"/>
-          </a:fontRef>
-        </p:style>
         <p:txBody>
           <a:bodyPr rtlCol="0" anchor="ctr"/>
           <a:lstStyle/>
@@ -8137,14 +8051,14 @@
       </p:sp>
       <p:sp>
         <p:nvSpPr>
-          <p:cNvPr id="1043" name="TextBox 1042"/>
+          <p:cNvPr id="3020" name="Label 3020"/>
           <p:cNvSpPr txBox="1"/>
           <p:nvPr/>
         </p:nvSpPr>
         <p:spPr>
           <a:xfrm>
-            <a:off x="9226296" y="1325880"/>
-            <a:ext cx="2240280" cy="1554480"/>
+            <a:off x="713232" y="2857183"/>
+            <a:ext cx="1853946" cy="594360"/>
           </a:xfrm>
           <a:prstGeom prst="rect">
             <a:avLst/>
@@ -8153,275 +8067,33 @@
         </p:spPr>
         <p:txBody>
           <a:bodyPr wrap="square" lIns="0" tIns="0" rIns="0" bIns="0" anchor="ctr">
-            <a:spAutoFit/>
+            <a:normAutofit/>
           </a:bodyPr>
           <a:lstStyle/>
           <a:p>
             <a:pPr algn="ctr"/>
             <a:r>
-              <a:rPr sz="1400" b="1" i="0">
-                <a:solidFill>
-                  <a:srgbClr val="263030"/>
+              <a:rPr sz="1150" b="1" i="0">
+                <a:solidFill>
+                  <a:srgbClr val="0C8599"/>
                 </a:solidFill>
                 <a:latin typeface="Calibri"/>
               </a:rPr>
-              <a:t>Cited</a:t>
-            </a:r>
-          </a:p>
-          <a:p>
-            <a:pPr algn="ctr"/>
-            <a:r>
-              <a:rPr sz="1400" b="1" i="0">
-                <a:solidFill>
-                  <a:srgbClr val="263030"/>
-                </a:solidFill>
-                <a:latin typeface="Calibri"/>
-              </a:rPr>
-              <a:t>Response</a:t>
-            </a:r>
-          </a:p>
-        </p:txBody>
-      </p:sp>
-      <p:sp>
-        <p:nvSpPr>
-          <p:cNvPr id="6001" name="TextBox 6001"/>
-          <p:cNvSpPr txBox="1"/>
-          <p:nvPr/>
-        </p:nvSpPr>
-        <p:spPr>
-          <a:xfrm>
-            <a:off x="475488" y="804672"/>
-            <a:ext cx="10058400" cy="274320"/>
-          </a:xfrm>
-          <a:prstGeom prst="rect">
-            <a:avLst/>
-          </a:prstGeom>
-          <a:noFill/>
-        </p:spPr>
-        <p:txBody>
-          <a:bodyPr wrap="square" lIns="0" tIns="0" rIns="0" bIns="0" anchor="t">
-            <a:normAutofit/>
-          </a:bodyPr>
-          <a:lstStyle/>
-          <a:p>
-            <a:pPr algn="l"/>
-            <a:r>
-              <a:rPr sz="1300" b="0" i="1">
-                <a:solidFill>
-                  <a:srgbClr val="5B6B6B"/>
-                </a:solidFill>
-                <a:latin typeface="Calibri"/>
-              </a:rPr>
-              <a:t>Solution Quality · AI Integration Depth</a:t>
-            </a:r>
-          </a:p>
-        </p:txBody>
-      </p:sp>
-      <p:sp>
-        <p:nvSpPr>
-          <p:cNvPr id="6010" name="TextBox 6010"/>
-          <p:cNvSpPr txBox="1"/>
-          <p:nvPr/>
-        </p:nvSpPr>
-        <p:spPr>
-          <a:xfrm>
-            <a:off x="585216" y="2971800"/>
-            <a:ext cx="2514600" cy="594360"/>
-          </a:xfrm>
-          <a:prstGeom prst="rect">
-            <a:avLst/>
-          </a:prstGeom>
-          <a:noFill/>
-        </p:spPr>
-        <p:txBody>
-          <a:bodyPr wrap="square" lIns="0" tIns="0" rIns="0" bIns="0" anchor="t">
-            <a:normAutofit/>
-          </a:bodyPr>
-          <a:lstStyle/>
-          <a:p>
-            <a:pPr algn="ctr">
-              <a:lnSpc>
-                <a:spcPct val="112000"/>
-              </a:lnSpc>
-            </a:pPr>
-            <a:r>
-              <a:rPr sz="1150" b="0" i="0">
-                <a:solidFill>
-                  <a:srgbClr val="5B6B6B"/>
-                </a:solidFill>
-                <a:latin typeface="Calibri"/>
-              </a:rPr>
-              <a:t>Ask in plain English — no syntax, no picking a system.</a:t>
-            </a:r>
-          </a:p>
-        </p:txBody>
-      </p:sp>
-      <p:sp>
-        <p:nvSpPr>
-          <p:cNvPr id="6011" name="TextBox 6011"/>
-          <p:cNvSpPr txBox="1"/>
-          <p:nvPr/>
-        </p:nvSpPr>
-        <p:spPr>
-          <a:xfrm>
-            <a:off x="3419856" y="2971800"/>
-            <a:ext cx="2514600" cy="594360"/>
-          </a:xfrm>
-          <a:prstGeom prst="rect">
-            <a:avLst/>
-          </a:prstGeom>
-          <a:noFill/>
-        </p:spPr>
-        <p:txBody>
-          <a:bodyPr wrap="square" lIns="0" tIns="0" rIns="0" bIns="0" anchor="t">
-            <a:normAutofit/>
-          </a:bodyPr>
-          <a:lstStyle/>
-          <a:p>
-            <a:pPr algn="ctr">
-              <a:lnSpc>
-                <a:spcPct val="112000"/>
-              </a:lnSpc>
-            </a:pPr>
-            <a:r>
-              <a:rPr sz="1150" b="0" i="0">
-                <a:solidFill>
-                  <a:srgbClr val="5B6B6B"/>
-                </a:solidFill>
-                <a:latin typeface="Calibri"/>
-              </a:rPr>
-              <a:t>AI reads intent and picks who should answer, not keywords.</a:t>
-            </a:r>
-          </a:p>
-        </p:txBody>
-      </p:sp>
-      <p:sp>
-        <p:nvSpPr>
-          <p:cNvPr id="6012" name="TextBox 6012"/>
-          <p:cNvSpPr txBox="1"/>
-          <p:nvPr/>
-        </p:nvSpPr>
-        <p:spPr>
-          <a:xfrm>
-            <a:off x="6254496" y="2971800"/>
-            <a:ext cx="2514600" cy="594360"/>
-          </a:xfrm>
-          <a:prstGeom prst="rect">
-            <a:avLst/>
-          </a:prstGeom>
-          <a:noFill/>
-        </p:spPr>
-        <p:txBody>
-          <a:bodyPr wrap="square" lIns="0" tIns="0" rIns="0" bIns="0" anchor="t">
-            <a:normAutofit/>
-          </a:bodyPr>
-          <a:lstStyle/>
-          <a:p>
-            <a:pPr algn="ctr">
-              <a:lnSpc>
-                <a:spcPct val="112000"/>
-              </a:lnSpc>
-            </a:pPr>
-            <a:r>
-              <a:rPr sz="1150" b="0" i="0">
-                <a:solidFill>
-                  <a:srgbClr val="5B6B6B"/>
-                </a:solidFill>
-                <a:latin typeface="Calibri"/>
-              </a:rPr>
-              <a:t>A dedicated expert checks the real, live system data.</a:t>
-            </a:r>
-          </a:p>
-        </p:txBody>
-      </p:sp>
-      <p:sp>
-        <p:nvSpPr>
-          <p:cNvPr id="6013" name="TextBox 6013"/>
-          <p:cNvSpPr txBox="1"/>
-          <p:nvPr/>
-        </p:nvSpPr>
-        <p:spPr>
-          <a:xfrm>
-            <a:off x="9089136" y="2971800"/>
-            <a:ext cx="2514600" cy="594360"/>
-          </a:xfrm>
-          <a:prstGeom prst="rect">
-            <a:avLst/>
-          </a:prstGeom>
-          <a:noFill/>
-        </p:spPr>
-        <p:txBody>
-          <a:bodyPr wrap="square" lIns="0" tIns="0" rIns="0" bIns="0" anchor="t">
-            <a:normAutofit/>
-          </a:bodyPr>
-          <a:lstStyle/>
-          <a:p>
-            <a:pPr algn="ctr">
-              <a:lnSpc>
-                <a:spcPct val="112000"/>
-              </a:lnSpc>
-            </a:pPr>
-            <a:r>
-              <a:rPr sz="1150" b="0" i="0">
-                <a:solidFill>
-                  <a:srgbClr val="5B6B6B"/>
-                </a:solidFill>
-                <a:latin typeface="Calibri"/>
-              </a:rPr>
-              <a:t>Answer comes back in plain language, receipt attached.</a:t>
-            </a:r>
-          </a:p>
-        </p:txBody>
-      </p:sp>
-      <p:sp>
-        <p:nvSpPr>
-          <p:cNvPr id="6020" name="TextBox 6020"/>
-          <p:cNvSpPr txBox="1"/>
-          <p:nvPr/>
-        </p:nvSpPr>
-        <p:spPr>
-          <a:xfrm>
-            <a:off x="548640" y="3703320"/>
-            <a:ext cx="11091672" cy="685800"/>
-          </a:xfrm>
-          <a:prstGeom prst="rect">
-            <a:avLst/>
-          </a:prstGeom>
-          <a:noFill/>
-        </p:spPr>
-        <p:txBody>
-          <a:bodyPr wrap="square" lIns="0" tIns="0" rIns="0" bIns="0" anchor="t">
-            <a:normAutofit/>
-          </a:bodyPr>
-          <a:lstStyle/>
-          <a:p>
-            <a:pPr algn="ctr">
-              <a:lnSpc>
-                <a:spcPct val="120000"/>
-              </a:lnSpc>
-            </a:pPr>
-            <a:r>
-              <a:rPr sz="1400" b="0" i="0">
-                <a:solidFill>
-                  <a:srgbClr val="263030"/>
-                </a:solidFill>
-                <a:latin typeface="Calibri"/>
-              </a:rPr>
-              <a:t>For example: ask “did the sales ETL job run last night?” and in under two minutes the coordinator recognizes a data-platform question, the data agent checks the real Databricks job run, and the answer names job #4821, run #99102 — not a guess.</a:t>
-            </a:r>
-          </a:p>
-        </p:txBody>
-      </p:sp>
-      <p:sp>
-        <p:nvSpPr>
-          <p:cNvPr id="6030" name="Rounded Rectangle 6030"/>
+              <a:t>DATA AGENT</a:t>
+            </a:r>
+          </a:p>
+        </p:txBody>
+      </p:sp>
+      <p:sp>
+        <p:nvSpPr>
+          <p:cNvPr id="3021" name="Box 3021"/>
           <p:cNvSpPr/>
           <p:nvPr/>
         </p:nvSpPr>
         <p:spPr>
           <a:xfrm>
-            <a:off x="548640" y="4572000"/>
-            <a:ext cx="2567178" cy="914400"/>
+            <a:off x="2823210" y="2857183"/>
+            <a:ext cx="2000250" cy="594360"/>
           </a:xfrm>
           <a:prstGeom prst="roundRect">
             <a:avLst>
@@ -8429,27 +8101,15 @@
             </a:avLst>
           </a:prstGeom>
           <a:solidFill>
-            <a:srgbClr val="EEF6F6"/>
+            <a:srgbClr val="E3FAFC"/>
           </a:solidFill>
-          <a:ln>
-            <a:noFill/>
+          <a:ln w="19050">
+            <a:solidFill>
+              <a:srgbClr val="0C8599"/>
+            </a:solidFill>
           </a:ln>
           <a:effectLst/>
         </p:spPr>
-        <p:style>
-          <a:lnRef idx="1">
-            <a:schemeClr val="accent1"/>
-          </a:lnRef>
-          <a:fillRef idx="3">
-            <a:schemeClr val="accent1"/>
-          </a:fillRef>
-          <a:effectRef idx="2">
-            <a:schemeClr val="accent1"/>
-          </a:effectRef>
-          <a:fontRef idx="minor">
-            <a:schemeClr val="lt1"/>
-          </a:fontRef>
-        </p:style>
         <p:txBody>
           <a:bodyPr rtlCol="0" anchor="ctr"/>
           <a:lstStyle/>
@@ -8461,14 +8121,14 @@
       </p:sp>
       <p:sp>
         <p:nvSpPr>
-          <p:cNvPr id="6040" name="TextBox 6040"/>
+          <p:cNvPr id="3022" name="Label 3022"/>
           <p:cNvSpPr txBox="1"/>
           <p:nvPr/>
         </p:nvSpPr>
         <p:spPr>
           <a:xfrm>
-            <a:off x="640080" y="4572000"/>
-            <a:ext cx="2384298" cy="914400"/>
+            <a:off x="2896362" y="2857183"/>
+            <a:ext cx="1853946" cy="594360"/>
           </a:xfrm>
           <a:prstGeom prst="rect">
             <a:avLst/>
@@ -8481,49 +8141,29 @@
           </a:bodyPr>
           <a:lstStyle/>
           <a:p>
-            <a:pPr algn="ctr">
-              <a:lnSpc>
-                <a:spcPct val="110000"/>
-              </a:lnSpc>
-            </a:pPr>
-            <a:r>
-              <a:rPr sz="1300" b="1" i="0">
-                <a:solidFill>
-                  <a:srgbClr val="263030"/>
+            <a:pPr algn="ctr"/>
+            <a:r>
+              <a:rPr sz="1150" b="1" i="0">
+                <a:solidFill>
+                  <a:srgbClr val="0C8599"/>
                 </a:solidFill>
                 <a:latin typeface="Calibri"/>
               </a:rPr>
-              <a:t>Data &amp; Pipelines</a:t>
-            </a:r>
-          </a:p>
-          <a:p>
-            <a:pPr algn="ctr">
-              <a:lnSpc>
-                <a:spcPct val="112000"/>
-              </a:lnSpc>
-            </a:pPr>
-            <a:r>
-              <a:rPr sz="1100" b="0" i="0">
-                <a:solidFill>
-                  <a:srgbClr val="5B6B6B"/>
-                </a:solidFill>
-                <a:latin typeface="Calibri"/>
-              </a:rPr>
-              <a:t>Databricks job runs and SQL warehouses</a:t>
-            </a:r>
-          </a:p>
-        </p:txBody>
-      </p:sp>
-      <p:sp>
-        <p:nvSpPr>
-          <p:cNvPr id="6031" name="Rounded Rectangle 6031"/>
+              <a:t>DEVOPS AGENT</a:t>
+            </a:r>
+          </a:p>
+        </p:txBody>
+      </p:sp>
+      <p:sp>
+        <p:nvSpPr>
+          <p:cNvPr id="3023" name="Box 3023"/>
           <p:cNvSpPr/>
           <p:nvPr/>
         </p:nvSpPr>
         <p:spPr>
           <a:xfrm>
-            <a:off x="3390138" y="4572000"/>
-            <a:ext cx="2567178" cy="914400"/>
+            <a:off x="5006340" y="2857183"/>
+            <a:ext cx="2000250" cy="594360"/>
           </a:xfrm>
           <a:prstGeom prst="roundRect">
             <a:avLst>
@@ -8531,27 +8171,15 @@
             </a:avLst>
           </a:prstGeom>
           <a:solidFill>
-            <a:srgbClr val="EEF6F6"/>
+            <a:srgbClr val="E3FAFC"/>
           </a:solidFill>
-          <a:ln>
-            <a:noFill/>
+          <a:ln w="19050">
+            <a:solidFill>
+              <a:srgbClr val="0C8599"/>
+            </a:solidFill>
           </a:ln>
           <a:effectLst/>
         </p:spPr>
-        <p:style>
-          <a:lnRef idx="1">
-            <a:schemeClr val="accent1"/>
-          </a:lnRef>
-          <a:fillRef idx="3">
-            <a:schemeClr val="accent1"/>
-          </a:fillRef>
-          <a:effectRef idx="2">
-            <a:schemeClr val="accent1"/>
-          </a:effectRef>
-          <a:fontRef idx="minor">
-            <a:schemeClr val="lt1"/>
-          </a:fontRef>
-        </p:style>
         <p:txBody>
           <a:bodyPr rtlCol="0" anchor="ctr"/>
           <a:lstStyle/>
@@ -8563,14 +8191,14 @@
       </p:sp>
       <p:sp>
         <p:nvSpPr>
-          <p:cNvPr id="6041" name="TextBox 6041"/>
+          <p:cNvPr id="3024" name="Label 3024"/>
           <p:cNvSpPr txBox="1"/>
           <p:nvPr/>
         </p:nvSpPr>
         <p:spPr>
           <a:xfrm>
-            <a:off x="3481578" y="4572000"/>
-            <a:ext cx="2384298" cy="914400"/>
+            <a:off x="5079492" y="2857183"/>
+            <a:ext cx="1853946" cy="594360"/>
           </a:xfrm>
           <a:prstGeom prst="rect">
             <a:avLst/>
@@ -8583,49 +8211,29 @@
           </a:bodyPr>
           <a:lstStyle/>
           <a:p>
-            <a:pPr algn="ctr">
-              <a:lnSpc>
-                <a:spcPct val="110000"/>
-              </a:lnSpc>
-            </a:pPr>
-            <a:r>
-              <a:rPr sz="1300" b="1" i="0">
-                <a:solidFill>
-                  <a:srgbClr val="263030"/>
+            <a:pPr algn="ctr"/>
+            <a:r>
+              <a:rPr sz="1150" b="1" i="0">
+                <a:solidFill>
+                  <a:srgbClr val="0C8599"/>
                 </a:solidFill>
                 <a:latin typeface="Calibri"/>
               </a:rPr>
-              <a:t>Deployments &amp; CI/CD</a:t>
-            </a:r>
-          </a:p>
-          <a:p>
-            <a:pPr algn="ctr">
-              <a:lnSpc>
-                <a:spcPct val="112000"/>
-              </a:lnSpc>
-            </a:pPr>
-            <a:r>
-              <a:rPr sz="1100" b="0" i="0">
-                <a:solidFill>
-                  <a:srgbClr val="5B6B6B"/>
-                </a:solidFill>
-                <a:latin typeface="Calibri"/>
-              </a:rPr>
-              <a:t>GitHub Actions and Azure DevOps runs</a:t>
-            </a:r>
-          </a:p>
-        </p:txBody>
-      </p:sp>
-      <p:sp>
-        <p:nvSpPr>
-          <p:cNvPr id="6032" name="Rounded Rectangle 6032"/>
+              <a:t>CRM AGENT</a:t>
+            </a:r>
+          </a:p>
+        </p:txBody>
+      </p:sp>
+      <p:sp>
+        <p:nvSpPr>
+          <p:cNvPr id="3025" name="Box 3025"/>
           <p:cNvSpPr/>
           <p:nvPr/>
         </p:nvSpPr>
         <p:spPr>
           <a:xfrm>
-            <a:off x="6231636" y="4572000"/>
-            <a:ext cx="2567178" cy="914400"/>
+            <a:off x="7189470" y="2857183"/>
+            <a:ext cx="2000250" cy="594360"/>
           </a:xfrm>
           <a:prstGeom prst="roundRect">
             <a:avLst>
@@ -8633,27 +8241,15 @@
             </a:avLst>
           </a:prstGeom>
           <a:solidFill>
-            <a:srgbClr val="EEF6F6"/>
+            <a:srgbClr val="E3FAFC"/>
           </a:solidFill>
-          <a:ln>
-            <a:noFill/>
+          <a:ln w="19050">
+            <a:solidFill>
+              <a:srgbClr val="0C8599"/>
+            </a:solidFill>
           </a:ln>
           <a:effectLst/>
         </p:spPr>
-        <p:style>
-          <a:lnRef idx="1">
-            <a:schemeClr val="accent1"/>
-          </a:lnRef>
-          <a:fillRef idx="3">
-            <a:schemeClr val="accent1"/>
-          </a:fillRef>
-          <a:effectRef idx="2">
-            <a:schemeClr val="accent1"/>
-          </a:effectRef>
-          <a:fontRef idx="minor">
-            <a:schemeClr val="lt1"/>
-          </a:fontRef>
-        </p:style>
         <p:txBody>
           <a:bodyPr rtlCol="0" anchor="ctr"/>
           <a:lstStyle/>
@@ -8665,14 +8261,14 @@
       </p:sp>
       <p:sp>
         <p:nvSpPr>
-          <p:cNvPr id="6042" name="TextBox 6042"/>
+          <p:cNvPr id="3026" name="Label 3026"/>
           <p:cNvSpPr txBox="1"/>
           <p:nvPr/>
         </p:nvSpPr>
         <p:spPr>
           <a:xfrm>
-            <a:off x="6323076" y="4572000"/>
-            <a:ext cx="2384298" cy="914400"/>
+            <a:off x="7262622" y="2857183"/>
+            <a:ext cx="1853946" cy="594360"/>
           </a:xfrm>
           <a:prstGeom prst="rect">
             <a:avLst/>
@@ -8685,49 +8281,108 @@
           </a:bodyPr>
           <a:lstStyle/>
           <a:p>
-            <a:pPr algn="ctr">
-              <a:lnSpc>
-                <a:spcPct val="110000"/>
-              </a:lnSpc>
-            </a:pPr>
-            <a:r>
-              <a:rPr sz="1300" b="1" i="0">
-                <a:solidFill>
-                  <a:srgbClr val="263030"/>
+            <a:pPr algn="ctr"/>
+            <a:r>
+              <a:rPr sz="1150" b="1" i="0">
+                <a:solidFill>
+                  <a:srgbClr val="0C8599"/>
                 </a:solidFill>
                 <a:latin typeface="Calibri"/>
               </a:rPr>
-              <a:t>Customers &amp; Deals</a:t>
-            </a:r>
-          </a:p>
-          <a:p>
-            <a:pPr algn="ctr">
-              <a:lnSpc>
-                <a:spcPct val="112000"/>
-              </a:lnSpc>
-            </a:pPr>
-            <a:r>
-              <a:rPr sz="1100" b="0" i="0">
-                <a:solidFill>
-                  <a:srgbClr val="5B6B6B"/>
+              <a:t>DOCS / RAG AGENT</a:t>
+            </a:r>
+          </a:p>
+        </p:txBody>
+      </p:sp>
+      <p:sp>
+        <p:nvSpPr>
+          <p:cNvPr id="3027" name="Outer 3028"/>
+          <p:cNvSpPr/>
+          <p:nvPr/>
+        </p:nvSpPr>
+        <p:spPr>
+          <a:xfrm>
+            <a:off x="411480" y="1823911"/>
+            <a:ext cx="9006840" cy="1792224"/>
+          </a:xfrm>
+          <a:prstGeom prst="rect">
+            <a:avLst/>
+          </a:prstGeom>
+          <a:noFill/>
+          <a:ln w="19050">
+            <a:solidFill>
+              <a:srgbClr val="2B8A3E"/>
+            </a:solidFill>
+          </a:ln>
+        </p:spPr>
+        <p:txBody>
+          <a:bodyPr rtlCol="0"/>
+          <a:lstStyle/>
+          <a:p>
+            <a:endParaRPr/>
+          </a:p>
+        </p:txBody>
+      </p:sp>
+      <p:sp>
+        <p:nvSpPr>
+          <p:cNvPr id="3029" name="OuterLabel 3030"/>
+          <p:cNvSpPr txBox="1"/>
+          <p:nvPr/>
+        </p:nvSpPr>
+        <p:spPr>
+          <a:xfrm>
+            <a:off x="411480" y="1833055"/>
+            <a:ext cx="9006840" cy="274320"/>
+          </a:xfrm>
+          <a:prstGeom prst="rect">
+            <a:avLst/>
+          </a:prstGeom>
+          <a:noFill/>
+        </p:spPr>
+        <p:txBody>
+          <a:bodyPr wrap="square" lIns="0" tIns="0" rIns="0" bIns="0" anchor="ctr">
+            <a:normAutofit/>
+          </a:bodyPr>
+          <a:lstStyle/>
+          <a:p>
+            <a:pPr algn="ctr"/>
+            <a:r>
+              <a:rPr sz="1300" b="1" i="0" dirty="0">
+                <a:solidFill>
+                  <a:srgbClr val="2B8A3E"/>
                 </a:solidFill>
                 <a:latin typeface="Calibri"/>
               </a:rPr>
-              <a:t>CRM accounts, deals, and owners</a:t>
-            </a:r>
-          </a:p>
-        </p:txBody>
-      </p:sp>
-      <p:sp>
-        <p:nvSpPr>
-          <p:cNvPr id="6033" name="Rounded Rectangle 6033"/>
+              <a:t>ORCHESTRATION CONTROL PLANE</a:t>
+            </a:r>
+            <a:r>
+              <a:rPr lang="en-IN" sz="1300" b="1" i="0" dirty="0">
+                <a:solidFill>
+                  <a:srgbClr val="2B8A3E"/>
+                </a:solidFill>
+                <a:latin typeface="Calibri"/>
+              </a:rPr>
+              <a:t> (AGENTFIELD)</a:t>
+            </a:r>
+            <a:endParaRPr sz="1300" b="1" i="0" dirty="0">
+              <a:solidFill>
+                <a:srgbClr val="2B8A3E"/>
+              </a:solidFill>
+              <a:latin typeface="Calibri"/>
+            </a:endParaRPr>
+          </a:p>
+        </p:txBody>
+      </p:sp>
+      <p:sp>
+        <p:nvSpPr>
+          <p:cNvPr id="3031" name="Box 3031"/>
           <p:cNvSpPr/>
           <p:nvPr/>
         </p:nvSpPr>
         <p:spPr>
           <a:xfrm>
-            <a:off x="9073134" y="4572000"/>
-            <a:ext cx="2567178" cy="914400"/>
+            <a:off x="411480" y="3844735"/>
+            <a:ext cx="9006840" cy="502920"/>
           </a:xfrm>
           <a:prstGeom prst="roundRect">
             <a:avLst>
@@ -8735,27 +8390,15 @@
             </a:avLst>
           </a:prstGeom>
           <a:solidFill>
-            <a:srgbClr val="EEF6F6"/>
+            <a:srgbClr val="F8F0FC"/>
           </a:solidFill>
-          <a:ln>
-            <a:noFill/>
+          <a:ln w="19050">
+            <a:solidFill>
+              <a:srgbClr val="9C36B5"/>
+            </a:solidFill>
           </a:ln>
           <a:effectLst/>
         </p:spPr>
-        <p:style>
-          <a:lnRef idx="1">
-            <a:schemeClr val="accent1"/>
-          </a:lnRef>
-          <a:fillRef idx="3">
-            <a:schemeClr val="accent1"/>
-          </a:fillRef>
-          <a:effectRef idx="2">
-            <a:schemeClr val="accent1"/>
-          </a:effectRef>
-          <a:fontRef idx="minor">
-            <a:schemeClr val="lt1"/>
-          </a:fontRef>
-        </p:style>
         <p:txBody>
           <a:bodyPr rtlCol="0" anchor="ctr"/>
           <a:lstStyle/>
@@ -8767,14 +8410,14 @@
       </p:sp>
       <p:sp>
         <p:nvSpPr>
-          <p:cNvPr id="6043" name="TextBox 6043"/>
+          <p:cNvPr id="3032" name="Label 3032"/>
           <p:cNvSpPr txBox="1"/>
           <p:nvPr/>
         </p:nvSpPr>
         <p:spPr>
           <a:xfrm>
-            <a:off x="9164574" y="4572000"/>
-            <a:ext cx="2384298" cy="914400"/>
+            <a:off x="484632" y="3844735"/>
+            <a:ext cx="8860536" cy="502920"/>
           </a:xfrm>
           <a:prstGeom prst="rect">
             <a:avLst/>
@@ -8787,43 +8430,725 @@
           </a:bodyPr>
           <a:lstStyle/>
           <a:p>
-            <a:pPr algn="ctr">
-              <a:lnSpc>
-                <a:spcPct val="110000"/>
-              </a:lnSpc>
-            </a:pPr>
+            <a:pPr algn="ctr"/>
             <a:r>
               <a:rPr sz="1300" b="1" i="0">
                 <a:solidFill>
-                  <a:srgbClr val="263030"/>
+                  <a:srgbClr val="9C36B5"/>
                 </a:solidFill>
                 <a:latin typeface="Calibri"/>
               </a:rPr>
-              <a:t>Documentation &amp; Runbooks</a:t>
-            </a:r>
-          </a:p>
-          <a:p>
-            <a:pPr algn="ctr">
-              <a:lnSpc>
-                <a:spcPct val="112000"/>
-              </a:lnSpc>
-            </a:pPr>
-            <a:r>
-              <a:rPr sz="1100" b="0" i="0">
-                <a:solidFill>
-                  <a:srgbClr val="5B6B6B"/>
+              <a:t>KNOWLEDGE &amp; RETRIEVAL LAYER</a:t>
+            </a:r>
+          </a:p>
+        </p:txBody>
+      </p:sp>
+      <p:cxnSp>
+        <p:nvCxnSpPr>
+          <p:cNvPr id="3033" name="Arrow 3034"/>
+          <p:cNvCxnSpPr/>
+          <p:nvPr/>
+        </p:nvCxnSpPr>
+        <p:spPr>
+          <a:xfrm>
+            <a:off x="4914900" y="4347655"/>
+            <a:ext cx="0" cy="237744"/>
+          </a:xfrm>
+          <a:prstGeom prst="line">
+            <a:avLst/>
+          </a:prstGeom>
+          <a:ln w="15875">
+            <a:solidFill>
+              <a:srgbClr val="495057"/>
+            </a:solidFill>
+            <a:tailEnd type="triangle" w="med" len="med"/>
+          </a:ln>
+        </p:spPr>
+        <p:style>
+          <a:lnRef idx="2">
+            <a:schemeClr val="accent1"/>
+          </a:lnRef>
+          <a:fillRef idx="0">
+            <a:schemeClr val="accent1"/>
+          </a:fillRef>
+          <a:effectRef idx="1">
+            <a:schemeClr val="accent1"/>
+          </a:effectRef>
+          <a:fontRef idx="minor">
+            <a:schemeClr val="tx1"/>
+          </a:fontRef>
+        </p:style>
+      </p:cxnSp>
+      <p:sp>
+        <p:nvSpPr>
+          <p:cNvPr id="3035" name="Box 3035"/>
+          <p:cNvSpPr/>
+          <p:nvPr/>
+        </p:nvSpPr>
+        <p:spPr>
+          <a:xfrm>
+            <a:off x="411480" y="4585399"/>
+            <a:ext cx="2114550" cy="640080"/>
+          </a:xfrm>
+          <a:prstGeom prst="roundRect">
+            <a:avLst>
+              <a:gd name="adj" fmla="val 6000"/>
+            </a:avLst>
+          </a:prstGeom>
+          <a:solidFill>
+            <a:srgbClr val="FFF9DB"/>
+          </a:solidFill>
+          <a:ln w="19050">
+            <a:solidFill>
+              <a:srgbClr val="E67700"/>
+            </a:solidFill>
+          </a:ln>
+          <a:effectLst/>
+        </p:spPr>
+        <p:txBody>
+          <a:bodyPr rtlCol="0" anchor="ctr"/>
+          <a:lstStyle/>
+          <a:p>
+            <a:pPr algn="ctr"/>
+            <a:endParaRPr/>
+          </a:p>
+        </p:txBody>
+      </p:sp>
+      <p:sp>
+        <p:nvSpPr>
+          <p:cNvPr id="3036" name="Label 3036"/>
+          <p:cNvSpPr txBox="1"/>
+          <p:nvPr/>
+        </p:nvSpPr>
+        <p:spPr>
+          <a:xfrm>
+            <a:off x="484632" y="4585399"/>
+            <a:ext cx="1968246" cy="640080"/>
+          </a:xfrm>
+          <a:prstGeom prst="rect">
+            <a:avLst/>
+          </a:prstGeom>
+          <a:noFill/>
+        </p:spPr>
+        <p:txBody>
+          <a:bodyPr wrap="square" lIns="0" tIns="0" rIns="0" bIns="0" anchor="ctr">
+            <a:normAutofit/>
+          </a:bodyPr>
+          <a:lstStyle/>
+          <a:p>
+            <a:pPr algn="ctr"/>
+            <a:r>
+              <a:rPr sz="1100" b="1" i="0">
+                <a:solidFill>
+                  <a:srgbClr val="E67700"/>
                 </a:solidFill>
                 <a:latin typeface="Calibri"/>
               </a:rPr>
-              <a:t>Internal docs and runbooks</a:t>
-            </a:r>
-          </a:p>
-        </p:txBody>
-      </p:sp>
+              <a:t>DATABRICKS</a:t>
+            </a:r>
+          </a:p>
+        </p:txBody>
+      </p:sp>
+      <p:sp>
+        <p:nvSpPr>
+          <p:cNvPr id="3037" name="Box 3037"/>
+          <p:cNvSpPr/>
+          <p:nvPr/>
+        </p:nvSpPr>
+        <p:spPr>
+          <a:xfrm>
+            <a:off x="2708910" y="4585399"/>
+            <a:ext cx="2114550" cy="640080"/>
+          </a:xfrm>
+          <a:prstGeom prst="roundRect">
+            <a:avLst>
+              <a:gd name="adj" fmla="val 6000"/>
+            </a:avLst>
+          </a:prstGeom>
+          <a:solidFill>
+            <a:srgbClr val="FFF9DB"/>
+          </a:solidFill>
+          <a:ln w="19050">
+            <a:solidFill>
+              <a:srgbClr val="E67700"/>
+            </a:solidFill>
+          </a:ln>
+          <a:effectLst/>
+        </p:spPr>
+        <p:txBody>
+          <a:bodyPr rtlCol="0" anchor="ctr"/>
+          <a:lstStyle/>
+          <a:p>
+            <a:pPr algn="ctr"/>
+            <a:endParaRPr/>
+          </a:p>
+        </p:txBody>
+      </p:sp>
+      <p:sp>
+        <p:nvSpPr>
+          <p:cNvPr id="3038" name="Label 3038"/>
+          <p:cNvSpPr txBox="1"/>
+          <p:nvPr/>
+        </p:nvSpPr>
+        <p:spPr>
+          <a:xfrm>
+            <a:off x="2782062" y="4585399"/>
+            <a:ext cx="1968246" cy="640080"/>
+          </a:xfrm>
+          <a:prstGeom prst="rect">
+            <a:avLst/>
+          </a:prstGeom>
+          <a:noFill/>
+        </p:spPr>
+        <p:txBody>
+          <a:bodyPr wrap="square" lIns="0" tIns="0" rIns="0" bIns="0" anchor="ctr">
+            <a:normAutofit/>
+          </a:bodyPr>
+          <a:lstStyle/>
+          <a:p>
+            <a:pPr algn="ctr"/>
+            <a:r>
+              <a:rPr sz="1100" b="1" i="0">
+                <a:solidFill>
+                  <a:srgbClr val="E67700"/>
+                </a:solidFill>
+                <a:latin typeface="Calibri"/>
+              </a:rPr>
+              <a:t>GITHUB / AZURE DEVOPS</a:t>
+            </a:r>
+          </a:p>
+        </p:txBody>
+      </p:sp>
+      <p:sp>
+        <p:nvSpPr>
+          <p:cNvPr id="3039" name="Box 3039"/>
+          <p:cNvSpPr/>
+          <p:nvPr/>
+        </p:nvSpPr>
+        <p:spPr>
+          <a:xfrm>
+            <a:off x="5006340" y="4585399"/>
+            <a:ext cx="2114550" cy="640080"/>
+          </a:xfrm>
+          <a:prstGeom prst="roundRect">
+            <a:avLst>
+              <a:gd name="adj" fmla="val 6000"/>
+            </a:avLst>
+          </a:prstGeom>
+          <a:solidFill>
+            <a:srgbClr val="FFF9DB"/>
+          </a:solidFill>
+          <a:ln w="19050">
+            <a:solidFill>
+              <a:srgbClr val="E67700"/>
+            </a:solidFill>
+          </a:ln>
+          <a:effectLst/>
+        </p:spPr>
+        <p:txBody>
+          <a:bodyPr rtlCol="0" anchor="ctr"/>
+          <a:lstStyle/>
+          <a:p>
+            <a:pPr algn="ctr"/>
+            <a:endParaRPr/>
+          </a:p>
+        </p:txBody>
+      </p:sp>
+      <p:sp>
+        <p:nvSpPr>
+          <p:cNvPr id="3040" name="Label 3040"/>
+          <p:cNvSpPr txBox="1"/>
+          <p:nvPr/>
+        </p:nvSpPr>
+        <p:spPr>
+          <a:xfrm>
+            <a:off x="5079492" y="4585399"/>
+            <a:ext cx="1968246" cy="640080"/>
+          </a:xfrm>
+          <a:prstGeom prst="rect">
+            <a:avLst/>
+          </a:prstGeom>
+          <a:noFill/>
+        </p:spPr>
+        <p:txBody>
+          <a:bodyPr wrap="square" lIns="0" tIns="0" rIns="0" bIns="0" anchor="ctr">
+            <a:normAutofit/>
+          </a:bodyPr>
+          <a:lstStyle/>
+          <a:p>
+            <a:pPr algn="ctr"/>
+            <a:r>
+              <a:rPr sz="1100" b="1" i="0">
+                <a:solidFill>
+                  <a:srgbClr val="E67700"/>
+                </a:solidFill>
+                <a:latin typeface="Calibri"/>
+              </a:rPr>
+              <a:t>CRM (SALESFORCE / DYNAMICS)</a:t>
+            </a:r>
+          </a:p>
+        </p:txBody>
+      </p:sp>
+      <p:sp>
+        <p:nvSpPr>
+          <p:cNvPr id="3041" name="Box 3041"/>
+          <p:cNvSpPr/>
+          <p:nvPr/>
+        </p:nvSpPr>
+        <p:spPr>
+          <a:xfrm>
+            <a:off x="7303770" y="4585399"/>
+            <a:ext cx="2114550" cy="640080"/>
+          </a:xfrm>
+          <a:prstGeom prst="roundRect">
+            <a:avLst>
+              <a:gd name="adj" fmla="val 6000"/>
+            </a:avLst>
+          </a:prstGeom>
+          <a:solidFill>
+            <a:srgbClr val="FFF5F5"/>
+          </a:solidFill>
+          <a:ln w="19050">
+            <a:solidFill>
+              <a:srgbClr val="C92A2A"/>
+            </a:solidFill>
+          </a:ln>
+          <a:effectLst/>
+        </p:spPr>
+        <p:txBody>
+          <a:bodyPr rtlCol="0" anchor="ctr"/>
+          <a:lstStyle/>
+          <a:p>
+            <a:pPr algn="ctr"/>
+            <a:endParaRPr/>
+          </a:p>
+        </p:txBody>
+      </p:sp>
+      <p:sp>
+        <p:nvSpPr>
+          <p:cNvPr id="3042" name="Label 3042"/>
+          <p:cNvSpPr txBox="1"/>
+          <p:nvPr/>
+        </p:nvSpPr>
+        <p:spPr>
+          <a:xfrm>
+            <a:off x="7376922" y="4585399"/>
+            <a:ext cx="1968246" cy="640080"/>
+          </a:xfrm>
+          <a:prstGeom prst="rect">
+            <a:avLst/>
+          </a:prstGeom>
+          <a:noFill/>
+        </p:spPr>
+        <p:txBody>
+          <a:bodyPr wrap="square" lIns="0" tIns="0" rIns="0" bIns="0" anchor="ctr">
+            <a:normAutofit/>
+          </a:bodyPr>
+          <a:lstStyle/>
+          <a:p>
+            <a:pPr algn="ctr"/>
+            <a:r>
+              <a:rPr sz="1100" b="1" i="0">
+                <a:solidFill>
+                  <a:srgbClr val="C92A2A"/>
+                </a:solidFill>
+                <a:latin typeface="Calibri"/>
+              </a:rPr>
+              <a:t>MODEL SERVING LAYER</a:t>
+            </a:r>
+          </a:p>
+        </p:txBody>
+      </p:sp>
+      <p:sp>
+        <p:nvSpPr>
+          <p:cNvPr id="3043" name="Sidebar 3044"/>
+          <p:cNvSpPr/>
+          <p:nvPr/>
+        </p:nvSpPr>
+        <p:spPr>
+          <a:xfrm>
+            <a:off x="9646920" y="1823911"/>
+            <a:ext cx="2148840" cy="3401568"/>
+          </a:xfrm>
+          <a:prstGeom prst="rect">
+            <a:avLst/>
+          </a:prstGeom>
+          <a:noFill/>
+          <a:ln w="19050">
+            <a:solidFill>
+              <a:srgbClr val="495057"/>
+            </a:solidFill>
+          </a:ln>
+        </p:spPr>
+        <p:txBody>
+          <a:bodyPr rtlCol="0"/>
+          <a:lstStyle/>
+          <a:p>
+            <a:endParaRPr/>
+          </a:p>
+        </p:txBody>
+      </p:sp>
+      <p:sp>
+        <p:nvSpPr>
+          <p:cNvPr id="3045" name="SidebarLabel 3046"/>
+          <p:cNvSpPr txBox="1"/>
+          <p:nvPr/>
+        </p:nvSpPr>
+        <p:spPr>
+          <a:xfrm>
+            <a:off x="9646920" y="1869631"/>
+            <a:ext cx="2148840" cy="274320"/>
+          </a:xfrm>
+          <a:prstGeom prst="rect">
+            <a:avLst/>
+          </a:prstGeom>
+          <a:noFill/>
+        </p:spPr>
+        <p:txBody>
+          <a:bodyPr wrap="square" lIns="0" tIns="0" rIns="0" bIns="0" anchor="ctr">
+            <a:normAutofit/>
+          </a:bodyPr>
+          <a:lstStyle/>
+          <a:p>
+            <a:pPr algn="ctr"/>
+            <a:r>
+              <a:rPr sz="1200" b="1" i="0">
+                <a:solidFill>
+                  <a:srgbClr val="495057"/>
+                </a:solidFill>
+                <a:latin typeface="Calibri"/>
+              </a:rPr>
+              <a:t>CROSS-CUTTING</a:t>
+            </a:r>
+          </a:p>
+        </p:txBody>
+      </p:sp>
+      <p:sp>
+        <p:nvSpPr>
+          <p:cNvPr id="3047" name="SideBox 3047"/>
+          <p:cNvSpPr/>
+          <p:nvPr/>
+        </p:nvSpPr>
+        <p:spPr>
+          <a:xfrm>
+            <a:off x="9756648" y="2290255"/>
+            <a:ext cx="1929384" cy="637794"/>
+          </a:xfrm>
+          <a:prstGeom prst="roundRect">
+            <a:avLst>
+              <a:gd name="adj" fmla="val 6000"/>
+            </a:avLst>
+          </a:prstGeom>
+          <a:solidFill>
+            <a:srgbClr val="FFFFFF"/>
+          </a:solidFill>
+          <a:ln w="19050">
+            <a:solidFill>
+              <a:srgbClr val="1971C2"/>
+            </a:solidFill>
+          </a:ln>
+          <a:effectLst/>
+        </p:spPr>
+        <p:txBody>
+          <a:bodyPr rtlCol="0" anchor="ctr"/>
+          <a:lstStyle/>
+          <a:p>
+            <a:pPr algn="ctr"/>
+            <a:endParaRPr/>
+          </a:p>
+        </p:txBody>
+      </p:sp>
+      <p:sp>
+        <p:nvSpPr>
+          <p:cNvPr id="3048" name="SideLbl 3049"/>
+          <p:cNvSpPr txBox="1"/>
+          <p:nvPr/>
+        </p:nvSpPr>
+        <p:spPr>
+          <a:xfrm>
+            <a:off x="9756648" y="2290255"/>
+            <a:ext cx="1929384" cy="637794"/>
+          </a:xfrm>
+          <a:prstGeom prst="rect">
+            <a:avLst/>
+          </a:prstGeom>
+          <a:noFill/>
+        </p:spPr>
+        <p:txBody>
+          <a:bodyPr wrap="square" lIns="0" tIns="0" rIns="0" bIns="0" anchor="ctr">
+            <a:normAutofit/>
+          </a:bodyPr>
+          <a:lstStyle/>
+          <a:p>
+            <a:pPr algn="ctr"/>
+            <a:r>
+              <a:rPr sz="1050" b="1" i="0">
+                <a:solidFill>
+                  <a:srgbClr val="1971C2"/>
+                </a:solidFill>
+                <a:latin typeface="Calibri"/>
+              </a:rPr>
+              <a:t>OBSERVABILITY</a:t>
+            </a:r>
+          </a:p>
+        </p:txBody>
+      </p:sp>
+      <p:sp>
+        <p:nvSpPr>
+          <p:cNvPr id="3050" name="SideBox 3050"/>
+          <p:cNvSpPr/>
+          <p:nvPr/>
+        </p:nvSpPr>
+        <p:spPr>
+          <a:xfrm>
+            <a:off x="9756648" y="3037777"/>
+            <a:ext cx="1929384" cy="637794"/>
+          </a:xfrm>
+          <a:prstGeom prst="roundRect">
+            <a:avLst>
+              <a:gd name="adj" fmla="val 6000"/>
+            </a:avLst>
+          </a:prstGeom>
+          <a:solidFill>
+            <a:srgbClr val="FFFFFF"/>
+          </a:solidFill>
+          <a:ln w="19050">
+            <a:solidFill>
+              <a:srgbClr val="C92A2A"/>
+            </a:solidFill>
+          </a:ln>
+          <a:effectLst/>
+        </p:spPr>
+        <p:txBody>
+          <a:bodyPr rtlCol="0" anchor="ctr"/>
+          <a:lstStyle/>
+          <a:p>
+            <a:pPr algn="ctr"/>
+            <a:endParaRPr/>
+          </a:p>
+        </p:txBody>
+      </p:sp>
+      <p:sp>
+        <p:nvSpPr>
+          <p:cNvPr id="3051" name="SideLbl 3052"/>
+          <p:cNvSpPr txBox="1"/>
+          <p:nvPr/>
+        </p:nvSpPr>
+        <p:spPr>
+          <a:xfrm>
+            <a:off x="9756648" y="3037777"/>
+            <a:ext cx="1929384" cy="637794"/>
+          </a:xfrm>
+          <a:prstGeom prst="rect">
+            <a:avLst/>
+          </a:prstGeom>
+          <a:noFill/>
+        </p:spPr>
+        <p:txBody>
+          <a:bodyPr wrap="square" lIns="0" tIns="0" rIns="0" bIns="0" anchor="ctr">
+            <a:normAutofit/>
+          </a:bodyPr>
+          <a:lstStyle/>
+          <a:p>
+            <a:pPr algn="ctr"/>
+            <a:r>
+              <a:rPr sz="1050" b="1" i="0">
+                <a:solidFill>
+                  <a:srgbClr val="C92A2A"/>
+                </a:solidFill>
+                <a:latin typeface="Calibri"/>
+              </a:rPr>
+              <a:t>SECURITY</a:t>
+            </a:r>
+          </a:p>
+        </p:txBody>
+      </p:sp>
+      <p:sp>
+        <p:nvSpPr>
+          <p:cNvPr id="3053" name="SideBox 3053"/>
+          <p:cNvSpPr/>
+          <p:nvPr/>
+        </p:nvSpPr>
+        <p:spPr>
+          <a:xfrm>
+            <a:off x="9756648" y="3785299"/>
+            <a:ext cx="1929384" cy="637794"/>
+          </a:xfrm>
+          <a:prstGeom prst="roundRect">
+            <a:avLst>
+              <a:gd name="adj" fmla="val 6000"/>
+            </a:avLst>
+          </a:prstGeom>
+          <a:solidFill>
+            <a:srgbClr val="FFFFFF"/>
+          </a:solidFill>
+          <a:ln w="19050">
+            <a:solidFill>
+              <a:srgbClr val="2B8A3E"/>
+            </a:solidFill>
+          </a:ln>
+          <a:effectLst/>
+        </p:spPr>
+        <p:txBody>
+          <a:bodyPr rtlCol="0" anchor="ctr"/>
+          <a:lstStyle/>
+          <a:p>
+            <a:pPr algn="ctr"/>
+            <a:endParaRPr/>
+          </a:p>
+        </p:txBody>
+      </p:sp>
+      <p:sp>
+        <p:nvSpPr>
+          <p:cNvPr id="3054" name="SideLbl 3055"/>
+          <p:cNvSpPr txBox="1"/>
+          <p:nvPr/>
+        </p:nvSpPr>
+        <p:spPr>
+          <a:xfrm>
+            <a:off x="9756648" y="3785299"/>
+            <a:ext cx="1929384" cy="637794"/>
+          </a:xfrm>
+          <a:prstGeom prst="rect">
+            <a:avLst/>
+          </a:prstGeom>
+          <a:noFill/>
+        </p:spPr>
+        <p:txBody>
+          <a:bodyPr wrap="square" lIns="0" tIns="0" rIns="0" bIns="0" anchor="ctr">
+            <a:normAutofit/>
+          </a:bodyPr>
+          <a:lstStyle/>
+          <a:p>
+            <a:pPr algn="ctr"/>
+            <a:r>
+              <a:rPr sz="1050" b="1" i="0">
+                <a:solidFill>
+                  <a:srgbClr val="2B8A3E"/>
+                </a:solidFill>
+                <a:latin typeface="Calibri"/>
+              </a:rPr>
+              <a:t>CONTINUOUS QA</a:t>
+            </a:r>
+          </a:p>
+        </p:txBody>
+      </p:sp>
+      <p:sp>
+        <p:nvSpPr>
+          <p:cNvPr id="3056" name="SideBox 3056"/>
+          <p:cNvSpPr/>
+          <p:nvPr/>
+        </p:nvSpPr>
+        <p:spPr>
+          <a:xfrm>
+            <a:off x="9756648" y="4532821"/>
+            <a:ext cx="1929384" cy="637794"/>
+          </a:xfrm>
+          <a:prstGeom prst="roundRect">
+            <a:avLst>
+              <a:gd name="adj" fmla="val 6000"/>
+            </a:avLst>
+          </a:prstGeom>
+          <a:solidFill>
+            <a:srgbClr val="FFFFFF"/>
+          </a:solidFill>
+          <a:ln w="19050">
+            <a:solidFill>
+              <a:srgbClr val="E67700"/>
+            </a:solidFill>
+          </a:ln>
+          <a:effectLst/>
+        </p:spPr>
+        <p:txBody>
+          <a:bodyPr rtlCol="0" anchor="ctr"/>
+          <a:lstStyle/>
+          <a:p>
+            <a:pPr algn="ctr"/>
+            <a:endParaRPr/>
+          </a:p>
+        </p:txBody>
+      </p:sp>
+      <p:sp>
+        <p:nvSpPr>
+          <p:cNvPr id="3057" name="SideLbl 3058"/>
+          <p:cNvSpPr txBox="1"/>
+          <p:nvPr/>
+        </p:nvSpPr>
+        <p:spPr>
+          <a:xfrm>
+            <a:off x="9756648" y="4532821"/>
+            <a:ext cx="1929384" cy="637794"/>
+          </a:xfrm>
+          <a:prstGeom prst="rect">
+            <a:avLst/>
+          </a:prstGeom>
+          <a:noFill/>
+        </p:spPr>
+        <p:txBody>
+          <a:bodyPr wrap="square" lIns="0" tIns="0" rIns="0" bIns="0" anchor="ctr">
+            <a:normAutofit/>
+          </a:bodyPr>
+          <a:lstStyle/>
+          <a:p>
+            <a:pPr algn="ctr"/>
+            <a:r>
+              <a:rPr sz="1050" b="1" i="0">
+                <a:solidFill>
+                  <a:srgbClr val="E67700"/>
+                </a:solidFill>
+                <a:latin typeface="Calibri"/>
+              </a:rPr>
+              <a:t>COST GOVERNANCE</a:t>
+            </a:r>
+          </a:p>
+        </p:txBody>
+      </p:sp>
+      <p:cxnSp>
+        <p:nvCxnSpPr>
+          <p:cNvPr id="4" name="Straight Arrow Connector 3">
+            <a:extLst>
+              <a:ext uri="{FF2B5EF4-FFF2-40B4-BE49-F238E27FC236}">
+                <a16:creationId xmlns:a16="http://schemas.microsoft.com/office/drawing/2014/main" id="{8B2A3984-56C2-C788-3D28-13F1580F28DC}"/>
+              </a:ext>
+            </a:extLst>
+          </p:cNvPr>
+          <p:cNvCxnSpPr>
+            <a:stCxn id="3027" idx="2"/>
+            <a:endCxn id="3032" idx="0"/>
+          </p:cNvCxnSpPr>
+          <p:nvPr/>
+        </p:nvCxnSpPr>
+        <p:spPr>
+          <a:xfrm>
+            <a:off x="4914900" y="3616135"/>
+            <a:ext cx="0" cy="228600"/>
+          </a:xfrm>
+          <a:prstGeom prst="straightConnector1">
+            <a:avLst/>
+          </a:prstGeom>
+          <a:ln>
+            <a:tailEnd type="triangle"/>
+          </a:ln>
+        </p:spPr>
+        <p:style>
+          <a:lnRef idx="1">
+            <a:schemeClr val="dk1"/>
+          </a:lnRef>
+          <a:fillRef idx="0">
+            <a:schemeClr val="dk1"/>
+          </a:fillRef>
+          <a:effectRef idx="0">
+            <a:schemeClr val="dk1"/>
+          </a:effectRef>
+          <a:fontRef idx="minor">
+            <a:schemeClr val="tx1"/>
+          </a:fontRef>
+        </p:style>
+      </p:cxnSp>
     </p:spTree>
     <p:extLst>
       <p:ext uri="{BB962C8B-B14F-4D97-AF65-F5344CB8AC3E}">
-        <p14:creationId xmlns:p14="http://schemas.microsoft.com/office/powerpoint/2010/main" val="2305456350"/>
+        <p14:creationId xmlns:p14="http://schemas.microsoft.com/office/powerpoint/2010/main" val="4278405140"/>
       </p:ext>
     </p:extLst>
   </p:cSld>
@@ -9078,7 +9403,7 @@
                 <a:ea typeface="Calibri"/>
                 <a:cs typeface="Calibri"/>
               </a:rPr>
-              <a:t>QA Strategy</a:t>
+              <a:t>Solution Quality</a:t>
             </a:r>
           </a:p>
         </p:txBody>
@@ -9091,8 +9416,8 @@
         </p:nvSpPr>
         <p:spPr>
           <a:xfrm>
-            <a:off x="539495" y="1417320"/>
-            <a:ext cx="3520440" cy="3200400"/>
+            <a:off x="585215" y="1325880"/>
+            <a:ext cx="2514600" cy="1554480"/>
           </a:xfrm>
           <a:prstGeom prst="roundRect">
             <a:avLst>
@@ -9132,17 +9457,102 @@
       </p:sp>
       <p:sp>
         <p:nvSpPr>
-          <p:cNvPr id="1034" name="Oval 1033"/>
+          <p:cNvPr id="1034" name="TextBox 1033"/>
+          <p:cNvSpPr txBox="1"/>
+          <p:nvPr/>
+        </p:nvSpPr>
+        <p:spPr>
+          <a:xfrm>
+            <a:off x="722375" y="1325880"/>
+            <a:ext cx="2240280" cy="1554480"/>
+          </a:xfrm>
+          <a:prstGeom prst="rect">
+            <a:avLst/>
+          </a:prstGeom>
+          <a:noFill/>
+        </p:spPr>
+        <p:txBody>
+          <a:bodyPr wrap="square" lIns="0" tIns="0" rIns="0" bIns="0" anchor="ctr">
+            <a:spAutoFit/>
+          </a:bodyPr>
+          <a:lstStyle/>
+          <a:p>
+            <a:pPr algn="ctr"/>
+            <a:r>
+              <a:rPr sz="1400" b="1" i="0">
+                <a:solidFill>
+                  <a:srgbClr val="263030"/>
+                </a:solidFill>
+                <a:latin typeface="Calibri"/>
+              </a:rPr>
+              <a:t>Natural-Language</a:t>
+            </a:r>
+          </a:p>
+          <a:p>
+            <a:pPr algn="ctr"/>
+            <a:r>
+              <a:rPr sz="1400" b="1" i="0">
+                <a:solidFill>
+                  <a:srgbClr val="263030"/>
+                </a:solidFill>
+                <a:latin typeface="Calibri"/>
+              </a:rPr>
+              <a:t>Query</a:t>
+            </a:r>
+          </a:p>
+        </p:txBody>
+      </p:sp>
+      <p:cxnSp>
+        <p:nvCxnSpPr>
+          <p:cNvPr id="1035" name="Connector 1034"/>
+          <p:cNvCxnSpPr/>
+          <p:nvPr/>
+        </p:nvCxnSpPr>
+        <p:spPr>
+          <a:xfrm>
+            <a:off x="3099815" y="2103120"/>
+            <a:ext cx="320041" cy="0"/>
+          </a:xfrm>
+          <a:prstGeom prst="line">
+            <a:avLst/>
+          </a:prstGeom>
+          <a:ln w="31750">
+            <a:solidFill>
+              <a:srgbClr val="2DB6BB"/>
+            </a:solidFill>
+            <a:tailEnd type="triangle" w="med" len="med"/>
+          </a:ln>
+        </p:spPr>
+        <p:style>
+          <a:lnRef idx="2">
+            <a:schemeClr val="accent1"/>
+          </a:lnRef>
+          <a:fillRef idx="0">
+            <a:schemeClr val="accent1"/>
+          </a:fillRef>
+          <a:effectRef idx="1">
+            <a:schemeClr val="accent1"/>
+          </a:effectRef>
+          <a:fontRef idx="minor">
+            <a:schemeClr val="tx1"/>
+          </a:fontRef>
+        </p:style>
+      </p:cxnSp>
+      <p:sp>
+        <p:nvSpPr>
+          <p:cNvPr id="1036" name="Rounded Rectangle 1035"/>
           <p:cNvSpPr/>
           <p:nvPr/>
         </p:nvSpPr>
         <p:spPr>
           <a:xfrm>
-            <a:off x="1979675" y="1691640"/>
-            <a:ext cx="640080" cy="640080"/>
-          </a:xfrm>
-          <a:prstGeom prst="ellipse">
-            <a:avLst/>
+            <a:off x="3419856" y="1325880"/>
+            <a:ext cx="2514600" cy="1554480"/>
+          </a:xfrm>
+          <a:prstGeom prst="roundRect">
+            <a:avLst>
+              <a:gd name="adj" fmla="val 6000"/>
+            </a:avLst>
           </a:prstGeom>
           <a:solidFill>
             <a:srgbClr val="1F8E91"/>
@@ -9167,114 +9577,107 @@
           </a:fontRef>
         </p:style>
         <p:txBody>
-          <a:bodyPr wrap="none" lIns="0" tIns="0" rIns="0" bIns="0" rtlCol="0" anchor="ctr"/>
+          <a:bodyPr rtlCol="0" anchor="ctr"/>
           <a:lstStyle/>
           <a:p>
             <a:pPr algn="ctr"/>
-            <a:r>
-              <a:rPr sz="2200" b="1">
+            <a:endParaRPr/>
+          </a:p>
+        </p:txBody>
+      </p:sp>
+      <p:sp>
+        <p:nvSpPr>
+          <p:cNvPr id="1037" name="TextBox 1036"/>
+          <p:cNvSpPr txBox="1"/>
+          <p:nvPr/>
+        </p:nvSpPr>
+        <p:spPr>
+          <a:xfrm>
+            <a:off x="3557015" y="1325880"/>
+            <a:ext cx="2240280" cy="1554480"/>
+          </a:xfrm>
+          <a:prstGeom prst="rect">
+            <a:avLst/>
+          </a:prstGeom>
+          <a:noFill/>
+        </p:spPr>
+        <p:txBody>
+          <a:bodyPr wrap="square" lIns="0" tIns="0" rIns="0" bIns="0" anchor="ctr">
+            <a:spAutoFit/>
+          </a:bodyPr>
+          <a:lstStyle/>
+          <a:p>
+            <a:pPr algn="ctr"/>
+            <a:r>
+              <a:rPr sz="1400" b="1" i="0">
                 <a:solidFill>
                   <a:srgbClr val="FFFFFF"/>
                 </a:solidFill>
                 <a:latin typeface="Calibri"/>
               </a:rPr>
-              <a:t>1</a:t>
-            </a:r>
-          </a:p>
-        </p:txBody>
-      </p:sp>
-      <p:sp>
-        <p:nvSpPr>
-          <p:cNvPr id="1035" name="TextBox 1034"/>
-          <p:cNvSpPr txBox="1"/>
-          <p:nvPr/>
-        </p:nvSpPr>
-        <p:spPr>
-          <a:xfrm>
-            <a:off x="722375" y="2514600"/>
-            <a:ext cx="3154680" cy="685800"/>
-          </a:xfrm>
-          <a:prstGeom prst="rect">
-            <a:avLst/>
-          </a:prstGeom>
-          <a:noFill/>
-        </p:spPr>
-        <p:txBody>
-          <a:bodyPr wrap="square" lIns="0" tIns="0" rIns="0" bIns="0" anchor="t">
-            <a:spAutoFit/>
-          </a:bodyPr>
-          <a:lstStyle/>
+              <a:t>Coordinator</a:t>
+            </a:r>
+          </a:p>
           <a:p>
             <a:pPr algn="ctr"/>
             <a:r>
-              <a:rPr sz="1600" b="1" i="0">
-                <a:solidFill>
-                  <a:srgbClr val="1F8E91"/>
+              <a:rPr sz="1400" b="1" i="0">
+                <a:solidFill>
+                  <a:srgbClr val="FFFFFF"/>
                 </a:solidFill>
                 <a:latin typeface="Calibri"/>
               </a:rPr>
-              <a:t>Routing Accuracy</a:t>
-            </a:r>
-          </a:p>
-        </p:txBody>
-      </p:sp>
-      <p:sp>
-        <p:nvSpPr>
-          <p:cNvPr id="1036" name="TextBox 1035"/>
-          <p:cNvSpPr txBox="1"/>
-          <p:nvPr/>
-        </p:nvSpPr>
-        <p:spPr>
-          <a:xfrm>
-            <a:off x="768095" y="3246120"/>
-            <a:ext cx="3063240" cy="1188720"/>
-          </a:xfrm>
-          <a:prstGeom prst="rect">
+              <a:t>(LLM Routing)</a:t>
+            </a:r>
+          </a:p>
+        </p:txBody>
+      </p:sp>
+      <p:cxnSp>
+        <p:nvCxnSpPr>
+          <p:cNvPr id="1038" name="Connector 1037"/>
+          <p:cNvCxnSpPr/>
+          <p:nvPr/>
+        </p:nvCxnSpPr>
+        <p:spPr>
+          <a:xfrm>
+            <a:off x="5934456" y="2103120"/>
+            <a:ext cx="320040" cy="0"/>
+          </a:xfrm>
+          <a:prstGeom prst="line">
             <a:avLst/>
           </a:prstGeom>
-          <a:noFill/>
-        </p:spPr>
-        <p:txBody>
-          <a:bodyPr wrap="square" lIns="0" tIns="0" rIns="0" bIns="0" anchor="t">
-            <a:spAutoFit/>
-          </a:bodyPr>
-          <a:lstStyle/>
-          <a:p>
-            <a:pPr algn="ctr"/>
-            <a:r>
-              <a:rPr sz="1300" b="0" i="0">
-                <a:solidFill>
-                  <a:srgbClr val="5B6B6B"/>
-                </a:solidFill>
-                <a:latin typeface="Calibri"/>
-              </a:rPr>
-              <a:t>Every query graded against</a:t>
-            </a:r>
-          </a:p>
-          <a:p>
-            <a:pPr algn="ctr"/>
-            <a:r>
-              <a:rPr sz="1300" b="0" i="0">
-                <a:solidFill>
-                  <a:srgbClr val="5B6B6B"/>
-                </a:solidFill>
-                <a:latin typeface="Calibri"/>
-              </a:rPr>
-              <a:t>expected domain(s)</a:t>
-            </a:r>
-          </a:p>
-        </p:txBody>
-      </p:sp>
-      <p:sp>
-        <p:nvSpPr>
-          <p:cNvPr id="1037" name="Rounded Rectangle 1036"/>
+          <a:ln w="31750">
+            <a:solidFill>
+              <a:srgbClr val="2DB6BB"/>
+            </a:solidFill>
+            <a:tailEnd type="triangle" w="med" len="med"/>
+          </a:ln>
+        </p:spPr>
+        <p:style>
+          <a:lnRef idx="2">
+            <a:schemeClr val="accent1"/>
+          </a:lnRef>
+          <a:fillRef idx="0">
+            <a:schemeClr val="accent1"/>
+          </a:fillRef>
+          <a:effectRef idx="1">
+            <a:schemeClr val="accent1"/>
+          </a:effectRef>
+          <a:fontRef idx="minor">
+            <a:schemeClr val="tx1"/>
+          </a:fontRef>
+        </p:style>
+      </p:cxnSp>
+      <p:sp>
+        <p:nvSpPr>
+          <p:cNvPr id="1039" name="Rounded Rectangle 1038"/>
           <p:cNvSpPr/>
           <p:nvPr/>
         </p:nvSpPr>
         <p:spPr>
           <a:xfrm>
-            <a:off x="4334256" y="1417320"/>
-            <a:ext cx="3520440" cy="3200400"/>
+            <a:off x="6254496" y="1325880"/>
+            <a:ext cx="2514600" cy="1554480"/>
           </a:xfrm>
           <a:prstGeom prst="roundRect">
             <a:avLst>
@@ -9314,161 +9717,97 @@
       </p:sp>
       <p:sp>
         <p:nvSpPr>
-          <p:cNvPr id="1038" name="Oval 1037"/>
-          <p:cNvSpPr/>
-          <p:nvPr/>
-        </p:nvSpPr>
-        <p:spPr>
-          <a:xfrm>
-            <a:off x="5774436" y="1691640"/>
-            <a:ext cx="640080" cy="640080"/>
-          </a:xfrm>
-          <a:prstGeom prst="ellipse">
+          <p:cNvPr id="1040" name="TextBox 1039"/>
+          <p:cNvSpPr txBox="1"/>
+          <p:nvPr/>
+        </p:nvSpPr>
+        <p:spPr>
+          <a:xfrm>
+            <a:off x="6391656" y="1325880"/>
+            <a:ext cx="2240280" cy="1554480"/>
+          </a:xfrm>
+          <a:prstGeom prst="rect">
             <a:avLst/>
           </a:prstGeom>
-          <a:solidFill>
-            <a:srgbClr val="1F8E91"/>
-          </a:solidFill>
-          <a:ln>
-            <a:noFill/>
+          <a:noFill/>
+        </p:spPr>
+        <p:txBody>
+          <a:bodyPr wrap="square" lIns="0" tIns="0" rIns="0" bIns="0" anchor="ctr">
+            <a:spAutoFit/>
+          </a:bodyPr>
+          <a:lstStyle/>
+          <a:p>
+            <a:pPr algn="ctr"/>
+            <a:r>
+              <a:rPr sz="1400" b="1" i="0">
+                <a:solidFill>
+                  <a:srgbClr val="263030"/>
+                </a:solidFill>
+                <a:latin typeface="Calibri"/>
+              </a:rPr>
+              <a:t>Specialist</a:t>
+            </a:r>
+          </a:p>
+          <a:p>
+            <a:pPr algn="ctr"/>
+            <a:r>
+              <a:rPr sz="1400" b="1" i="0">
+                <a:solidFill>
+                  <a:srgbClr val="263030"/>
+                </a:solidFill>
+                <a:latin typeface="Calibri"/>
+              </a:rPr>
+              <a:t>Agent</a:t>
+            </a:r>
+          </a:p>
+        </p:txBody>
+      </p:sp>
+      <p:cxnSp>
+        <p:nvCxnSpPr>
+          <p:cNvPr id="1041" name="Connector 1040"/>
+          <p:cNvCxnSpPr/>
+          <p:nvPr/>
+        </p:nvCxnSpPr>
+        <p:spPr>
+          <a:xfrm>
+            <a:off x="8769096" y="2103120"/>
+            <a:ext cx="320040" cy="0"/>
+          </a:xfrm>
+          <a:prstGeom prst="line">
+            <a:avLst/>
+          </a:prstGeom>
+          <a:ln w="31750">
+            <a:solidFill>
+              <a:srgbClr val="2DB6BB"/>
+            </a:solidFill>
+            <a:tailEnd type="triangle" w="med" len="med"/>
           </a:ln>
-          <a:effectLst/>
         </p:spPr>
         <p:style>
-          <a:lnRef idx="1">
+          <a:lnRef idx="2">
             <a:schemeClr val="accent1"/>
           </a:lnRef>
-          <a:fillRef idx="3">
+          <a:fillRef idx="0">
             <a:schemeClr val="accent1"/>
           </a:fillRef>
-          <a:effectRef idx="2">
+          <a:effectRef idx="1">
             <a:schemeClr val="accent1"/>
           </a:effectRef>
           <a:fontRef idx="minor">
-            <a:schemeClr val="lt1"/>
+            <a:schemeClr val="tx1"/>
           </a:fontRef>
         </p:style>
-        <p:txBody>
-          <a:bodyPr wrap="none" lIns="0" tIns="0" rIns="0" bIns="0" rtlCol="0" anchor="ctr"/>
-          <a:lstStyle/>
-          <a:p>
-            <a:pPr algn="ctr"/>
-            <a:r>
-              <a:rPr sz="2200" b="1">
-                <a:solidFill>
-                  <a:srgbClr val="FFFFFF"/>
-                </a:solidFill>
-                <a:latin typeface="Calibri"/>
-              </a:rPr>
-              <a:t>2</a:t>
-            </a:r>
-          </a:p>
-        </p:txBody>
-      </p:sp>
-      <p:sp>
-        <p:nvSpPr>
-          <p:cNvPr id="1039" name="TextBox 1038"/>
-          <p:cNvSpPr txBox="1"/>
-          <p:nvPr/>
-        </p:nvSpPr>
-        <p:spPr>
-          <a:xfrm>
-            <a:off x="4517136" y="2514600"/>
-            <a:ext cx="3154680" cy="685800"/>
-          </a:xfrm>
-          <a:prstGeom prst="rect">
-            <a:avLst/>
-          </a:prstGeom>
-          <a:noFill/>
-        </p:spPr>
-        <p:txBody>
-          <a:bodyPr wrap="square" lIns="0" tIns="0" rIns="0" bIns="0" anchor="t">
-            <a:spAutoFit/>
-          </a:bodyPr>
-          <a:lstStyle/>
-          <a:p>
-            <a:pPr algn="ctr"/>
-            <a:r>
-              <a:rPr sz="1600" b="1" i="0">
-                <a:solidFill>
-                  <a:srgbClr val="1F8E91"/>
-                </a:solidFill>
-                <a:latin typeface="Calibri"/>
-              </a:rPr>
-              <a:t>Grounding &amp;</a:t>
-            </a:r>
-          </a:p>
-          <a:p>
-            <a:pPr algn="ctr"/>
-            <a:r>
-              <a:rPr sz="1600" b="1" i="0">
-                <a:solidFill>
-                  <a:srgbClr val="1F8E91"/>
-                </a:solidFill>
-                <a:latin typeface="Calibri"/>
-              </a:rPr>
-              <a:t>Citations</a:t>
-            </a:r>
-          </a:p>
-        </p:txBody>
-      </p:sp>
-      <p:sp>
-        <p:nvSpPr>
-          <p:cNvPr id="1040" name="TextBox 1039"/>
-          <p:cNvSpPr txBox="1"/>
-          <p:nvPr/>
-        </p:nvSpPr>
-        <p:spPr>
-          <a:xfrm>
-            <a:off x="4562856" y="3246120"/>
-            <a:ext cx="3063240" cy="1188720"/>
-          </a:xfrm>
-          <a:prstGeom prst="rect">
-            <a:avLst/>
-          </a:prstGeom>
-          <a:noFill/>
-        </p:spPr>
-        <p:txBody>
-          <a:bodyPr wrap="square" lIns="0" tIns="0" rIns="0" bIns="0" anchor="t">
-            <a:spAutoFit/>
-          </a:bodyPr>
-          <a:lstStyle/>
-          <a:p>
-            <a:pPr algn="ctr"/>
-            <a:r>
-              <a:rPr sz="1300" b="0" i="0">
-                <a:solidFill>
-                  <a:srgbClr val="5B6B6B"/>
-                </a:solidFill>
-                <a:latin typeface="Calibri"/>
-              </a:rPr>
-              <a:t>Citation checked against</a:t>
-            </a:r>
-          </a:p>
-          <a:p>
-            <a:pPr algn="ctr"/>
-            <a:r>
-              <a:rPr sz="1300" b="0" i="0">
-                <a:solidFill>
-                  <a:srgbClr val="5B6B6B"/>
-                </a:solidFill>
-                <a:latin typeface="Calibri"/>
-              </a:rPr>
-              <a:t>the record, not just present</a:t>
-            </a:r>
-          </a:p>
-        </p:txBody>
-      </p:sp>
-      <p:sp>
-        <p:nvSpPr>
-          <p:cNvPr id="1041" name="Rounded Rectangle 1040"/>
+      </p:cxnSp>
+      <p:sp>
+        <p:nvSpPr>
+          <p:cNvPr id="1042" name="Rounded Rectangle 1041"/>
           <p:cNvSpPr/>
           <p:nvPr/>
         </p:nvSpPr>
         <p:spPr>
           <a:xfrm>
-            <a:off x="8129016" y="1417320"/>
-            <a:ext cx="3520440" cy="3200400"/>
+            <a:off x="9089136" y="1325880"/>
+            <a:ext cx="2514600" cy="1554480"/>
           </a:xfrm>
           <a:prstGeom prst="roundRect">
             <a:avLst>
@@ -9508,149 +9847,61 @@
       </p:sp>
       <p:sp>
         <p:nvSpPr>
-          <p:cNvPr id="1042" name="Oval 1041"/>
-          <p:cNvSpPr/>
-          <p:nvPr/>
-        </p:nvSpPr>
-        <p:spPr>
-          <a:xfrm>
-            <a:off x="9569196" y="1691640"/>
-            <a:ext cx="640080" cy="640080"/>
-          </a:xfrm>
-          <a:prstGeom prst="ellipse">
+          <p:cNvPr id="1043" name="TextBox 1042"/>
+          <p:cNvSpPr txBox="1"/>
+          <p:nvPr/>
+        </p:nvSpPr>
+        <p:spPr>
+          <a:xfrm>
+            <a:off x="9226296" y="1325880"/>
+            <a:ext cx="2240280" cy="1554480"/>
+          </a:xfrm>
+          <a:prstGeom prst="rect">
             <a:avLst/>
           </a:prstGeom>
-          <a:solidFill>
-            <a:srgbClr val="1F8E91"/>
-          </a:solidFill>
-          <a:ln>
-            <a:noFill/>
-          </a:ln>
-          <a:effectLst/>
-        </p:spPr>
-        <p:style>
-          <a:lnRef idx="1">
-            <a:schemeClr val="accent1"/>
-          </a:lnRef>
-          <a:fillRef idx="3">
-            <a:schemeClr val="accent1"/>
-          </a:fillRef>
-          <a:effectRef idx="2">
-            <a:schemeClr val="accent1"/>
-          </a:effectRef>
-          <a:fontRef idx="minor">
-            <a:schemeClr val="lt1"/>
-          </a:fontRef>
-        </p:style>
-        <p:txBody>
-          <a:bodyPr wrap="none" lIns="0" tIns="0" rIns="0" bIns="0" rtlCol="0" anchor="ctr"/>
+          <a:noFill/>
+        </p:spPr>
+        <p:txBody>
+          <a:bodyPr wrap="square" lIns="0" tIns="0" rIns="0" bIns="0" anchor="ctr">
+            <a:spAutoFit/>
+          </a:bodyPr>
           <a:lstStyle/>
           <a:p>
             <a:pPr algn="ctr"/>
             <a:r>
-              <a:rPr sz="2200" b="1">
-                <a:solidFill>
-                  <a:srgbClr val="FFFFFF"/>
+              <a:rPr sz="1400" b="1" i="0">
+                <a:solidFill>
+                  <a:srgbClr val="263030"/>
                 </a:solidFill>
                 <a:latin typeface="Calibri"/>
               </a:rPr>
-              <a:t>3</a:t>
-            </a:r>
-          </a:p>
-        </p:txBody>
-      </p:sp>
-      <p:sp>
-        <p:nvSpPr>
-          <p:cNvPr id="1043" name="TextBox 1042"/>
-          <p:cNvSpPr txBox="1"/>
-          <p:nvPr/>
-        </p:nvSpPr>
-        <p:spPr>
-          <a:xfrm>
-            <a:off x="8311896" y="2514600"/>
-            <a:ext cx="3154680" cy="685800"/>
-          </a:xfrm>
-          <a:prstGeom prst="rect">
-            <a:avLst/>
-          </a:prstGeom>
-          <a:noFill/>
-        </p:spPr>
-        <p:txBody>
-          <a:bodyPr wrap="square" lIns="0" tIns="0" rIns="0" bIns="0" anchor="t">
-            <a:spAutoFit/>
-          </a:bodyPr>
-          <a:lstStyle/>
+              <a:t>Cited</a:t>
+            </a:r>
+          </a:p>
           <a:p>
             <a:pPr algn="ctr"/>
             <a:r>
-              <a:rPr sz="1600" b="1" i="0">
-                <a:solidFill>
-                  <a:srgbClr val="1F8E91"/>
+              <a:rPr sz="1400" b="1" i="0">
+                <a:solidFill>
+                  <a:srgbClr val="263030"/>
                 </a:solidFill>
                 <a:latin typeface="Calibri"/>
               </a:rPr>
-              <a:t>Hallucination Rate</a:t>
-            </a:r>
-          </a:p>
-        </p:txBody>
-      </p:sp>
-      <p:sp>
-        <p:nvSpPr>
-          <p:cNvPr id="1044" name="TextBox 1043"/>
+              <a:t>Response</a:t>
+            </a:r>
+          </a:p>
+        </p:txBody>
+      </p:sp>
+      <p:sp>
+        <p:nvSpPr>
+          <p:cNvPr id="6001" name="TextBox 6001"/>
           <p:cNvSpPr txBox="1"/>
           <p:nvPr/>
         </p:nvSpPr>
         <p:spPr>
           <a:xfrm>
-            <a:off x="8357616" y="3246120"/>
-            <a:ext cx="3063240" cy="1188720"/>
-          </a:xfrm>
-          <a:prstGeom prst="rect">
-            <a:avLst/>
-          </a:prstGeom>
-          <a:noFill/>
-        </p:spPr>
-        <p:txBody>
-          <a:bodyPr wrap="square" lIns="0" tIns="0" rIns="0" bIns="0" anchor="t">
-            <a:spAutoFit/>
-          </a:bodyPr>
-          <a:lstStyle/>
-          <a:p>
-            <a:pPr algn="ctr"/>
-            <a:r>
-              <a:rPr sz="1300" b="0" i="0">
-                <a:solidFill>
-                  <a:srgbClr val="5B6B6B"/>
-                </a:solidFill>
-                <a:latin typeface="Calibri"/>
-              </a:rPr>
-              <a:t>Two-half Judge Agent —</a:t>
-            </a:r>
-          </a:p>
-          <a:p>
-            <a:pPr algn="ctr"/>
-            <a:r>
-              <a:rPr sz="1300" b="0" i="0">
-                <a:solidFill>
-                  <a:srgbClr val="5B6B6B"/>
-                </a:solidFill>
-                <a:latin typeface="Calibri"/>
-              </a:rPr>
-              <a:t>LLM + deterministic check</a:t>
-            </a:r>
-          </a:p>
-        </p:txBody>
-      </p:sp>
-      <p:sp>
-        <p:nvSpPr>
-          <p:cNvPr id="5001" name="TextBox 5001"/>
-          <p:cNvSpPr txBox="1"/>
-          <p:nvPr/>
-        </p:nvSpPr>
-        <p:spPr>
-          <a:xfrm>
-            <a:off x="539496" y="786384"/>
-            <a:ext cx="11109960" cy="594360"/>
+            <a:off x="475488" y="804672"/>
+            <a:ext cx="10058400" cy="274320"/>
           </a:xfrm>
           <a:prstGeom prst="rect">
             <a:avLst/>
@@ -9663,33 +9914,224 @@
           </a:bodyPr>
           <a:lstStyle/>
           <a:p>
-            <a:pPr algn="l">
+            <a:pPr algn="l"/>
+            <a:r>
+              <a:rPr sz="1300" b="0" i="1">
+                <a:solidFill>
+                  <a:srgbClr val="5B6B6B"/>
+                </a:solidFill>
+                <a:latin typeface="Calibri"/>
+              </a:rPr>
+              <a:t>Solution Quality · AI Integration Depth</a:t>
+            </a:r>
+          </a:p>
+        </p:txBody>
+      </p:sp>
+      <p:sp>
+        <p:nvSpPr>
+          <p:cNvPr id="6010" name="TextBox 6010"/>
+          <p:cNvSpPr txBox="1"/>
+          <p:nvPr/>
+        </p:nvSpPr>
+        <p:spPr>
+          <a:xfrm>
+            <a:off x="585216" y="2971800"/>
+            <a:ext cx="2514600" cy="594360"/>
+          </a:xfrm>
+          <a:prstGeom prst="rect">
+            <a:avLst/>
+          </a:prstGeom>
+          <a:noFill/>
+        </p:spPr>
+        <p:txBody>
+          <a:bodyPr wrap="square" lIns="0" tIns="0" rIns="0" bIns="0" anchor="t">
+            <a:normAutofit/>
+          </a:bodyPr>
+          <a:lstStyle/>
+          <a:p>
+            <a:pPr algn="ctr">
               <a:lnSpc>
-                <a:spcPct val="115000"/>
+                <a:spcPct val="112000"/>
               </a:lnSpc>
             </a:pPr>
             <a:r>
-              <a:rPr sz="1300" b="0" i="1">
+              <a:rPr sz="1150" b="0" i="0">
                 <a:solidFill>
                   <a:srgbClr val="5B6B6B"/>
                 </a:solidFill>
                 <a:latin typeface="Calibri"/>
               </a:rPr>
-              <a:t>Every answer is graded twice — once on whether it reached the right specialist, once on whether each sentence is actually backed by a citation.</a:t>
-            </a:r>
-          </a:p>
-        </p:txBody>
-      </p:sp>
-      <p:sp>
-        <p:nvSpPr>
-          <p:cNvPr id="5002" name="Rounded Rectangle 5002"/>
+              <a:t>Ask in plain English — no syntax, no picking a system.</a:t>
+            </a:r>
+          </a:p>
+        </p:txBody>
+      </p:sp>
+      <p:sp>
+        <p:nvSpPr>
+          <p:cNvPr id="6011" name="TextBox 6011"/>
+          <p:cNvSpPr txBox="1"/>
+          <p:nvPr/>
+        </p:nvSpPr>
+        <p:spPr>
+          <a:xfrm>
+            <a:off x="3419856" y="2971800"/>
+            <a:ext cx="2514600" cy="594360"/>
+          </a:xfrm>
+          <a:prstGeom prst="rect">
+            <a:avLst/>
+          </a:prstGeom>
+          <a:noFill/>
+        </p:spPr>
+        <p:txBody>
+          <a:bodyPr wrap="square" lIns="0" tIns="0" rIns="0" bIns="0" anchor="t">
+            <a:normAutofit/>
+          </a:bodyPr>
+          <a:lstStyle/>
+          <a:p>
+            <a:pPr algn="ctr">
+              <a:lnSpc>
+                <a:spcPct val="112000"/>
+              </a:lnSpc>
+            </a:pPr>
+            <a:r>
+              <a:rPr sz="1150" b="0" i="0">
+                <a:solidFill>
+                  <a:srgbClr val="5B6B6B"/>
+                </a:solidFill>
+                <a:latin typeface="Calibri"/>
+              </a:rPr>
+              <a:t>AI reads intent and picks who should answer, not keywords.</a:t>
+            </a:r>
+          </a:p>
+        </p:txBody>
+      </p:sp>
+      <p:sp>
+        <p:nvSpPr>
+          <p:cNvPr id="6012" name="TextBox 6012"/>
+          <p:cNvSpPr txBox="1"/>
+          <p:nvPr/>
+        </p:nvSpPr>
+        <p:spPr>
+          <a:xfrm>
+            <a:off x="6254496" y="2971800"/>
+            <a:ext cx="2514600" cy="594360"/>
+          </a:xfrm>
+          <a:prstGeom prst="rect">
+            <a:avLst/>
+          </a:prstGeom>
+          <a:noFill/>
+        </p:spPr>
+        <p:txBody>
+          <a:bodyPr wrap="square" lIns="0" tIns="0" rIns="0" bIns="0" anchor="t">
+            <a:normAutofit/>
+          </a:bodyPr>
+          <a:lstStyle/>
+          <a:p>
+            <a:pPr algn="ctr">
+              <a:lnSpc>
+                <a:spcPct val="112000"/>
+              </a:lnSpc>
+            </a:pPr>
+            <a:r>
+              <a:rPr sz="1150" b="0" i="0">
+                <a:solidFill>
+                  <a:srgbClr val="5B6B6B"/>
+                </a:solidFill>
+                <a:latin typeface="Calibri"/>
+              </a:rPr>
+              <a:t>A dedicated expert checks the real, live system data.</a:t>
+            </a:r>
+          </a:p>
+        </p:txBody>
+      </p:sp>
+      <p:sp>
+        <p:nvSpPr>
+          <p:cNvPr id="6013" name="TextBox 6013"/>
+          <p:cNvSpPr txBox="1"/>
+          <p:nvPr/>
+        </p:nvSpPr>
+        <p:spPr>
+          <a:xfrm>
+            <a:off x="9089136" y="2971800"/>
+            <a:ext cx="2514600" cy="594360"/>
+          </a:xfrm>
+          <a:prstGeom prst="rect">
+            <a:avLst/>
+          </a:prstGeom>
+          <a:noFill/>
+        </p:spPr>
+        <p:txBody>
+          <a:bodyPr wrap="square" lIns="0" tIns="0" rIns="0" bIns="0" anchor="t">
+            <a:normAutofit/>
+          </a:bodyPr>
+          <a:lstStyle/>
+          <a:p>
+            <a:pPr algn="ctr">
+              <a:lnSpc>
+                <a:spcPct val="112000"/>
+              </a:lnSpc>
+            </a:pPr>
+            <a:r>
+              <a:rPr sz="1150" b="0" i="0">
+                <a:solidFill>
+                  <a:srgbClr val="5B6B6B"/>
+                </a:solidFill>
+                <a:latin typeface="Calibri"/>
+              </a:rPr>
+              <a:t>Answer comes back in plain language, receipt attached.</a:t>
+            </a:r>
+          </a:p>
+        </p:txBody>
+      </p:sp>
+      <p:sp>
+        <p:nvSpPr>
+          <p:cNvPr id="6020" name="TextBox 6020"/>
+          <p:cNvSpPr txBox="1"/>
+          <p:nvPr/>
+        </p:nvSpPr>
+        <p:spPr>
+          <a:xfrm>
+            <a:off x="548640" y="3703320"/>
+            <a:ext cx="11091672" cy="685800"/>
+          </a:xfrm>
+          <a:prstGeom prst="rect">
+            <a:avLst/>
+          </a:prstGeom>
+          <a:noFill/>
+        </p:spPr>
+        <p:txBody>
+          <a:bodyPr wrap="square" lIns="0" tIns="0" rIns="0" bIns="0" anchor="t">
+            <a:normAutofit/>
+          </a:bodyPr>
+          <a:lstStyle/>
+          <a:p>
+            <a:pPr algn="ctr">
+              <a:lnSpc>
+                <a:spcPct val="120000"/>
+              </a:lnSpc>
+            </a:pPr>
+            <a:r>
+              <a:rPr sz="1400" b="0" i="0">
+                <a:solidFill>
+                  <a:srgbClr val="263030"/>
+                </a:solidFill>
+                <a:latin typeface="Calibri"/>
+              </a:rPr>
+              <a:t>For example: ask “did the sales ETL job run last night?” and in under two minutes the coordinator recognizes a data-platform question, the data agent checks the real Databricks job run, and the answer names job #4821, run #99102 — not a guess.</a:t>
+            </a:r>
+          </a:p>
+        </p:txBody>
+      </p:sp>
+      <p:sp>
+        <p:nvSpPr>
+          <p:cNvPr id="6030" name="Rounded Rectangle 6030"/>
           <p:cNvSpPr/>
           <p:nvPr/>
         </p:nvSpPr>
         <p:spPr>
           <a:xfrm>
-            <a:off x="539496" y="5074920"/>
-            <a:ext cx="11109960" cy="822960"/>
+            <a:off x="548640" y="4572000"/>
+            <a:ext cx="2567178" cy="914400"/>
           </a:xfrm>
           <a:prstGeom prst="roundRect">
             <a:avLst>
@@ -9729,14 +10171,14 @@
       </p:sp>
       <p:sp>
         <p:nvSpPr>
-          <p:cNvPr id="5003" name="TextBox 5003"/>
+          <p:cNvPr id="6040" name="TextBox 6040"/>
           <p:cNvSpPr txBox="1"/>
           <p:nvPr/>
         </p:nvSpPr>
         <p:spPr>
           <a:xfrm>
-            <a:off x="813816" y="5074920"/>
-            <a:ext cx="10561320" cy="822960"/>
+            <a:off x="640080" y="4572000"/>
+            <a:ext cx="2384298" cy="914400"/>
           </a:xfrm>
           <a:prstGeom prst="rect">
             <a:avLst/>
@@ -9751,17 +10193,339 @@
           <a:p>
             <a:pPr algn="ctr">
               <a:lnSpc>
-                <a:spcPct val="115000"/>
+                <a:spcPct val="110000"/>
               </a:lnSpc>
             </a:pPr>
             <a:r>
               <a:rPr sz="1300" b="1" i="0">
                 <a:solidFill>
-                  <a:srgbClr val="1F8E91"/>
+                  <a:srgbClr val="263030"/>
                 </a:solidFill>
                 <a:latin typeface="Calibri"/>
               </a:rPr>
-              <a:t>Measured on the live control plane, 12 of 12 graded queries: 100% routing accuracy · 5.56% hallucination rate (target &lt;10%) · 93.11% test coverage (target ≥80%) — every target met, not just attempted.</a:t>
+              <a:t>Data &amp; Pipelines</a:t>
+            </a:r>
+          </a:p>
+          <a:p>
+            <a:pPr algn="ctr">
+              <a:lnSpc>
+                <a:spcPct val="112000"/>
+              </a:lnSpc>
+            </a:pPr>
+            <a:r>
+              <a:rPr sz="1100" b="0" i="0">
+                <a:solidFill>
+                  <a:srgbClr val="5B6B6B"/>
+                </a:solidFill>
+                <a:latin typeface="Calibri"/>
+              </a:rPr>
+              <a:t>Databricks job runs and SQL warehouses</a:t>
+            </a:r>
+          </a:p>
+        </p:txBody>
+      </p:sp>
+      <p:sp>
+        <p:nvSpPr>
+          <p:cNvPr id="6031" name="Rounded Rectangle 6031"/>
+          <p:cNvSpPr/>
+          <p:nvPr/>
+        </p:nvSpPr>
+        <p:spPr>
+          <a:xfrm>
+            <a:off x="3390138" y="4572000"/>
+            <a:ext cx="2567178" cy="914400"/>
+          </a:xfrm>
+          <a:prstGeom prst="roundRect">
+            <a:avLst>
+              <a:gd name="adj" fmla="val 6000"/>
+            </a:avLst>
+          </a:prstGeom>
+          <a:solidFill>
+            <a:srgbClr val="EEF6F6"/>
+          </a:solidFill>
+          <a:ln>
+            <a:noFill/>
+          </a:ln>
+          <a:effectLst/>
+        </p:spPr>
+        <p:style>
+          <a:lnRef idx="1">
+            <a:schemeClr val="accent1"/>
+          </a:lnRef>
+          <a:fillRef idx="3">
+            <a:schemeClr val="accent1"/>
+          </a:fillRef>
+          <a:effectRef idx="2">
+            <a:schemeClr val="accent1"/>
+          </a:effectRef>
+          <a:fontRef idx="minor">
+            <a:schemeClr val="lt1"/>
+          </a:fontRef>
+        </p:style>
+        <p:txBody>
+          <a:bodyPr rtlCol="0" anchor="ctr"/>
+          <a:lstStyle/>
+          <a:p>
+            <a:pPr algn="ctr"/>
+            <a:endParaRPr/>
+          </a:p>
+        </p:txBody>
+      </p:sp>
+      <p:sp>
+        <p:nvSpPr>
+          <p:cNvPr id="6041" name="TextBox 6041"/>
+          <p:cNvSpPr txBox="1"/>
+          <p:nvPr/>
+        </p:nvSpPr>
+        <p:spPr>
+          <a:xfrm>
+            <a:off x="3481578" y="4572000"/>
+            <a:ext cx="2384298" cy="914400"/>
+          </a:xfrm>
+          <a:prstGeom prst="rect">
+            <a:avLst/>
+          </a:prstGeom>
+          <a:noFill/>
+        </p:spPr>
+        <p:txBody>
+          <a:bodyPr wrap="square" lIns="0" tIns="0" rIns="0" bIns="0" anchor="ctr">
+            <a:normAutofit/>
+          </a:bodyPr>
+          <a:lstStyle/>
+          <a:p>
+            <a:pPr algn="ctr">
+              <a:lnSpc>
+                <a:spcPct val="110000"/>
+              </a:lnSpc>
+            </a:pPr>
+            <a:r>
+              <a:rPr sz="1300" b="1" i="0">
+                <a:solidFill>
+                  <a:srgbClr val="263030"/>
+                </a:solidFill>
+                <a:latin typeface="Calibri"/>
+              </a:rPr>
+              <a:t>Deployments &amp; CI/CD</a:t>
+            </a:r>
+          </a:p>
+          <a:p>
+            <a:pPr algn="ctr">
+              <a:lnSpc>
+                <a:spcPct val="112000"/>
+              </a:lnSpc>
+            </a:pPr>
+            <a:r>
+              <a:rPr sz="1100" b="0" i="0">
+                <a:solidFill>
+                  <a:srgbClr val="5B6B6B"/>
+                </a:solidFill>
+                <a:latin typeface="Calibri"/>
+              </a:rPr>
+              <a:t>GitHub Actions and Azure DevOps runs</a:t>
+            </a:r>
+          </a:p>
+        </p:txBody>
+      </p:sp>
+      <p:sp>
+        <p:nvSpPr>
+          <p:cNvPr id="6032" name="Rounded Rectangle 6032"/>
+          <p:cNvSpPr/>
+          <p:nvPr/>
+        </p:nvSpPr>
+        <p:spPr>
+          <a:xfrm>
+            <a:off x="6231636" y="4572000"/>
+            <a:ext cx="2567178" cy="914400"/>
+          </a:xfrm>
+          <a:prstGeom prst="roundRect">
+            <a:avLst>
+              <a:gd name="adj" fmla="val 6000"/>
+            </a:avLst>
+          </a:prstGeom>
+          <a:solidFill>
+            <a:srgbClr val="EEF6F6"/>
+          </a:solidFill>
+          <a:ln>
+            <a:noFill/>
+          </a:ln>
+          <a:effectLst/>
+        </p:spPr>
+        <p:style>
+          <a:lnRef idx="1">
+            <a:schemeClr val="accent1"/>
+          </a:lnRef>
+          <a:fillRef idx="3">
+            <a:schemeClr val="accent1"/>
+          </a:fillRef>
+          <a:effectRef idx="2">
+            <a:schemeClr val="accent1"/>
+          </a:effectRef>
+          <a:fontRef idx="minor">
+            <a:schemeClr val="lt1"/>
+          </a:fontRef>
+        </p:style>
+        <p:txBody>
+          <a:bodyPr rtlCol="0" anchor="ctr"/>
+          <a:lstStyle/>
+          <a:p>
+            <a:pPr algn="ctr"/>
+            <a:endParaRPr/>
+          </a:p>
+        </p:txBody>
+      </p:sp>
+      <p:sp>
+        <p:nvSpPr>
+          <p:cNvPr id="6042" name="TextBox 6042"/>
+          <p:cNvSpPr txBox="1"/>
+          <p:nvPr/>
+        </p:nvSpPr>
+        <p:spPr>
+          <a:xfrm>
+            <a:off x="6323076" y="4572000"/>
+            <a:ext cx="2384298" cy="914400"/>
+          </a:xfrm>
+          <a:prstGeom prst="rect">
+            <a:avLst/>
+          </a:prstGeom>
+          <a:noFill/>
+        </p:spPr>
+        <p:txBody>
+          <a:bodyPr wrap="square" lIns="0" tIns="0" rIns="0" bIns="0" anchor="ctr">
+            <a:normAutofit/>
+          </a:bodyPr>
+          <a:lstStyle/>
+          <a:p>
+            <a:pPr algn="ctr">
+              <a:lnSpc>
+                <a:spcPct val="110000"/>
+              </a:lnSpc>
+            </a:pPr>
+            <a:r>
+              <a:rPr sz="1300" b="1" i="0">
+                <a:solidFill>
+                  <a:srgbClr val="263030"/>
+                </a:solidFill>
+                <a:latin typeface="Calibri"/>
+              </a:rPr>
+              <a:t>Customers &amp; Deals</a:t>
+            </a:r>
+          </a:p>
+          <a:p>
+            <a:pPr algn="ctr">
+              <a:lnSpc>
+                <a:spcPct val="112000"/>
+              </a:lnSpc>
+            </a:pPr>
+            <a:r>
+              <a:rPr sz="1100" b="0" i="0">
+                <a:solidFill>
+                  <a:srgbClr val="5B6B6B"/>
+                </a:solidFill>
+                <a:latin typeface="Calibri"/>
+              </a:rPr>
+              <a:t>CRM accounts, deals, and owners</a:t>
+            </a:r>
+          </a:p>
+        </p:txBody>
+      </p:sp>
+      <p:sp>
+        <p:nvSpPr>
+          <p:cNvPr id="6033" name="Rounded Rectangle 6033"/>
+          <p:cNvSpPr/>
+          <p:nvPr/>
+        </p:nvSpPr>
+        <p:spPr>
+          <a:xfrm>
+            <a:off x="9073134" y="4572000"/>
+            <a:ext cx="2567178" cy="914400"/>
+          </a:xfrm>
+          <a:prstGeom prst="roundRect">
+            <a:avLst>
+              <a:gd name="adj" fmla="val 6000"/>
+            </a:avLst>
+          </a:prstGeom>
+          <a:solidFill>
+            <a:srgbClr val="EEF6F6"/>
+          </a:solidFill>
+          <a:ln>
+            <a:noFill/>
+          </a:ln>
+          <a:effectLst/>
+        </p:spPr>
+        <p:style>
+          <a:lnRef idx="1">
+            <a:schemeClr val="accent1"/>
+          </a:lnRef>
+          <a:fillRef idx="3">
+            <a:schemeClr val="accent1"/>
+          </a:fillRef>
+          <a:effectRef idx="2">
+            <a:schemeClr val="accent1"/>
+          </a:effectRef>
+          <a:fontRef idx="minor">
+            <a:schemeClr val="lt1"/>
+          </a:fontRef>
+        </p:style>
+        <p:txBody>
+          <a:bodyPr rtlCol="0" anchor="ctr"/>
+          <a:lstStyle/>
+          <a:p>
+            <a:pPr algn="ctr"/>
+            <a:endParaRPr/>
+          </a:p>
+        </p:txBody>
+      </p:sp>
+      <p:sp>
+        <p:nvSpPr>
+          <p:cNvPr id="6043" name="TextBox 6043"/>
+          <p:cNvSpPr txBox="1"/>
+          <p:nvPr/>
+        </p:nvSpPr>
+        <p:spPr>
+          <a:xfrm>
+            <a:off x="9164574" y="4572000"/>
+            <a:ext cx="2384298" cy="914400"/>
+          </a:xfrm>
+          <a:prstGeom prst="rect">
+            <a:avLst/>
+          </a:prstGeom>
+          <a:noFill/>
+        </p:spPr>
+        <p:txBody>
+          <a:bodyPr wrap="square" lIns="0" tIns="0" rIns="0" bIns="0" anchor="ctr">
+            <a:normAutofit/>
+          </a:bodyPr>
+          <a:lstStyle/>
+          <a:p>
+            <a:pPr algn="ctr">
+              <a:lnSpc>
+                <a:spcPct val="110000"/>
+              </a:lnSpc>
+            </a:pPr>
+            <a:r>
+              <a:rPr sz="1300" b="1" i="0">
+                <a:solidFill>
+                  <a:srgbClr val="263030"/>
+                </a:solidFill>
+                <a:latin typeface="Calibri"/>
+              </a:rPr>
+              <a:t>Documentation &amp; Runbooks</a:t>
+            </a:r>
+          </a:p>
+          <a:p>
+            <a:pPr algn="ctr">
+              <a:lnSpc>
+                <a:spcPct val="112000"/>
+              </a:lnSpc>
+            </a:pPr>
+            <a:r>
+              <a:rPr sz="1100" b="0" i="0">
+                <a:solidFill>
+                  <a:srgbClr val="5B6B6B"/>
+                </a:solidFill>
+                <a:latin typeface="Calibri"/>
+              </a:rPr>
+              <a:t>Internal docs and runbooks</a:t>
             </a:r>
           </a:p>
         </p:txBody>
@@ -10024,91 +10788,21 @@
                 <a:ea typeface="Calibri"/>
                 <a:cs typeface="Calibri"/>
               </a:rPr>
-              <a:t>Budget &amp; Cost Justification</a:t>
-            </a:r>
-          </a:p>
-        </p:txBody>
-      </p:sp>
-      <p:sp>
-        <p:nvSpPr>
-          <p:cNvPr id="1033" name="TextBox 1032"/>
-          <p:cNvSpPr txBox="1"/>
-          <p:nvPr/>
-        </p:nvSpPr>
-        <p:spPr>
-          <a:xfrm>
-            <a:off x="822960" y="1737360"/>
-            <a:ext cx="6400800" cy="1051560"/>
-          </a:xfrm>
-          <a:prstGeom prst="rect">
-            <a:avLst/>
-          </a:prstGeom>
-          <a:noFill/>
-        </p:spPr>
-        <p:txBody>
-          <a:bodyPr wrap="square" lIns="0" tIns="0" rIns="0" bIns="0" anchor="t">
-            <a:spAutoFit/>
-          </a:bodyPr>
-          <a:lstStyle/>
-          <a:p>
-            <a:pPr algn="l"/>
-            <a:r>
-              <a:rPr sz="7200" b="1" i="0">
-                <a:solidFill>
-                  <a:srgbClr val="1F8E91"/>
-                </a:solidFill>
-                <a:latin typeface="Calibri"/>
-              </a:rPr>
-              <a:t>₹0</a:t>
-            </a:r>
-          </a:p>
-        </p:txBody>
-      </p:sp>
-      <p:sp>
-        <p:nvSpPr>
-          <p:cNvPr id="1034" name="TextBox 1033"/>
-          <p:cNvSpPr txBox="1"/>
-          <p:nvPr/>
-        </p:nvSpPr>
-        <p:spPr>
-          <a:xfrm>
-            <a:off x="868680" y="3063240"/>
-            <a:ext cx="6400800" cy="457200"/>
-          </a:xfrm>
-          <a:prstGeom prst="rect">
-            <a:avLst/>
-          </a:prstGeom>
-          <a:noFill/>
-        </p:spPr>
-        <p:txBody>
-          <a:bodyPr wrap="square" lIns="0" tIns="0" rIns="0" bIns="0" anchor="t">
-            <a:spAutoFit/>
-          </a:bodyPr>
-          <a:lstStyle/>
-          <a:p>
-            <a:pPr algn="l"/>
-            <a:r>
-              <a:rPr sz="1500" b="0" i="0">
-                <a:solidFill>
-                  <a:srgbClr val="5B6B6B"/>
-                </a:solidFill>
-                <a:latin typeface="Calibri"/>
-              </a:rPr>
-              <a:t>actual spend, of a ₹2,500 fixed ceiling</a:t>
-            </a:r>
-          </a:p>
-        </p:txBody>
-      </p:sp>
-      <p:sp>
-        <p:nvSpPr>
-          <p:cNvPr id="1035" name="Rounded Rectangle 1034"/>
+              <a:t>QA Strategy</a:t>
+            </a:r>
+          </a:p>
+        </p:txBody>
+      </p:sp>
+      <p:sp>
+        <p:nvSpPr>
+          <p:cNvPr id="1033" name="Rounded Rectangle 1032"/>
           <p:cNvSpPr/>
           <p:nvPr/>
         </p:nvSpPr>
         <p:spPr>
           <a:xfrm>
-            <a:off x="822960" y="3794760"/>
-            <a:ext cx="6766560" cy="457200"/>
+            <a:off x="539495" y="1417320"/>
+            <a:ext cx="3520440" cy="3200400"/>
           </a:xfrm>
           <a:prstGeom prst="roundRect">
             <a:avLst>
@@ -10148,214 +10842,17 @@
       </p:sp>
       <p:sp>
         <p:nvSpPr>
-          <p:cNvPr id="1036" name="TextBox 1035"/>
-          <p:cNvSpPr txBox="1"/>
-          <p:nvPr/>
-        </p:nvSpPr>
-        <p:spPr>
-          <a:xfrm>
-            <a:off x="822960" y="3794760"/>
-            <a:ext cx="6766560" cy="457200"/>
-          </a:xfrm>
-          <a:prstGeom prst="rect">
-            <a:avLst/>
-          </a:prstGeom>
-          <a:noFill/>
-        </p:spPr>
-        <p:txBody>
-          <a:bodyPr wrap="square" lIns="0" tIns="0" rIns="0" bIns="0" anchor="ctr">
-            <a:spAutoFit/>
-          </a:bodyPr>
-          <a:lstStyle/>
-          <a:p>
-            <a:pPr algn="ctr"/>
-            <a:r>
-              <a:rPr sz="1300" b="1" i="0">
-                <a:solidFill>
-                  <a:srgbClr val="1F8E91"/>
-                </a:solidFill>
-                <a:latin typeface="Calibri"/>
-              </a:rPr>
-              <a:t>100% of ceiling remains as buffer</a:t>
-            </a:r>
-          </a:p>
-        </p:txBody>
-      </p:sp>
-      <p:sp>
-        <p:nvSpPr>
-          <p:cNvPr id="1037" name="Oval 1036"/>
+          <p:cNvPr id="1034" name="Oval 1033"/>
           <p:cNvSpPr/>
           <p:nvPr/>
         </p:nvSpPr>
         <p:spPr>
           <a:xfrm>
-            <a:off x="822960" y="4709159"/>
-            <a:ext cx="109728" cy="109728"/>
+            <a:off x="1979675" y="1691640"/>
+            <a:ext cx="640080" cy="640080"/>
           </a:xfrm>
           <a:prstGeom prst="ellipse">
             <a:avLst/>
-          </a:prstGeom>
-          <a:solidFill>
-            <a:srgbClr val="2DB6BB"/>
-          </a:solidFill>
-          <a:ln>
-            <a:noFill/>
-          </a:ln>
-          <a:effectLst/>
-        </p:spPr>
-        <p:style>
-          <a:lnRef idx="1">
-            <a:schemeClr val="accent1"/>
-          </a:lnRef>
-          <a:fillRef idx="3">
-            <a:schemeClr val="accent1"/>
-          </a:fillRef>
-          <a:effectRef idx="2">
-            <a:schemeClr val="accent1"/>
-          </a:effectRef>
-          <a:fontRef idx="minor">
-            <a:schemeClr val="lt1"/>
-          </a:fontRef>
-        </p:style>
-        <p:txBody>
-          <a:bodyPr rtlCol="0" anchor="ctr"/>
-          <a:lstStyle/>
-          <a:p>
-            <a:pPr algn="ctr"/>
-            <a:endParaRPr/>
-          </a:p>
-        </p:txBody>
-      </p:sp>
-      <p:sp>
-        <p:nvSpPr>
-          <p:cNvPr id="1038" name="TextBox 1037"/>
-          <p:cNvSpPr txBox="1"/>
-          <p:nvPr/>
-        </p:nvSpPr>
-        <p:spPr>
-          <a:xfrm>
-            <a:off x="1097280" y="4663440"/>
-            <a:ext cx="6400800" cy="457200"/>
-          </a:xfrm>
-          <a:prstGeom prst="rect">
-            <a:avLst/>
-          </a:prstGeom>
-          <a:noFill/>
-        </p:spPr>
-        <p:txBody>
-          <a:bodyPr wrap="square" lIns="0" tIns="0" rIns="0" bIns="0" anchor="t">
-            <a:spAutoFit/>
-          </a:bodyPr>
-          <a:lstStyle/>
-          <a:p>
-            <a:pPr algn="l"/>
-            <a:r>
-              <a:rPr sz="1300" b="0" i="0">
-                <a:solidFill>
-                  <a:srgbClr val="263030"/>
-                </a:solidFill>
-                <a:latin typeface="Calibri"/>
-              </a:rPr>
-              <a:t>AgentField, Ollama, Pytest, GitHub Actions — every tool open-source or free-tier</a:t>
-            </a:r>
-          </a:p>
-        </p:txBody>
-      </p:sp>
-      <p:sp>
-        <p:nvSpPr>
-          <p:cNvPr id="1039" name="Oval 1038"/>
-          <p:cNvSpPr/>
-          <p:nvPr/>
-        </p:nvSpPr>
-        <p:spPr>
-          <a:xfrm>
-            <a:off x="822960" y="5303520"/>
-            <a:ext cx="109728" cy="109728"/>
-          </a:xfrm>
-          <a:prstGeom prst="ellipse">
-            <a:avLst/>
-          </a:prstGeom>
-          <a:solidFill>
-            <a:srgbClr val="2DB6BB"/>
-          </a:solidFill>
-          <a:ln>
-            <a:noFill/>
-          </a:ln>
-          <a:effectLst/>
-        </p:spPr>
-        <p:style>
-          <a:lnRef idx="1">
-            <a:schemeClr val="accent1"/>
-          </a:lnRef>
-          <a:fillRef idx="3">
-            <a:schemeClr val="accent1"/>
-          </a:fillRef>
-          <a:effectRef idx="2">
-            <a:schemeClr val="accent1"/>
-          </a:effectRef>
-          <a:fontRef idx="minor">
-            <a:schemeClr val="lt1"/>
-          </a:fontRef>
-        </p:style>
-        <p:txBody>
-          <a:bodyPr rtlCol="0" anchor="ctr"/>
-          <a:lstStyle/>
-          <a:p>
-            <a:pPr algn="ctr"/>
-            <a:endParaRPr/>
-          </a:p>
-        </p:txBody>
-      </p:sp>
-      <p:sp>
-        <p:nvSpPr>
-          <p:cNvPr id="1040" name="TextBox 1039"/>
-          <p:cNvSpPr txBox="1"/>
-          <p:nvPr/>
-        </p:nvSpPr>
-        <p:spPr>
-          <a:xfrm>
-            <a:off x="1097280" y="5257800"/>
-            <a:ext cx="6400800" cy="457200"/>
-          </a:xfrm>
-          <a:prstGeom prst="rect">
-            <a:avLst/>
-          </a:prstGeom>
-          <a:noFill/>
-        </p:spPr>
-        <p:txBody>
-          <a:bodyPr wrap="square" lIns="0" tIns="0" rIns="0" bIns="0" anchor="t">
-            <a:spAutoFit/>
-          </a:bodyPr>
-          <a:lstStyle/>
-          <a:p>
-            <a:pPr algn="l"/>
-            <a:r>
-              <a:rPr sz="1300" b="0" i="0">
-                <a:solidFill>
-                  <a:srgbClr val="263030"/>
-                </a:solidFill>
-                <a:latin typeface="Calibri"/>
-              </a:rPr>
-              <a:t>Paid inference (OpenRouter) was a one-line config option — never required</a:t>
-            </a:r>
-          </a:p>
-        </p:txBody>
-      </p:sp>
-      <p:sp>
-        <p:nvSpPr>
-          <p:cNvPr id="1041" name="Rounded Rectangle 1040"/>
-          <p:cNvSpPr/>
-          <p:nvPr/>
-        </p:nvSpPr>
-        <p:spPr>
-          <a:xfrm>
-            <a:off x="7955279" y="1737360"/>
-            <a:ext cx="3566160" cy="3657600"/>
-          </a:xfrm>
-          <a:prstGeom prst="roundRect">
-            <a:avLst>
-              <a:gd name="adj" fmla="val 6000"/>
-            </a:avLst>
           </a:prstGeom>
           <a:solidFill>
             <a:srgbClr val="1F8E91"/>
@@ -10380,24 +10877,32 @@
           </a:fontRef>
         </p:style>
         <p:txBody>
-          <a:bodyPr rtlCol="0" anchor="ctr"/>
+          <a:bodyPr wrap="none" lIns="0" tIns="0" rIns="0" bIns="0" rtlCol="0" anchor="ctr"/>
           <a:lstStyle/>
           <a:p>
             <a:pPr algn="ctr"/>
-            <a:endParaRPr/>
-          </a:p>
-        </p:txBody>
-      </p:sp>
-      <p:sp>
-        <p:nvSpPr>
-          <p:cNvPr id="1042" name="TextBox 1041"/>
+            <a:r>
+              <a:rPr sz="2200" b="1">
+                <a:solidFill>
+                  <a:srgbClr val="FFFFFF"/>
+                </a:solidFill>
+                <a:latin typeface="Calibri"/>
+              </a:rPr>
+              <a:t>1</a:t>
+            </a:r>
+          </a:p>
+        </p:txBody>
+      </p:sp>
+      <p:sp>
+        <p:nvSpPr>
+          <p:cNvPr id="1035" name="TextBox 1034"/>
           <p:cNvSpPr txBox="1"/>
           <p:nvPr/>
         </p:nvSpPr>
         <p:spPr>
           <a:xfrm>
-            <a:off x="8229600" y="1965960"/>
-            <a:ext cx="3017520" cy="457200"/>
+            <a:off x="722375" y="2514600"/>
+            <a:ext cx="3154680" cy="685800"/>
           </a:xfrm>
           <a:prstGeom prst="rect">
             <a:avLst/>
@@ -10410,29 +10915,29 @@
           </a:bodyPr>
           <a:lstStyle/>
           <a:p>
-            <a:pPr algn="l"/>
+            <a:pPr algn="ctr"/>
             <a:r>
               <a:rPr sz="1600" b="1" i="0">
                 <a:solidFill>
-                  <a:srgbClr val="FFFFFF"/>
+                  <a:srgbClr val="1F8E91"/>
                 </a:solidFill>
                 <a:latin typeface="Calibri"/>
               </a:rPr>
-              <a:t>Why ₹0 works</a:t>
-            </a:r>
-          </a:p>
-        </p:txBody>
-      </p:sp>
-      <p:sp>
-        <p:nvSpPr>
-          <p:cNvPr id="1043" name="TextBox 1042"/>
+              <a:t>Routing Accuracy</a:t>
+            </a:r>
+          </a:p>
+        </p:txBody>
+      </p:sp>
+      <p:sp>
+        <p:nvSpPr>
+          <p:cNvPr id="1036" name="TextBox 1035"/>
           <p:cNvSpPr txBox="1"/>
           <p:nvPr/>
         </p:nvSpPr>
         <p:spPr>
           <a:xfrm>
-            <a:off x="8229600" y="2514600"/>
-            <a:ext cx="3017520" cy="2651760"/>
+            <a:off x="768095" y="3246120"/>
+            <a:ext cx="3063240" cy="1188720"/>
           </a:xfrm>
           <a:prstGeom prst="rect">
             <a:avLst/>
@@ -10445,19 +10950,403 @@
           </a:bodyPr>
           <a:lstStyle/>
           <a:p>
-            <a:pPr algn="l">
-              <a:lnSpc>
-                <a:spcPct val="120000"/>
-              </a:lnSpc>
-            </a:pPr>
+            <a:pPr algn="ctr"/>
             <a:r>
               <a:rPr sz="1300" b="0" i="0">
                 <a:solidFill>
-                  <a:srgbClr val="FFFFFF"/>
+                  <a:srgbClr val="5B6B6B"/>
                 </a:solidFill>
                 <a:latin typeface="Calibri"/>
               </a:rPr>
-              <a:t>Local Ollama meets every graded QA target. A hosted model remains a single environment-variable swap — available, never required for this build.</a:t>
+              <a:t>Every query graded against</a:t>
+            </a:r>
+          </a:p>
+          <a:p>
+            <a:pPr algn="ctr"/>
+            <a:r>
+              <a:rPr sz="1300" b="0" i="0">
+                <a:solidFill>
+                  <a:srgbClr val="5B6B6B"/>
+                </a:solidFill>
+                <a:latin typeface="Calibri"/>
+              </a:rPr>
+              <a:t>expected domain(s)</a:t>
+            </a:r>
+          </a:p>
+        </p:txBody>
+      </p:sp>
+      <p:sp>
+        <p:nvSpPr>
+          <p:cNvPr id="1037" name="Rounded Rectangle 1036"/>
+          <p:cNvSpPr/>
+          <p:nvPr/>
+        </p:nvSpPr>
+        <p:spPr>
+          <a:xfrm>
+            <a:off x="4334256" y="1417320"/>
+            <a:ext cx="3520440" cy="3200400"/>
+          </a:xfrm>
+          <a:prstGeom prst="roundRect">
+            <a:avLst>
+              <a:gd name="adj" fmla="val 6000"/>
+            </a:avLst>
+          </a:prstGeom>
+          <a:solidFill>
+            <a:srgbClr val="EEF6F6"/>
+          </a:solidFill>
+          <a:ln>
+            <a:noFill/>
+          </a:ln>
+          <a:effectLst/>
+        </p:spPr>
+        <p:style>
+          <a:lnRef idx="1">
+            <a:schemeClr val="accent1"/>
+          </a:lnRef>
+          <a:fillRef idx="3">
+            <a:schemeClr val="accent1"/>
+          </a:fillRef>
+          <a:effectRef idx="2">
+            <a:schemeClr val="accent1"/>
+          </a:effectRef>
+          <a:fontRef idx="minor">
+            <a:schemeClr val="lt1"/>
+          </a:fontRef>
+        </p:style>
+        <p:txBody>
+          <a:bodyPr rtlCol="0" anchor="ctr"/>
+          <a:lstStyle/>
+          <a:p>
+            <a:pPr algn="ctr"/>
+            <a:endParaRPr/>
+          </a:p>
+        </p:txBody>
+      </p:sp>
+      <p:sp>
+        <p:nvSpPr>
+          <p:cNvPr id="1038" name="Oval 1037"/>
+          <p:cNvSpPr/>
+          <p:nvPr/>
+        </p:nvSpPr>
+        <p:spPr>
+          <a:xfrm>
+            <a:off x="5774436" y="1691640"/>
+            <a:ext cx="640080" cy="640080"/>
+          </a:xfrm>
+          <a:prstGeom prst="ellipse">
+            <a:avLst/>
+          </a:prstGeom>
+          <a:solidFill>
+            <a:srgbClr val="1F8E91"/>
+          </a:solidFill>
+          <a:ln>
+            <a:noFill/>
+          </a:ln>
+          <a:effectLst/>
+        </p:spPr>
+        <p:style>
+          <a:lnRef idx="1">
+            <a:schemeClr val="accent1"/>
+          </a:lnRef>
+          <a:fillRef idx="3">
+            <a:schemeClr val="accent1"/>
+          </a:fillRef>
+          <a:effectRef idx="2">
+            <a:schemeClr val="accent1"/>
+          </a:effectRef>
+          <a:fontRef idx="minor">
+            <a:schemeClr val="lt1"/>
+          </a:fontRef>
+        </p:style>
+        <p:txBody>
+          <a:bodyPr wrap="none" lIns="0" tIns="0" rIns="0" bIns="0" rtlCol="0" anchor="ctr"/>
+          <a:lstStyle/>
+          <a:p>
+            <a:pPr algn="ctr"/>
+            <a:r>
+              <a:rPr sz="2200" b="1">
+                <a:solidFill>
+                  <a:srgbClr val="FFFFFF"/>
+                </a:solidFill>
+                <a:latin typeface="Calibri"/>
+              </a:rPr>
+              <a:t>2</a:t>
+            </a:r>
+          </a:p>
+        </p:txBody>
+      </p:sp>
+      <p:sp>
+        <p:nvSpPr>
+          <p:cNvPr id="1039" name="TextBox 1038"/>
+          <p:cNvSpPr txBox="1"/>
+          <p:nvPr/>
+        </p:nvSpPr>
+        <p:spPr>
+          <a:xfrm>
+            <a:off x="4517136" y="2514600"/>
+            <a:ext cx="3154680" cy="685800"/>
+          </a:xfrm>
+          <a:prstGeom prst="rect">
+            <a:avLst/>
+          </a:prstGeom>
+          <a:noFill/>
+        </p:spPr>
+        <p:txBody>
+          <a:bodyPr wrap="square" lIns="0" tIns="0" rIns="0" bIns="0" anchor="t">
+            <a:spAutoFit/>
+          </a:bodyPr>
+          <a:lstStyle/>
+          <a:p>
+            <a:pPr algn="ctr"/>
+            <a:r>
+              <a:rPr sz="1600" b="1" i="0">
+                <a:solidFill>
+                  <a:srgbClr val="1F8E91"/>
+                </a:solidFill>
+                <a:latin typeface="Calibri"/>
+              </a:rPr>
+              <a:t>Grounding &amp;</a:t>
+            </a:r>
+          </a:p>
+          <a:p>
+            <a:pPr algn="ctr"/>
+            <a:r>
+              <a:rPr sz="1600" b="1" i="0">
+                <a:solidFill>
+                  <a:srgbClr val="1F8E91"/>
+                </a:solidFill>
+                <a:latin typeface="Calibri"/>
+              </a:rPr>
+              <a:t>Citations</a:t>
+            </a:r>
+          </a:p>
+        </p:txBody>
+      </p:sp>
+      <p:sp>
+        <p:nvSpPr>
+          <p:cNvPr id="1040" name="TextBox 1039"/>
+          <p:cNvSpPr txBox="1"/>
+          <p:nvPr/>
+        </p:nvSpPr>
+        <p:spPr>
+          <a:xfrm>
+            <a:off x="4562856" y="3246120"/>
+            <a:ext cx="3063240" cy="1188720"/>
+          </a:xfrm>
+          <a:prstGeom prst="rect">
+            <a:avLst/>
+          </a:prstGeom>
+          <a:noFill/>
+        </p:spPr>
+        <p:txBody>
+          <a:bodyPr wrap="square" lIns="0" tIns="0" rIns="0" bIns="0" anchor="t">
+            <a:spAutoFit/>
+          </a:bodyPr>
+          <a:lstStyle/>
+          <a:p>
+            <a:pPr algn="ctr"/>
+            <a:r>
+              <a:rPr sz="1300" b="0" i="0">
+                <a:solidFill>
+                  <a:srgbClr val="5B6B6B"/>
+                </a:solidFill>
+                <a:latin typeface="Calibri"/>
+              </a:rPr>
+              <a:t>Citation checked against</a:t>
+            </a:r>
+          </a:p>
+          <a:p>
+            <a:pPr algn="ctr"/>
+            <a:r>
+              <a:rPr sz="1300" b="0" i="0">
+                <a:solidFill>
+                  <a:srgbClr val="5B6B6B"/>
+                </a:solidFill>
+                <a:latin typeface="Calibri"/>
+              </a:rPr>
+              <a:t>the record, not just present</a:t>
+            </a:r>
+          </a:p>
+        </p:txBody>
+      </p:sp>
+      <p:sp>
+        <p:nvSpPr>
+          <p:cNvPr id="1041" name="Rounded Rectangle 1040"/>
+          <p:cNvSpPr/>
+          <p:nvPr/>
+        </p:nvSpPr>
+        <p:spPr>
+          <a:xfrm>
+            <a:off x="8129016" y="1417320"/>
+            <a:ext cx="3520440" cy="3200400"/>
+          </a:xfrm>
+          <a:prstGeom prst="roundRect">
+            <a:avLst>
+              <a:gd name="adj" fmla="val 6000"/>
+            </a:avLst>
+          </a:prstGeom>
+          <a:solidFill>
+            <a:srgbClr val="EEF6F6"/>
+          </a:solidFill>
+          <a:ln>
+            <a:noFill/>
+          </a:ln>
+          <a:effectLst/>
+        </p:spPr>
+        <p:style>
+          <a:lnRef idx="1">
+            <a:schemeClr val="accent1"/>
+          </a:lnRef>
+          <a:fillRef idx="3">
+            <a:schemeClr val="accent1"/>
+          </a:fillRef>
+          <a:effectRef idx="2">
+            <a:schemeClr val="accent1"/>
+          </a:effectRef>
+          <a:fontRef idx="minor">
+            <a:schemeClr val="lt1"/>
+          </a:fontRef>
+        </p:style>
+        <p:txBody>
+          <a:bodyPr rtlCol="0" anchor="ctr"/>
+          <a:lstStyle/>
+          <a:p>
+            <a:pPr algn="ctr"/>
+            <a:endParaRPr/>
+          </a:p>
+        </p:txBody>
+      </p:sp>
+      <p:sp>
+        <p:nvSpPr>
+          <p:cNvPr id="1042" name="Oval 1041"/>
+          <p:cNvSpPr/>
+          <p:nvPr/>
+        </p:nvSpPr>
+        <p:spPr>
+          <a:xfrm>
+            <a:off x="9569196" y="1691640"/>
+            <a:ext cx="640080" cy="640080"/>
+          </a:xfrm>
+          <a:prstGeom prst="ellipse">
+            <a:avLst/>
+          </a:prstGeom>
+          <a:solidFill>
+            <a:srgbClr val="1F8E91"/>
+          </a:solidFill>
+          <a:ln>
+            <a:noFill/>
+          </a:ln>
+          <a:effectLst/>
+        </p:spPr>
+        <p:style>
+          <a:lnRef idx="1">
+            <a:schemeClr val="accent1"/>
+          </a:lnRef>
+          <a:fillRef idx="3">
+            <a:schemeClr val="accent1"/>
+          </a:fillRef>
+          <a:effectRef idx="2">
+            <a:schemeClr val="accent1"/>
+          </a:effectRef>
+          <a:fontRef idx="minor">
+            <a:schemeClr val="lt1"/>
+          </a:fontRef>
+        </p:style>
+        <p:txBody>
+          <a:bodyPr wrap="none" lIns="0" tIns="0" rIns="0" bIns="0" rtlCol="0" anchor="ctr"/>
+          <a:lstStyle/>
+          <a:p>
+            <a:pPr algn="ctr"/>
+            <a:r>
+              <a:rPr sz="2200" b="1">
+                <a:solidFill>
+                  <a:srgbClr val="FFFFFF"/>
+                </a:solidFill>
+                <a:latin typeface="Calibri"/>
+              </a:rPr>
+              <a:t>3</a:t>
+            </a:r>
+          </a:p>
+        </p:txBody>
+      </p:sp>
+      <p:sp>
+        <p:nvSpPr>
+          <p:cNvPr id="1043" name="TextBox 1042"/>
+          <p:cNvSpPr txBox="1"/>
+          <p:nvPr/>
+        </p:nvSpPr>
+        <p:spPr>
+          <a:xfrm>
+            <a:off x="8311896" y="2514600"/>
+            <a:ext cx="3154680" cy="685800"/>
+          </a:xfrm>
+          <a:prstGeom prst="rect">
+            <a:avLst/>
+          </a:prstGeom>
+          <a:noFill/>
+        </p:spPr>
+        <p:txBody>
+          <a:bodyPr wrap="square" lIns="0" tIns="0" rIns="0" bIns="0" anchor="t">
+            <a:spAutoFit/>
+          </a:bodyPr>
+          <a:lstStyle/>
+          <a:p>
+            <a:pPr algn="ctr"/>
+            <a:r>
+              <a:rPr sz="1600" b="1" i="0">
+                <a:solidFill>
+                  <a:srgbClr val="1F8E91"/>
+                </a:solidFill>
+                <a:latin typeface="Calibri"/>
+              </a:rPr>
+              <a:t>Hallucination Rate</a:t>
+            </a:r>
+          </a:p>
+        </p:txBody>
+      </p:sp>
+      <p:sp>
+        <p:nvSpPr>
+          <p:cNvPr id="1044" name="TextBox 1043"/>
+          <p:cNvSpPr txBox="1"/>
+          <p:nvPr/>
+        </p:nvSpPr>
+        <p:spPr>
+          <a:xfrm>
+            <a:off x="8357616" y="3246120"/>
+            <a:ext cx="3063240" cy="1188720"/>
+          </a:xfrm>
+          <a:prstGeom prst="rect">
+            <a:avLst/>
+          </a:prstGeom>
+          <a:noFill/>
+        </p:spPr>
+        <p:txBody>
+          <a:bodyPr wrap="square" lIns="0" tIns="0" rIns="0" bIns="0" anchor="t">
+            <a:spAutoFit/>
+          </a:bodyPr>
+          <a:lstStyle/>
+          <a:p>
+            <a:pPr algn="ctr"/>
+            <a:r>
+              <a:rPr sz="1300" b="0" i="0">
+                <a:solidFill>
+                  <a:srgbClr val="5B6B6B"/>
+                </a:solidFill>
+                <a:latin typeface="Calibri"/>
+              </a:rPr>
+              <a:t>Two-half Judge Agent —</a:t>
+            </a:r>
+          </a:p>
+          <a:p>
+            <a:pPr algn="ctr"/>
+            <a:r>
+              <a:rPr sz="1300" b="0" i="0">
+                <a:solidFill>
+                  <a:srgbClr val="5B6B6B"/>
+                </a:solidFill>
+                <a:latin typeface="Calibri"/>
+              </a:rPr>
+              <a:t>LLM + deterministic check</a:t>
             </a:r>
           </a:p>
         </p:txBody>
@@ -10470,8 +11359,8 @@
         </p:nvSpPr>
         <p:spPr>
           <a:xfrm>
-            <a:off x="475488" y="868680"/>
-            <a:ext cx="11128248" cy="822960"/>
+            <a:off x="539496" y="786384"/>
+            <a:ext cx="11109960" cy="594360"/>
           </a:xfrm>
           <a:prstGeom prst="rect">
             <a:avLst/>
@@ -10486,17 +11375,103 @@
           <a:p>
             <a:pPr algn="l">
               <a:lnSpc>
-                <a:spcPct val="130000"/>
+                <a:spcPct val="115000"/>
               </a:lnSpc>
             </a:pPr>
             <a:r>
-              <a:rPr sz="1400" b="0" i="1">
+              <a:rPr sz="1300" b="0" i="1">
                 <a:solidFill>
                   <a:srgbClr val="5B6B6B"/>
                 </a:solidFill>
                 <a:latin typeface="Calibri"/>
               </a:rPr>
-              <a:t>Every piece of this system — AgentField, Ollama, Pytest, GitHub Actions — is open-source or free-tier, so the architecture does not get smaller if the budget does.</a:t>
+              <a:t>Every answer is graded twice — once on whether it reached the right specialist, once on whether each sentence is actually backed by a citation.</a:t>
+            </a:r>
+          </a:p>
+        </p:txBody>
+      </p:sp>
+      <p:sp>
+        <p:nvSpPr>
+          <p:cNvPr id="5002" name="Rounded Rectangle 5002"/>
+          <p:cNvSpPr/>
+          <p:nvPr/>
+        </p:nvSpPr>
+        <p:spPr>
+          <a:xfrm>
+            <a:off x="539496" y="5074920"/>
+            <a:ext cx="11109960" cy="822960"/>
+          </a:xfrm>
+          <a:prstGeom prst="roundRect">
+            <a:avLst>
+              <a:gd name="adj" fmla="val 6000"/>
+            </a:avLst>
+          </a:prstGeom>
+          <a:solidFill>
+            <a:srgbClr val="EEF6F6"/>
+          </a:solidFill>
+          <a:ln>
+            <a:noFill/>
+          </a:ln>
+          <a:effectLst/>
+        </p:spPr>
+        <p:style>
+          <a:lnRef idx="1">
+            <a:schemeClr val="accent1"/>
+          </a:lnRef>
+          <a:fillRef idx="3">
+            <a:schemeClr val="accent1"/>
+          </a:fillRef>
+          <a:effectRef idx="2">
+            <a:schemeClr val="accent1"/>
+          </a:effectRef>
+          <a:fontRef idx="minor">
+            <a:schemeClr val="lt1"/>
+          </a:fontRef>
+        </p:style>
+        <p:txBody>
+          <a:bodyPr rtlCol="0" anchor="ctr"/>
+          <a:lstStyle/>
+          <a:p>
+            <a:pPr algn="ctr"/>
+            <a:endParaRPr/>
+          </a:p>
+        </p:txBody>
+      </p:sp>
+      <p:sp>
+        <p:nvSpPr>
+          <p:cNvPr id="5003" name="TextBox 5003"/>
+          <p:cNvSpPr txBox="1"/>
+          <p:nvPr/>
+        </p:nvSpPr>
+        <p:spPr>
+          <a:xfrm>
+            <a:off x="813816" y="5074920"/>
+            <a:ext cx="10561320" cy="822960"/>
+          </a:xfrm>
+          <a:prstGeom prst="rect">
+            <a:avLst/>
+          </a:prstGeom>
+          <a:noFill/>
+        </p:spPr>
+        <p:txBody>
+          <a:bodyPr wrap="square" lIns="0" tIns="0" rIns="0" bIns="0" anchor="ctr">
+            <a:normAutofit/>
+          </a:bodyPr>
+          <a:lstStyle/>
+          <a:p>
+            <a:pPr algn="ctr">
+              <a:lnSpc>
+                <a:spcPct val="115000"/>
+              </a:lnSpc>
+            </a:pPr>
+            <a:r>
+              <a:rPr sz="1300" b="1" i="0">
+                <a:solidFill>
+                  <a:srgbClr val="1F8E91"/>
+                </a:solidFill>
+                <a:latin typeface="Calibri"/>
+              </a:rPr>
+              <a:t>Measured on the live control plane, 12 of 12 graded queries: 100% routing accuracy · 5.56% hallucination rate (target &lt;10%) · 93.11% test coverage (target ≥80%) — every target met, not just attempted.</a:t>
             </a:r>
           </a:p>
         </p:txBody>
@@ -10735,7 +11710,7 @@
         <p:spPr>
           <a:xfrm>
             <a:off x="475900" y="302190"/>
-            <a:ext cx="11308812" cy="461665"/>
+            <a:ext cx="9326880" cy="461665"/>
           </a:xfrm>
           <a:prstGeom prst="rect">
             <a:avLst/>
@@ -10759,21 +11734,21 @@
                 <a:ea typeface="Calibri"/>
                 <a:cs typeface="Calibri"/>
               </a:rPr>
-              <a:t>Scope Decisions — What Changed, and Why</a:t>
-            </a:r>
-          </a:p>
-        </p:txBody>
-      </p:sp>
-      <p:sp>
-        <p:nvSpPr>
-          <p:cNvPr id="1032" name="TextBox 1031"/>
+              <a:t>Budget &amp; Cost Justification</a:t>
+            </a:r>
+          </a:p>
+        </p:txBody>
+      </p:sp>
+      <p:sp>
+        <p:nvSpPr>
+          <p:cNvPr id="1033" name="TextBox 1032"/>
           <p:cNvSpPr txBox="1"/>
           <p:nvPr/>
         </p:nvSpPr>
         <p:spPr>
           <a:xfrm>
-            <a:off x="1188720" y="1325880"/>
-            <a:ext cx="4114800" cy="365760"/>
+            <a:off x="822960" y="1737360"/>
+            <a:ext cx="6400800" cy="1051560"/>
           </a:xfrm>
           <a:prstGeom prst="rect">
             <a:avLst/>
@@ -10786,29 +11761,29 @@
           </a:bodyPr>
           <a:lstStyle/>
           <a:p>
-            <a:pPr algn="ctr"/>
-            <a:r>
-              <a:rPr sz="1600" b="1" i="0">
-                <a:solidFill>
-                  <a:srgbClr val="5B6B6B"/>
+            <a:pPr algn="l"/>
+            <a:r>
+              <a:rPr sz="7200" b="1" i="0">
+                <a:solidFill>
+                  <a:srgbClr val="1F8E91"/>
                 </a:solidFill>
                 <a:latin typeface="Calibri"/>
               </a:rPr>
-              <a:t>Approved</a:t>
-            </a:r>
-          </a:p>
-        </p:txBody>
-      </p:sp>
-      <p:sp>
-        <p:nvSpPr>
-          <p:cNvPr id="1033" name="TextBox 1032"/>
+              <a:t>₹0</a:t>
+            </a:r>
+          </a:p>
+        </p:txBody>
+      </p:sp>
+      <p:sp>
+        <p:nvSpPr>
+          <p:cNvPr id="1034" name="TextBox 1033"/>
           <p:cNvSpPr txBox="1"/>
           <p:nvPr/>
         </p:nvSpPr>
         <p:spPr>
           <a:xfrm>
-            <a:off x="6858000" y="1325880"/>
-            <a:ext cx="4114800" cy="365760"/>
+            <a:off x="868680" y="3063240"/>
+            <a:ext cx="6400800" cy="457200"/>
           </a:xfrm>
           <a:prstGeom prst="rect">
             <a:avLst/>
@@ -10821,29 +11796,29 @@
           </a:bodyPr>
           <a:lstStyle/>
           <a:p>
-            <a:pPr algn="ctr"/>
-            <a:r>
-              <a:rPr sz="1600" b="1" i="0">
-                <a:solidFill>
-                  <a:srgbClr val="1F8E91"/>
+            <a:pPr algn="l"/>
+            <a:r>
+              <a:rPr sz="1500" b="0" i="0">
+                <a:solidFill>
+                  <a:srgbClr val="5B6B6B"/>
                 </a:solidFill>
                 <a:latin typeface="Calibri"/>
               </a:rPr>
-              <a:t>Actual — by decision</a:t>
-            </a:r>
-          </a:p>
-        </p:txBody>
-      </p:sp>
-      <p:sp>
-        <p:nvSpPr>
-          <p:cNvPr id="1034" name="Rounded Rectangle 1033"/>
+              <a:t>actual spend, of a ₹2,500 fixed ceiling</a:t>
+            </a:r>
+          </a:p>
+        </p:txBody>
+      </p:sp>
+      <p:sp>
+        <p:nvSpPr>
+          <p:cNvPr id="1035" name="Rounded Rectangle 1034"/>
           <p:cNvSpPr/>
           <p:nvPr/>
         </p:nvSpPr>
         <p:spPr>
           <a:xfrm>
-            <a:off x="1188720" y="1874519"/>
-            <a:ext cx="4114800" cy="1371600"/>
+            <a:off x="822960" y="3794760"/>
+            <a:ext cx="6766560" cy="457200"/>
           </a:xfrm>
           <a:prstGeom prst="roundRect">
             <a:avLst>
@@ -10853,10 +11828,8 @@
           <a:solidFill>
             <a:srgbClr val="EEF6F6"/>
           </a:solidFill>
-          <a:ln w="12700">
-            <a:solidFill>
-              <a:srgbClr val="5B6B6B"/>
-            </a:solidFill>
+          <a:ln>
+            <a:noFill/>
           </a:ln>
           <a:effectLst/>
         </p:spPr>
@@ -10885,14 +11858,14 @@
       </p:sp>
       <p:sp>
         <p:nvSpPr>
-          <p:cNvPr id="1035" name="TextBox 1034"/>
+          <p:cNvPr id="1036" name="TextBox 1035"/>
           <p:cNvSpPr txBox="1"/>
           <p:nvPr/>
         </p:nvSpPr>
         <p:spPr>
           <a:xfrm>
-            <a:off x="1371600" y="1874519"/>
-            <a:ext cx="3749039" cy="1371600"/>
+            <a:off x="822960" y="3794760"/>
+            <a:ext cx="6766560" cy="457200"/>
           </a:xfrm>
           <a:prstGeom prst="rect">
             <a:avLst/>
@@ -10907,75 +11880,187 @@
           <a:p>
             <a:pPr algn="ctr"/>
             <a:r>
-              <a:rPr sz="1400" b="0" i="0">
-                <a:solidFill>
-                  <a:srgbClr val="5B6B6B"/>
+              <a:rPr sz="1300" b="1" i="0">
+                <a:solidFill>
+                  <a:srgbClr val="1F8E91"/>
                 </a:solidFill>
                 <a:latin typeface="Calibri"/>
               </a:rPr>
-              <a:t>OpenRouter</a:t>
-            </a:r>
-          </a:p>
+              <a:t>100% of ceiling remains as buffer</a:t>
+            </a:r>
+          </a:p>
+        </p:txBody>
+      </p:sp>
+      <p:sp>
+        <p:nvSpPr>
+          <p:cNvPr id="1037" name="Oval 1036"/>
+          <p:cNvSpPr/>
+          <p:nvPr/>
+        </p:nvSpPr>
+        <p:spPr>
+          <a:xfrm>
+            <a:off x="822960" y="4709159"/>
+            <a:ext cx="109728" cy="109728"/>
+          </a:xfrm>
+          <a:prstGeom prst="ellipse">
+            <a:avLst/>
+          </a:prstGeom>
+          <a:solidFill>
+            <a:srgbClr val="2DB6BB"/>
+          </a:solidFill>
+          <a:ln>
+            <a:noFill/>
+          </a:ln>
+          <a:effectLst/>
+        </p:spPr>
+        <p:style>
+          <a:lnRef idx="1">
+            <a:schemeClr val="accent1"/>
+          </a:lnRef>
+          <a:fillRef idx="3">
+            <a:schemeClr val="accent1"/>
+          </a:fillRef>
+          <a:effectRef idx="2">
+            <a:schemeClr val="accent1"/>
+          </a:effectRef>
+          <a:fontRef idx="minor">
+            <a:schemeClr val="lt1"/>
+          </a:fontRef>
+        </p:style>
+        <p:txBody>
+          <a:bodyPr rtlCol="0" anchor="ctr"/>
+          <a:lstStyle/>
           <a:p>
             <a:pPr algn="ctr"/>
-            <a:r>
-              <a:rPr sz="1400" b="0" i="0">
-                <a:solidFill>
-                  <a:srgbClr val="5B6B6B"/>
+            <a:endParaRPr/>
+          </a:p>
+        </p:txBody>
+      </p:sp>
+      <p:sp>
+        <p:nvSpPr>
+          <p:cNvPr id="1038" name="TextBox 1037"/>
+          <p:cNvSpPr txBox="1"/>
+          <p:nvPr/>
+        </p:nvSpPr>
+        <p:spPr>
+          <a:xfrm>
+            <a:off x="1097280" y="4663440"/>
+            <a:ext cx="6400800" cy="457200"/>
+          </a:xfrm>
+          <a:prstGeom prst="rect">
+            <a:avLst/>
+          </a:prstGeom>
+          <a:noFill/>
+        </p:spPr>
+        <p:txBody>
+          <a:bodyPr wrap="square" lIns="0" tIns="0" rIns="0" bIns="0" anchor="t">
+            <a:spAutoFit/>
+          </a:bodyPr>
+          <a:lstStyle/>
+          <a:p>
+            <a:pPr algn="l"/>
+            <a:r>
+              <a:rPr sz="1300" b="0" i="0">
+                <a:solidFill>
+                  <a:srgbClr val="263030"/>
                 </a:solidFill>
                 <a:latin typeface="Calibri"/>
               </a:rPr>
-              <a:t>(paid inference)</a:t>
-            </a:r>
-          </a:p>
-        </p:txBody>
-      </p:sp>
-      <p:cxnSp>
-        <p:nvCxnSpPr>
-          <p:cNvPr id="1036" name="Connector 1035"/>
-          <p:cNvCxnSpPr/>
-          <p:nvPr/>
-        </p:nvCxnSpPr>
-        <p:spPr>
-          <a:xfrm>
-            <a:off x="5394960" y="2560320"/>
-            <a:ext cx="1371600" cy="0"/>
-          </a:xfrm>
-          <a:prstGeom prst="line">
+              <a:t>AgentField, Ollama, Pytest, GitHub Actions — every tool open-source or free-tier</a:t>
+            </a:r>
+          </a:p>
+        </p:txBody>
+      </p:sp>
+      <p:sp>
+        <p:nvSpPr>
+          <p:cNvPr id="1039" name="Oval 1038"/>
+          <p:cNvSpPr/>
+          <p:nvPr/>
+        </p:nvSpPr>
+        <p:spPr>
+          <a:xfrm>
+            <a:off x="822960" y="5303520"/>
+            <a:ext cx="109728" cy="109728"/>
+          </a:xfrm>
+          <a:prstGeom prst="ellipse">
             <a:avLst/>
           </a:prstGeom>
-          <a:ln w="31750">
-            <a:solidFill>
-              <a:srgbClr val="DCD400"/>
-            </a:solidFill>
-            <a:tailEnd type="triangle" w="med" len="med"/>
+          <a:solidFill>
+            <a:srgbClr val="2DB6BB"/>
+          </a:solidFill>
+          <a:ln>
+            <a:noFill/>
           </a:ln>
+          <a:effectLst/>
         </p:spPr>
         <p:style>
-          <a:lnRef idx="2">
+          <a:lnRef idx="1">
             <a:schemeClr val="accent1"/>
           </a:lnRef>
-          <a:fillRef idx="0">
+          <a:fillRef idx="3">
             <a:schemeClr val="accent1"/>
           </a:fillRef>
-          <a:effectRef idx="1">
+          <a:effectRef idx="2">
             <a:schemeClr val="accent1"/>
           </a:effectRef>
           <a:fontRef idx="minor">
-            <a:schemeClr val="tx1"/>
+            <a:schemeClr val="lt1"/>
           </a:fontRef>
         </p:style>
-      </p:cxnSp>
-      <p:sp>
-        <p:nvSpPr>
-          <p:cNvPr id="1037" name="Rounded Rectangle 1036"/>
+        <p:txBody>
+          <a:bodyPr rtlCol="0" anchor="ctr"/>
+          <a:lstStyle/>
+          <a:p>
+            <a:pPr algn="ctr"/>
+            <a:endParaRPr/>
+          </a:p>
+        </p:txBody>
+      </p:sp>
+      <p:sp>
+        <p:nvSpPr>
+          <p:cNvPr id="1040" name="TextBox 1039"/>
+          <p:cNvSpPr txBox="1"/>
+          <p:nvPr/>
+        </p:nvSpPr>
+        <p:spPr>
+          <a:xfrm>
+            <a:off x="1097280" y="5257800"/>
+            <a:ext cx="6400800" cy="457200"/>
+          </a:xfrm>
+          <a:prstGeom prst="rect">
+            <a:avLst/>
+          </a:prstGeom>
+          <a:noFill/>
+        </p:spPr>
+        <p:txBody>
+          <a:bodyPr wrap="square" lIns="0" tIns="0" rIns="0" bIns="0" anchor="t">
+            <a:spAutoFit/>
+          </a:bodyPr>
+          <a:lstStyle/>
+          <a:p>
+            <a:pPr algn="l"/>
+            <a:r>
+              <a:rPr sz="1300" b="0" i="0">
+                <a:solidFill>
+                  <a:srgbClr val="263030"/>
+                </a:solidFill>
+                <a:latin typeface="Calibri"/>
+              </a:rPr>
+              <a:t>Paid inference (OpenRouter) was a one-line config option — never required</a:t>
+            </a:r>
+          </a:p>
+        </p:txBody>
+      </p:sp>
+      <p:sp>
+        <p:nvSpPr>
+          <p:cNvPr id="1041" name="Rounded Rectangle 1040"/>
           <p:cNvSpPr/>
           <p:nvPr/>
         </p:nvSpPr>
         <p:spPr>
           <a:xfrm>
-            <a:off x="6858000" y="1874519"/>
-            <a:ext cx="4114800" cy="1371600"/>
+            <a:off x="7955279" y="1737360"/>
+            <a:ext cx="3566160" cy="3657600"/>
           </a:xfrm>
           <a:prstGeom prst="roundRect">
             <a:avLst>
@@ -11015,287 +12100,14 @@
       </p:sp>
       <p:sp>
         <p:nvSpPr>
-          <p:cNvPr id="1038" name="TextBox 1037"/>
+          <p:cNvPr id="1042" name="TextBox 1041"/>
           <p:cNvSpPr txBox="1"/>
           <p:nvPr/>
         </p:nvSpPr>
         <p:spPr>
           <a:xfrm>
-            <a:off x="7040880" y="1874519"/>
-            <a:ext cx="3749039" cy="1371600"/>
-          </a:xfrm>
-          <a:prstGeom prst="rect">
-            <a:avLst/>
-          </a:prstGeom>
-          <a:noFill/>
-        </p:spPr>
-        <p:txBody>
-          <a:bodyPr wrap="square" lIns="0" tIns="0" rIns="0" bIns="0" anchor="ctr">
-            <a:spAutoFit/>
-          </a:bodyPr>
-          <a:lstStyle/>
-          <a:p>
-            <a:pPr algn="ctr"/>
-            <a:r>
-              <a:rPr sz="1400" b="1" i="0">
-                <a:solidFill>
-                  <a:srgbClr val="FFFFFF"/>
-                </a:solidFill>
-                <a:latin typeface="Calibri"/>
-              </a:rPr>
-              <a:t>Local Ollama</a:t>
-            </a:r>
-          </a:p>
-          <a:p>
-            <a:pPr algn="ctr"/>
-            <a:r>
-              <a:rPr sz="1400" b="1" i="0">
-                <a:solidFill>
-                  <a:srgbClr val="FFFFFF"/>
-                </a:solidFill>
-                <a:latin typeface="Calibri"/>
-              </a:rPr>
-              <a:t>— ₹0, all targets met</a:t>
-            </a:r>
-          </a:p>
-        </p:txBody>
-      </p:sp>
-      <p:sp>
-        <p:nvSpPr>
-          <p:cNvPr id="1039" name="Rounded Rectangle 1038"/>
-          <p:cNvSpPr/>
-          <p:nvPr/>
-        </p:nvSpPr>
-        <p:spPr>
-          <a:xfrm>
-            <a:off x="1188720" y="3566160"/>
-            <a:ext cx="4114800" cy="1371600"/>
-          </a:xfrm>
-          <a:prstGeom prst="roundRect">
-            <a:avLst>
-              <a:gd name="adj" fmla="val 6000"/>
-            </a:avLst>
-          </a:prstGeom>
-          <a:solidFill>
-            <a:srgbClr val="EEF6F6"/>
-          </a:solidFill>
-          <a:ln w="12700">
-            <a:solidFill>
-              <a:srgbClr val="5B6B6B"/>
-            </a:solidFill>
-          </a:ln>
-          <a:effectLst/>
-        </p:spPr>
-        <p:style>
-          <a:lnRef idx="1">
-            <a:schemeClr val="accent1"/>
-          </a:lnRef>
-          <a:fillRef idx="3">
-            <a:schemeClr val="accent1"/>
-          </a:fillRef>
-          <a:effectRef idx="2">
-            <a:schemeClr val="accent1"/>
-          </a:effectRef>
-          <a:fontRef idx="minor">
-            <a:schemeClr val="lt1"/>
-          </a:fontRef>
-        </p:style>
-        <p:txBody>
-          <a:bodyPr rtlCol="0" anchor="ctr"/>
-          <a:lstStyle/>
-          <a:p>
-            <a:pPr algn="ctr"/>
-            <a:endParaRPr/>
-          </a:p>
-        </p:txBody>
-      </p:sp>
-      <p:sp>
-        <p:nvSpPr>
-          <p:cNvPr id="1040" name="TextBox 1039"/>
-          <p:cNvSpPr txBox="1"/>
-          <p:nvPr/>
-        </p:nvSpPr>
-        <p:spPr>
-          <a:xfrm>
-            <a:off x="1371600" y="3566160"/>
-            <a:ext cx="3749039" cy="1371600"/>
-          </a:xfrm>
-          <a:prstGeom prst="rect">
-            <a:avLst/>
-          </a:prstGeom>
-          <a:noFill/>
-        </p:spPr>
-        <p:txBody>
-          <a:bodyPr wrap="square" lIns="0" tIns="0" rIns="0" bIns="0" anchor="ctr">
-            <a:spAutoFit/>
-          </a:bodyPr>
-          <a:lstStyle/>
-          <a:p>
-            <a:pPr algn="ctr"/>
-            <a:r>
-              <a:rPr sz="1400" b="0" i="0">
-                <a:solidFill>
-                  <a:srgbClr val="5B6B6B"/>
-                </a:solidFill>
-                <a:latin typeface="Calibri"/>
-              </a:rPr>
-              <a:t>Azure B1s</a:t>
-            </a:r>
-          </a:p>
-          <a:p>
-            <a:pPr algn="ctr"/>
-            <a:r>
-              <a:rPr sz="1400" b="0" i="0">
-                <a:solidFill>
-                  <a:srgbClr val="5B6B6B"/>
-                </a:solidFill>
-                <a:latin typeface="Calibri"/>
-              </a:rPr>
-              <a:t>hosting</a:t>
-            </a:r>
-          </a:p>
-        </p:txBody>
-      </p:sp>
-      <p:cxnSp>
-        <p:nvCxnSpPr>
-          <p:cNvPr id="1041" name="Connector 1040"/>
-          <p:cNvCxnSpPr/>
-          <p:nvPr/>
-        </p:nvCxnSpPr>
-        <p:spPr>
-          <a:xfrm>
-            <a:off x="5394960" y="4251960"/>
-            <a:ext cx="1371600" cy="0"/>
-          </a:xfrm>
-          <a:prstGeom prst="line">
-            <a:avLst/>
-          </a:prstGeom>
-          <a:ln w="31750">
-            <a:solidFill>
-              <a:srgbClr val="DCD400"/>
-            </a:solidFill>
-            <a:tailEnd type="triangle" w="med" len="med"/>
-          </a:ln>
-        </p:spPr>
-        <p:style>
-          <a:lnRef idx="2">
-            <a:schemeClr val="accent1"/>
-          </a:lnRef>
-          <a:fillRef idx="0">
-            <a:schemeClr val="accent1"/>
-          </a:fillRef>
-          <a:effectRef idx="1">
-            <a:schemeClr val="accent1"/>
-          </a:effectRef>
-          <a:fontRef idx="minor">
-            <a:schemeClr val="tx1"/>
-          </a:fontRef>
-        </p:style>
-      </p:cxnSp>
-      <p:sp>
-        <p:nvSpPr>
-          <p:cNvPr id="1042" name="Rounded Rectangle 1041"/>
-          <p:cNvSpPr/>
-          <p:nvPr/>
-        </p:nvSpPr>
-        <p:spPr>
-          <a:xfrm>
-            <a:off x="6858000" y="3566160"/>
-            <a:ext cx="4114800" cy="1371600"/>
-          </a:xfrm>
-          <a:prstGeom prst="roundRect">
-            <a:avLst>
-              <a:gd name="adj" fmla="val 6000"/>
-            </a:avLst>
-          </a:prstGeom>
-          <a:solidFill>
-            <a:srgbClr val="1F8E91"/>
-          </a:solidFill>
-          <a:ln>
-            <a:noFill/>
-          </a:ln>
-          <a:effectLst/>
-        </p:spPr>
-        <p:style>
-          <a:lnRef idx="1">
-            <a:schemeClr val="accent1"/>
-          </a:lnRef>
-          <a:fillRef idx="3">
-            <a:schemeClr val="accent1"/>
-          </a:fillRef>
-          <a:effectRef idx="2">
-            <a:schemeClr val="accent1"/>
-          </a:effectRef>
-          <a:fontRef idx="minor">
-            <a:schemeClr val="lt1"/>
-          </a:fontRef>
-        </p:style>
-        <p:txBody>
-          <a:bodyPr rtlCol="0" anchor="ctr"/>
-          <a:lstStyle/>
-          <a:p>
-            <a:pPr algn="ctr"/>
-            <a:endParaRPr/>
-          </a:p>
-        </p:txBody>
-      </p:sp>
-      <p:sp>
-        <p:nvSpPr>
-          <p:cNvPr id="1043" name="TextBox 1042"/>
-          <p:cNvSpPr txBox="1"/>
-          <p:nvPr/>
-        </p:nvSpPr>
-        <p:spPr>
-          <a:xfrm>
-            <a:off x="7040880" y="3566160"/>
-            <a:ext cx="3749039" cy="1371600"/>
-          </a:xfrm>
-          <a:prstGeom prst="rect">
-            <a:avLst/>
-          </a:prstGeom>
-          <a:noFill/>
-        </p:spPr>
-        <p:txBody>
-          <a:bodyPr wrap="square" lIns="0" tIns="0" rIns="0" bIns="0" anchor="ctr">
-            <a:spAutoFit/>
-          </a:bodyPr>
-          <a:lstStyle/>
-          <a:p>
-            <a:pPr algn="ctr"/>
-            <a:r>
-              <a:rPr sz="1400" b="1" i="0">
-                <a:solidFill>
-                  <a:srgbClr val="FFFFFF"/>
-                </a:solidFill>
-                <a:latin typeface="Calibri"/>
-              </a:rPr>
-              <a:t>Docker Compose</a:t>
-            </a:r>
-          </a:p>
-          <a:p>
-            <a:pPr algn="ctr"/>
-            <a:r>
-              <a:rPr sz="1400" b="1" i="0">
-                <a:solidFill>
-                  <a:srgbClr val="FFFFFF"/>
-                </a:solidFill>
-                <a:latin typeface="Calibri"/>
-              </a:rPr>
-              <a:t>— identical behaviour, local</a:t>
-            </a:r>
-          </a:p>
-        </p:txBody>
-      </p:sp>
-      <p:sp>
-        <p:nvSpPr>
-          <p:cNvPr id="1044" name="TextBox 1043"/>
-          <p:cNvSpPr txBox="1"/>
-          <p:nvPr/>
-        </p:nvSpPr>
-        <p:spPr>
-          <a:xfrm>
-            <a:off x="1188720" y="5349240"/>
-            <a:ext cx="9784080" cy="640080"/>
+            <a:off x="8229600" y="1965960"/>
+            <a:ext cx="3017520" cy="457200"/>
           </a:xfrm>
           <a:prstGeom prst="rect">
             <a:avLst/>
@@ -11308,29 +12120,29 @@
           </a:bodyPr>
           <a:lstStyle/>
           <a:p>
-            <a:pPr algn="ctr"/>
-            <a:r>
-              <a:rPr sz="1350" b="0" i="1">
-                <a:solidFill>
-                  <a:srgbClr val="5B6B6B"/>
+            <a:pPr algn="l"/>
+            <a:r>
+              <a:rPr sz="1600" b="1" i="0">
+                <a:solidFill>
+                  <a:srgbClr val="FFFFFF"/>
                 </a:solidFill>
                 <a:latin typeface="Calibri"/>
               </a:rPr>
-              <a:t>Both are a recorded ₹0 decision, not a missed requirement — and both remain a one-line config change away</a:t>
-            </a:r>
-          </a:p>
-        </p:txBody>
-      </p:sp>
-      <p:sp>
-        <p:nvSpPr>
-          <p:cNvPr id="5001" name="TextBox 5001"/>
+              <a:t>Why ₹0 works</a:t>
+            </a:r>
+          </a:p>
+        </p:txBody>
+      </p:sp>
+      <p:sp>
+        <p:nvSpPr>
+          <p:cNvPr id="1043" name="TextBox 1042"/>
           <p:cNvSpPr txBox="1"/>
           <p:nvPr/>
         </p:nvSpPr>
         <p:spPr>
           <a:xfrm>
-            <a:off x="475488" y="768096"/>
-            <a:ext cx="10497312" cy="530352"/>
+            <a:off x="8229600" y="2514600"/>
+            <a:ext cx="3017520" cy="2651760"/>
           </a:xfrm>
           <a:prstGeom prst="rect">
             <a:avLst/>
@@ -11339,7 +12151,7 @@
         </p:spPr>
         <p:txBody>
           <a:bodyPr wrap="square" lIns="0" tIns="0" rIns="0" bIns="0" anchor="t">
-            <a:normAutofit/>
+            <a:spAutoFit/>
           </a:bodyPr>
           <a:lstStyle/>
           <a:p>
@@ -11349,13 +12161,52 @@
               </a:lnSpc>
             </a:pPr>
             <a:r>
-              <a:rPr sz="1200" b="0" i="1">
-                <a:solidFill>
-                  <a:srgbClr val="5B6B6B"/>
+              <a:rPr sz="1300" b="0" i="0">
+                <a:solidFill>
+                  <a:srgbClr val="FFFFFF"/>
                 </a:solidFill>
                 <a:latin typeface="Calibri"/>
               </a:rPr>
-              <a:t>Two line items changed because paid inference and cloud hosting were never necessary to hit the proposal’s own targets — not because something was cut.</a:t>
+              <a:t>Local Ollama meets every graded QA target. A hosted model remains a single environment-variable swap — available, never required for this build.</a:t>
+            </a:r>
+          </a:p>
+        </p:txBody>
+      </p:sp>
+      <p:sp>
+        <p:nvSpPr>
+          <p:cNvPr id="5001" name="TextBox 5001"/>
+          <p:cNvSpPr txBox="1"/>
+          <p:nvPr/>
+        </p:nvSpPr>
+        <p:spPr>
+          <a:xfrm>
+            <a:off x="475488" y="868680"/>
+            <a:ext cx="11128248" cy="822960"/>
+          </a:xfrm>
+          <a:prstGeom prst="rect">
+            <a:avLst/>
+          </a:prstGeom>
+          <a:noFill/>
+        </p:spPr>
+        <p:txBody>
+          <a:bodyPr wrap="square" lIns="0" tIns="0" rIns="0" bIns="0" anchor="t">
+            <a:normAutofit/>
+          </a:bodyPr>
+          <a:lstStyle/>
+          <a:p>
+            <a:pPr algn="l">
+              <a:lnSpc>
+                <a:spcPct val="130000"/>
+              </a:lnSpc>
+            </a:pPr>
+            <a:r>
+              <a:rPr sz="1400" b="0" i="1">
+                <a:solidFill>
+                  <a:srgbClr val="5B6B6B"/>
+                </a:solidFill>
+                <a:latin typeface="Calibri"/>
+              </a:rPr>
+              <a:t>Every piece of this system — AgentField, Ollama, Pytest, GitHub Actions — is open-source or free-tier, so the architecture does not get smaller if the budget does.</a:t>
             </a:r>
           </a:p>
         </p:txBody>
@@ -11386,6 +12237,865 @@
     </p:bg>
     <p:spTree>
       <p:nvGrpSpPr>
+        <p:cNvPr id="1" name="">
+          <a:extLst>
+            <a:ext uri="{FF2B5EF4-FFF2-40B4-BE49-F238E27FC236}">
+              <a16:creationId xmlns:a16="http://schemas.microsoft.com/office/drawing/2014/main" id="{9A7E3FC1-2107-892F-FAE9-D9CA97F645B5}"/>
+            </a:ext>
+          </a:extLst>
+        </p:cNvPr>
+        <p:cNvGrpSpPr/>
+        <p:nvPr/>
+      </p:nvGrpSpPr>
+      <p:grpSpPr>
+        <a:xfrm>
+          <a:off x="0" y="0"/>
+          <a:ext cx="0" cy="0"/>
+          <a:chOff x="0" y="0"/>
+          <a:chExt cx="0" cy="0"/>
+        </a:xfrm>
+      </p:grpSpPr>
+      <p:sp>
+        <p:nvSpPr>
+          <p:cNvPr id="1031" name="Rectangle 1030">
+            <a:extLst>
+              <a:ext uri="{FF2B5EF4-FFF2-40B4-BE49-F238E27FC236}">
+                <a16:creationId xmlns:a16="http://schemas.microsoft.com/office/drawing/2014/main" id="{321D49A5-25B9-2506-98B9-2024B79533F0}"/>
+              </a:ext>
+            </a:extLst>
+          </p:cNvPr>
+          <p:cNvSpPr>
+            <a:spLocks noGrp="1" noRot="1" noChangeAspect="1" noMove="1" noResize="1" noEditPoints="1" noAdjustHandles="1" noChangeArrowheads="1" noChangeShapeType="1" noTextEdit="1"/>
+          </p:cNvSpPr>
+          <p:nvPr/>
+        </p:nvSpPr>
+        <p:spPr bwMode="white">
+          <a:xfrm>
+            <a:off x="1524" y="0"/>
+            <a:ext cx="12188952" cy="6858000"/>
+          </a:xfrm>
+          <a:prstGeom prst="rect">
+            <a:avLst/>
+          </a:prstGeom>
+          <a:noFill/>
+          <a:ln>
+            <a:noFill/>
+          </a:ln>
+        </p:spPr>
+        <p:style>
+          <a:lnRef idx="2">
+            <a:schemeClr val="accent1">
+              <a:shade val="50000"/>
+            </a:schemeClr>
+          </a:lnRef>
+          <a:fillRef idx="1">
+            <a:schemeClr val="accent1"/>
+          </a:fillRef>
+          <a:effectRef idx="0">
+            <a:schemeClr val="accent1"/>
+          </a:effectRef>
+          <a:fontRef idx="minor">
+            <a:schemeClr val="lt1"/>
+          </a:fontRef>
+        </p:style>
+        <p:txBody>
+          <a:bodyPr rtlCol="0" anchor="ctr"/>
+          <a:lstStyle>
+            <a:defPPr>
+              <a:defRPr lang="en-US"/>
+            </a:defPPr>
+            <a:lvl1pPr marL="0" algn="l" defTabSz="914400" rtl="0" eaLnBrk="1" latinLnBrk="0" hangingPunct="1">
+              <a:defRPr sz="1800" kern="1200">
+                <a:solidFill>
+                  <a:schemeClr val="lt1"/>
+                </a:solidFill>
+                <a:latin typeface="+mn-lt"/>
+                <a:ea typeface="+mn-ea"/>
+                <a:cs typeface="+mn-cs"/>
+              </a:defRPr>
+            </a:lvl1pPr>
+            <a:lvl2pPr marL="457200" algn="l" defTabSz="914400" rtl="0" eaLnBrk="1" latinLnBrk="0" hangingPunct="1">
+              <a:defRPr sz="1800" kern="1200">
+                <a:solidFill>
+                  <a:schemeClr val="lt1"/>
+                </a:solidFill>
+                <a:latin typeface="+mn-lt"/>
+                <a:ea typeface="+mn-ea"/>
+                <a:cs typeface="+mn-cs"/>
+              </a:defRPr>
+            </a:lvl2pPr>
+            <a:lvl3pPr marL="914400" algn="l" defTabSz="914400" rtl="0" eaLnBrk="1" latinLnBrk="0" hangingPunct="1">
+              <a:defRPr sz="1800" kern="1200">
+                <a:solidFill>
+                  <a:schemeClr val="lt1"/>
+                </a:solidFill>
+                <a:latin typeface="+mn-lt"/>
+                <a:ea typeface="+mn-ea"/>
+                <a:cs typeface="+mn-cs"/>
+              </a:defRPr>
+            </a:lvl3pPr>
+            <a:lvl4pPr marL="1371600" algn="l" defTabSz="914400" rtl="0" eaLnBrk="1" latinLnBrk="0" hangingPunct="1">
+              <a:defRPr sz="1800" kern="1200">
+                <a:solidFill>
+                  <a:schemeClr val="lt1"/>
+                </a:solidFill>
+                <a:latin typeface="+mn-lt"/>
+                <a:ea typeface="+mn-ea"/>
+                <a:cs typeface="+mn-cs"/>
+              </a:defRPr>
+            </a:lvl4pPr>
+            <a:lvl5pPr marL="1828800" algn="l" defTabSz="914400" rtl="0" eaLnBrk="1" latinLnBrk="0" hangingPunct="1">
+              <a:defRPr sz="1800" kern="1200">
+                <a:solidFill>
+                  <a:schemeClr val="lt1"/>
+                </a:solidFill>
+                <a:latin typeface="+mn-lt"/>
+                <a:ea typeface="+mn-ea"/>
+                <a:cs typeface="+mn-cs"/>
+              </a:defRPr>
+            </a:lvl5pPr>
+            <a:lvl6pPr marL="2286000" algn="l" defTabSz="914400" rtl="0" eaLnBrk="1" latinLnBrk="0" hangingPunct="1">
+              <a:defRPr sz="1800" kern="1200">
+                <a:solidFill>
+                  <a:schemeClr val="lt1"/>
+                </a:solidFill>
+                <a:latin typeface="+mn-lt"/>
+                <a:ea typeface="+mn-ea"/>
+                <a:cs typeface="+mn-cs"/>
+              </a:defRPr>
+            </a:lvl6pPr>
+            <a:lvl7pPr marL="2743200" algn="l" defTabSz="914400" rtl="0" eaLnBrk="1" latinLnBrk="0" hangingPunct="1">
+              <a:defRPr sz="1800" kern="1200">
+                <a:solidFill>
+                  <a:schemeClr val="lt1"/>
+                </a:solidFill>
+                <a:latin typeface="+mn-lt"/>
+                <a:ea typeface="+mn-ea"/>
+                <a:cs typeface="+mn-cs"/>
+              </a:defRPr>
+            </a:lvl7pPr>
+            <a:lvl8pPr marL="3200400" algn="l" defTabSz="914400" rtl="0" eaLnBrk="1" latinLnBrk="0" hangingPunct="1">
+              <a:defRPr sz="1800" kern="1200">
+                <a:solidFill>
+                  <a:schemeClr val="lt1"/>
+                </a:solidFill>
+                <a:latin typeface="+mn-lt"/>
+                <a:ea typeface="+mn-ea"/>
+                <a:cs typeface="+mn-cs"/>
+              </a:defRPr>
+            </a:lvl8pPr>
+            <a:lvl9pPr marL="3657600" algn="l" defTabSz="914400" rtl="0" eaLnBrk="1" latinLnBrk="0" hangingPunct="1">
+              <a:defRPr sz="1800" kern="1200">
+                <a:solidFill>
+                  <a:schemeClr val="lt1"/>
+                </a:solidFill>
+                <a:latin typeface="+mn-lt"/>
+                <a:ea typeface="+mn-ea"/>
+                <a:cs typeface="+mn-cs"/>
+              </a:defRPr>
+            </a:lvl9pPr>
+          </a:lstStyle>
+          <a:p>
+            <a:pPr algn="ctr"/>
+            <a:endParaRPr lang="en-US"/>
+          </a:p>
+        </p:txBody>
+      </p:sp>
+      <p:sp>
+        <p:nvSpPr>
+          <p:cNvPr id="5" name="Slide Number Placeholder 4">
+            <a:extLst>
+              <a:ext uri="{FF2B5EF4-FFF2-40B4-BE49-F238E27FC236}">
+                <a16:creationId xmlns:a16="http://schemas.microsoft.com/office/drawing/2014/main" id="{85640418-4388-AD2B-2ED9-220F6B606964}"/>
+              </a:ext>
+            </a:extLst>
+          </p:cNvPr>
+          <p:cNvSpPr>
+            <a:spLocks noGrp="1"/>
+          </p:cNvSpPr>
+          <p:nvPr>
+            <p:ph type="sldNum" sz="quarter" idx="12"/>
+          </p:nvPr>
+        </p:nvSpPr>
+        <p:spPr/>
+        <p:txBody>
+          <a:bodyPr/>
+          <a:lstStyle/>
+          <a:p>
+            <a:fld id="{F5612885-E222-46C0-A73A-0560EABD79A8}" type="slidenum">
+              <a:rPr lang="en-IN" sz="1000" smtClean="0"/>
+              <a:t>8</a:t>
+            </a:fld>
+            <a:endParaRPr lang="en-IN" sz="1000"/>
+          </a:p>
+        </p:txBody>
+      </p:sp>
+      <p:sp>
+        <p:nvSpPr>
+          <p:cNvPr id="3" name="TextBox 2">
+            <a:extLst>
+              <a:ext uri="{FF2B5EF4-FFF2-40B4-BE49-F238E27FC236}">
+                <a16:creationId xmlns:a16="http://schemas.microsoft.com/office/drawing/2014/main" id="{B6A31EBF-DAF5-4757-1C0C-938FD0FC0A56}"/>
+              </a:ext>
+            </a:extLst>
+          </p:cNvPr>
+          <p:cNvSpPr txBox="1"/>
+          <p:nvPr/>
+        </p:nvSpPr>
+        <p:spPr>
+          <a:xfrm>
+            <a:off x="475900" y="302190"/>
+            <a:ext cx="11308812" cy="461665"/>
+          </a:xfrm>
+          <a:prstGeom prst="rect">
+            <a:avLst/>
+          </a:prstGeom>
+          <a:noFill/>
+        </p:spPr>
+        <p:txBody>
+          <a:bodyPr rot="0" spcFirstLastPara="0" vertOverflow="overflow" horzOverflow="overflow" vert="horz" wrap="square" lIns="91440" tIns="45720" rIns="91440" bIns="45720" numCol="1" spcCol="0" rtlCol="0" fromWordArt="0" anchor="t" anchorCtr="0" forceAA="0" compatLnSpc="1">
+            <a:prstTxWarp prst="textNoShape">
+              <a:avLst/>
+            </a:prstTxWarp>
+            <a:spAutoFit/>
+          </a:bodyPr>
+          <a:lstStyle/>
+          <a:p>
+            <a:r>
+              <a:rPr lang="en-US" sz="2400" b="1">
+                <a:solidFill>
+                  <a:srgbClr val="1F8E91"/>
+                </a:solidFill>
+                <a:ea typeface="Calibri"/>
+                <a:cs typeface="Calibri"/>
+              </a:rPr>
+              <a:t>Scope Decisions — What Changed, and Why</a:t>
+            </a:r>
+          </a:p>
+        </p:txBody>
+      </p:sp>
+      <p:sp>
+        <p:nvSpPr>
+          <p:cNvPr id="1032" name="TextBox 1031"/>
+          <p:cNvSpPr txBox="1"/>
+          <p:nvPr/>
+        </p:nvSpPr>
+        <p:spPr>
+          <a:xfrm>
+            <a:off x="1188720" y="1325880"/>
+            <a:ext cx="4114800" cy="365760"/>
+          </a:xfrm>
+          <a:prstGeom prst="rect">
+            <a:avLst/>
+          </a:prstGeom>
+          <a:noFill/>
+        </p:spPr>
+        <p:txBody>
+          <a:bodyPr wrap="square" lIns="0" tIns="0" rIns="0" bIns="0" anchor="t">
+            <a:spAutoFit/>
+          </a:bodyPr>
+          <a:lstStyle/>
+          <a:p>
+            <a:pPr algn="ctr"/>
+            <a:r>
+              <a:rPr sz="1600" b="1" i="0">
+                <a:solidFill>
+                  <a:srgbClr val="5B6B6B"/>
+                </a:solidFill>
+                <a:latin typeface="Calibri"/>
+              </a:rPr>
+              <a:t>Approved</a:t>
+            </a:r>
+          </a:p>
+        </p:txBody>
+      </p:sp>
+      <p:sp>
+        <p:nvSpPr>
+          <p:cNvPr id="1033" name="TextBox 1032"/>
+          <p:cNvSpPr txBox="1"/>
+          <p:nvPr/>
+        </p:nvSpPr>
+        <p:spPr>
+          <a:xfrm>
+            <a:off x="6858000" y="1325880"/>
+            <a:ext cx="4114800" cy="365760"/>
+          </a:xfrm>
+          <a:prstGeom prst="rect">
+            <a:avLst/>
+          </a:prstGeom>
+          <a:noFill/>
+        </p:spPr>
+        <p:txBody>
+          <a:bodyPr wrap="square" lIns="0" tIns="0" rIns="0" bIns="0" anchor="t">
+            <a:spAutoFit/>
+          </a:bodyPr>
+          <a:lstStyle/>
+          <a:p>
+            <a:pPr algn="ctr"/>
+            <a:r>
+              <a:rPr sz="1600" b="1" i="0">
+                <a:solidFill>
+                  <a:srgbClr val="1F8E91"/>
+                </a:solidFill>
+                <a:latin typeface="Calibri"/>
+              </a:rPr>
+              <a:t>Actual — by decision</a:t>
+            </a:r>
+          </a:p>
+        </p:txBody>
+      </p:sp>
+      <p:sp>
+        <p:nvSpPr>
+          <p:cNvPr id="1034" name="Rounded Rectangle 1033"/>
+          <p:cNvSpPr/>
+          <p:nvPr/>
+        </p:nvSpPr>
+        <p:spPr>
+          <a:xfrm>
+            <a:off x="1188720" y="1874519"/>
+            <a:ext cx="4114800" cy="1371600"/>
+          </a:xfrm>
+          <a:prstGeom prst="roundRect">
+            <a:avLst>
+              <a:gd name="adj" fmla="val 6000"/>
+            </a:avLst>
+          </a:prstGeom>
+          <a:solidFill>
+            <a:srgbClr val="EEF6F6"/>
+          </a:solidFill>
+          <a:ln w="12700">
+            <a:solidFill>
+              <a:srgbClr val="5B6B6B"/>
+            </a:solidFill>
+          </a:ln>
+          <a:effectLst/>
+        </p:spPr>
+        <p:style>
+          <a:lnRef idx="1">
+            <a:schemeClr val="accent1"/>
+          </a:lnRef>
+          <a:fillRef idx="3">
+            <a:schemeClr val="accent1"/>
+          </a:fillRef>
+          <a:effectRef idx="2">
+            <a:schemeClr val="accent1"/>
+          </a:effectRef>
+          <a:fontRef idx="minor">
+            <a:schemeClr val="lt1"/>
+          </a:fontRef>
+        </p:style>
+        <p:txBody>
+          <a:bodyPr rtlCol="0" anchor="ctr"/>
+          <a:lstStyle/>
+          <a:p>
+            <a:pPr algn="ctr"/>
+            <a:endParaRPr/>
+          </a:p>
+        </p:txBody>
+      </p:sp>
+      <p:sp>
+        <p:nvSpPr>
+          <p:cNvPr id="1035" name="TextBox 1034"/>
+          <p:cNvSpPr txBox="1"/>
+          <p:nvPr/>
+        </p:nvSpPr>
+        <p:spPr>
+          <a:xfrm>
+            <a:off x="1371600" y="1874519"/>
+            <a:ext cx="3749039" cy="1371600"/>
+          </a:xfrm>
+          <a:prstGeom prst="rect">
+            <a:avLst/>
+          </a:prstGeom>
+          <a:noFill/>
+        </p:spPr>
+        <p:txBody>
+          <a:bodyPr wrap="square" lIns="0" tIns="0" rIns="0" bIns="0" anchor="ctr">
+            <a:spAutoFit/>
+          </a:bodyPr>
+          <a:lstStyle/>
+          <a:p>
+            <a:pPr algn="ctr"/>
+            <a:r>
+              <a:rPr sz="1400" b="0" i="0">
+                <a:solidFill>
+                  <a:srgbClr val="5B6B6B"/>
+                </a:solidFill>
+                <a:latin typeface="Calibri"/>
+              </a:rPr>
+              <a:t>OpenRouter</a:t>
+            </a:r>
+          </a:p>
+          <a:p>
+            <a:pPr algn="ctr"/>
+            <a:r>
+              <a:rPr sz="1400" b="0" i="0">
+                <a:solidFill>
+                  <a:srgbClr val="5B6B6B"/>
+                </a:solidFill>
+                <a:latin typeface="Calibri"/>
+              </a:rPr>
+              <a:t>(paid inference)</a:t>
+            </a:r>
+          </a:p>
+        </p:txBody>
+      </p:sp>
+      <p:cxnSp>
+        <p:nvCxnSpPr>
+          <p:cNvPr id="1036" name="Connector 1035"/>
+          <p:cNvCxnSpPr/>
+          <p:nvPr/>
+        </p:nvCxnSpPr>
+        <p:spPr>
+          <a:xfrm>
+            <a:off x="5394960" y="2560320"/>
+            <a:ext cx="1371600" cy="0"/>
+          </a:xfrm>
+          <a:prstGeom prst="line">
+            <a:avLst/>
+          </a:prstGeom>
+          <a:ln w="31750">
+            <a:solidFill>
+              <a:srgbClr val="DCD400"/>
+            </a:solidFill>
+            <a:tailEnd type="triangle" w="med" len="med"/>
+          </a:ln>
+        </p:spPr>
+        <p:style>
+          <a:lnRef idx="2">
+            <a:schemeClr val="accent1"/>
+          </a:lnRef>
+          <a:fillRef idx="0">
+            <a:schemeClr val="accent1"/>
+          </a:fillRef>
+          <a:effectRef idx="1">
+            <a:schemeClr val="accent1"/>
+          </a:effectRef>
+          <a:fontRef idx="minor">
+            <a:schemeClr val="tx1"/>
+          </a:fontRef>
+        </p:style>
+      </p:cxnSp>
+      <p:sp>
+        <p:nvSpPr>
+          <p:cNvPr id="1037" name="Rounded Rectangle 1036"/>
+          <p:cNvSpPr/>
+          <p:nvPr/>
+        </p:nvSpPr>
+        <p:spPr>
+          <a:xfrm>
+            <a:off x="6858000" y="1874519"/>
+            <a:ext cx="4114800" cy="1371600"/>
+          </a:xfrm>
+          <a:prstGeom prst="roundRect">
+            <a:avLst>
+              <a:gd name="adj" fmla="val 6000"/>
+            </a:avLst>
+          </a:prstGeom>
+          <a:solidFill>
+            <a:srgbClr val="1F8E91"/>
+          </a:solidFill>
+          <a:ln>
+            <a:noFill/>
+          </a:ln>
+          <a:effectLst/>
+        </p:spPr>
+        <p:style>
+          <a:lnRef idx="1">
+            <a:schemeClr val="accent1"/>
+          </a:lnRef>
+          <a:fillRef idx="3">
+            <a:schemeClr val="accent1"/>
+          </a:fillRef>
+          <a:effectRef idx="2">
+            <a:schemeClr val="accent1"/>
+          </a:effectRef>
+          <a:fontRef idx="minor">
+            <a:schemeClr val="lt1"/>
+          </a:fontRef>
+        </p:style>
+        <p:txBody>
+          <a:bodyPr rtlCol="0" anchor="ctr"/>
+          <a:lstStyle/>
+          <a:p>
+            <a:pPr algn="ctr"/>
+            <a:endParaRPr/>
+          </a:p>
+        </p:txBody>
+      </p:sp>
+      <p:sp>
+        <p:nvSpPr>
+          <p:cNvPr id="1038" name="TextBox 1037"/>
+          <p:cNvSpPr txBox="1"/>
+          <p:nvPr/>
+        </p:nvSpPr>
+        <p:spPr>
+          <a:xfrm>
+            <a:off x="7040880" y="1874519"/>
+            <a:ext cx="3749039" cy="1371600"/>
+          </a:xfrm>
+          <a:prstGeom prst="rect">
+            <a:avLst/>
+          </a:prstGeom>
+          <a:noFill/>
+        </p:spPr>
+        <p:txBody>
+          <a:bodyPr wrap="square" lIns="0" tIns="0" rIns="0" bIns="0" anchor="ctr">
+            <a:spAutoFit/>
+          </a:bodyPr>
+          <a:lstStyle/>
+          <a:p>
+            <a:pPr algn="ctr"/>
+            <a:r>
+              <a:rPr sz="1400" b="1" i="0">
+                <a:solidFill>
+                  <a:srgbClr val="FFFFFF"/>
+                </a:solidFill>
+                <a:latin typeface="Calibri"/>
+              </a:rPr>
+              <a:t>Local Ollama</a:t>
+            </a:r>
+          </a:p>
+          <a:p>
+            <a:pPr algn="ctr"/>
+            <a:r>
+              <a:rPr sz="1400" b="1" i="0">
+                <a:solidFill>
+                  <a:srgbClr val="FFFFFF"/>
+                </a:solidFill>
+                <a:latin typeface="Calibri"/>
+              </a:rPr>
+              <a:t>— ₹0, all targets met</a:t>
+            </a:r>
+          </a:p>
+        </p:txBody>
+      </p:sp>
+      <p:sp>
+        <p:nvSpPr>
+          <p:cNvPr id="1039" name="Rounded Rectangle 1038"/>
+          <p:cNvSpPr/>
+          <p:nvPr/>
+        </p:nvSpPr>
+        <p:spPr>
+          <a:xfrm>
+            <a:off x="1188720" y="3566160"/>
+            <a:ext cx="4114800" cy="1371600"/>
+          </a:xfrm>
+          <a:prstGeom prst="roundRect">
+            <a:avLst>
+              <a:gd name="adj" fmla="val 6000"/>
+            </a:avLst>
+          </a:prstGeom>
+          <a:solidFill>
+            <a:srgbClr val="EEF6F6"/>
+          </a:solidFill>
+          <a:ln w="12700">
+            <a:solidFill>
+              <a:srgbClr val="5B6B6B"/>
+            </a:solidFill>
+          </a:ln>
+          <a:effectLst/>
+        </p:spPr>
+        <p:style>
+          <a:lnRef idx="1">
+            <a:schemeClr val="accent1"/>
+          </a:lnRef>
+          <a:fillRef idx="3">
+            <a:schemeClr val="accent1"/>
+          </a:fillRef>
+          <a:effectRef idx="2">
+            <a:schemeClr val="accent1"/>
+          </a:effectRef>
+          <a:fontRef idx="minor">
+            <a:schemeClr val="lt1"/>
+          </a:fontRef>
+        </p:style>
+        <p:txBody>
+          <a:bodyPr rtlCol="0" anchor="ctr"/>
+          <a:lstStyle/>
+          <a:p>
+            <a:pPr algn="ctr"/>
+            <a:endParaRPr/>
+          </a:p>
+        </p:txBody>
+      </p:sp>
+      <p:sp>
+        <p:nvSpPr>
+          <p:cNvPr id="1040" name="TextBox 1039"/>
+          <p:cNvSpPr txBox="1"/>
+          <p:nvPr/>
+        </p:nvSpPr>
+        <p:spPr>
+          <a:xfrm>
+            <a:off x="1371600" y="3566160"/>
+            <a:ext cx="3749039" cy="1371600"/>
+          </a:xfrm>
+          <a:prstGeom prst="rect">
+            <a:avLst/>
+          </a:prstGeom>
+          <a:noFill/>
+        </p:spPr>
+        <p:txBody>
+          <a:bodyPr wrap="square" lIns="0" tIns="0" rIns="0" bIns="0" anchor="ctr">
+            <a:spAutoFit/>
+          </a:bodyPr>
+          <a:lstStyle/>
+          <a:p>
+            <a:pPr algn="ctr"/>
+            <a:r>
+              <a:rPr sz="1400" b="0" i="0">
+                <a:solidFill>
+                  <a:srgbClr val="5B6B6B"/>
+                </a:solidFill>
+                <a:latin typeface="Calibri"/>
+              </a:rPr>
+              <a:t>Azure B1s</a:t>
+            </a:r>
+          </a:p>
+          <a:p>
+            <a:pPr algn="ctr"/>
+            <a:r>
+              <a:rPr sz="1400" b="0" i="0">
+                <a:solidFill>
+                  <a:srgbClr val="5B6B6B"/>
+                </a:solidFill>
+                <a:latin typeface="Calibri"/>
+              </a:rPr>
+              <a:t>hosting</a:t>
+            </a:r>
+          </a:p>
+        </p:txBody>
+      </p:sp>
+      <p:cxnSp>
+        <p:nvCxnSpPr>
+          <p:cNvPr id="1041" name="Connector 1040"/>
+          <p:cNvCxnSpPr/>
+          <p:nvPr/>
+        </p:nvCxnSpPr>
+        <p:spPr>
+          <a:xfrm>
+            <a:off x="5394960" y="4251960"/>
+            <a:ext cx="1371600" cy="0"/>
+          </a:xfrm>
+          <a:prstGeom prst="line">
+            <a:avLst/>
+          </a:prstGeom>
+          <a:ln w="31750">
+            <a:solidFill>
+              <a:srgbClr val="DCD400"/>
+            </a:solidFill>
+            <a:tailEnd type="triangle" w="med" len="med"/>
+          </a:ln>
+        </p:spPr>
+        <p:style>
+          <a:lnRef idx="2">
+            <a:schemeClr val="accent1"/>
+          </a:lnRef>
+          <a:fillRef idx="0">
+            <a:schemeClr val="accent1"/>
+          </a:fillRef>
+          <a:effectRef idx="1">
+            <a:schemeClr val="accent1"/>
+          </a:effectRef>
+          <a:fontRef idx="minor">
+            <a:schemeClr val="tx1"/>
+          </a:fontRef>
+        </p:style>
+      </p:cxnSp>
+      <p:sp>
+        <p:nvSpPr>
+          <p:cNvPr id="1042" name="Rounded Rectangle 1041"/>
+          <p:cNvSpPr/>
+          <p:nvPr/>
+        </p:nvSpPr>
+        <p:spPr>
+          <a:xfrm>
+            <a:off x="6858000" y="3566160"/>
+            <a:ext cx="4114800" cy="1371600"/>
+          </a:xfrm>
+          <a:prstGeom prst="roundRect">
+            <a:avLst>
+              <a:gd name="adj" fmla="val 6000"/>
+            </a:avLst>
+          </a:prstGeom>
+          <a:solidFill>
+            <a:srgbClr val="1F8E91"/>
+          </a:solidFill>
+          <a:ln>
+            <a:noFill/>
+          </a:ln>
+          <a:effectLst/>
+        </p:spPr>
+        <p:style>
+          <a:lnRef idx="1">
+            <a:schemeClr val="accent1"/>
+          </a:lnRef>
+          <a:fillRef idx="3">
+            <a:schemeClr val="accent1"/>
+          </a:fillRef>
+          <a:effectRef idx="2">
+            <a:schemeClr val="accent1"/>
+          </a:effectRef>
+          <a:fontRef idx="minor">
+            <a:schemeClr val="lt1"/>
+          </a:fontRef>
+        </p:style>
+        <p:txBody>
+          <a:bodyPr rtlCol="0" anchor="ctr"/>
+          <a:lstStyle/>
+          <a:p>
+            <a:pPr algn="ctr"/>
+            <a:endParaRPr/>
+          </a:p>
+        </p:txBody>
+      </p:sp>
+      <p:sp>
+        <p:nvSpPr>
+          <p:cNvPr id="1043" name="TextBox 1042"/>
+          <p:cNvSpPr txBox="1"/>
+          <p:nvPr/>
+        </p:nvSpPr>
+        <p:spPr>
+          <a:xfrm>
+            <a:off x="7040880" y="3566160"/>
+            <a:ext cx="3749039" cy="1371600"/>
+          </a:xfrm>
+          <a:prstGeom prst="rect">
+            <a:avLst/>
+          </a:prstGeom>
+          <a:noFill/>
+        </p:spPr>
+        <p:txBody>
+          <a:bodyPr wrap="square" lIns="0" tIns="0" rIns="0" bIns="0" anchor="ctr">
+            <a:spAutoFit/>
+          </a:bodyPr>
+          <a:lstStyle/>
+          <a:p>
+            <a:pPr algn="ctr"/>
+            <a:r>
+              <a:rPr sz="1400" b="1" i="0">
+                <a:solidFill>
+                  <a:srgbClr val="FFFFFF"/>
+                </a:solidFill>
+                <a:latin typeface="Calibri"/>
+              </a:rPr>
+              <a:t>Docker Compose</a:t>
+            </a:r>
+          </a:p>
+          <a:p>
+            <a:pPr algn="ctr"/>
+            <a:r>
+              <a:rPr sz="1400" b="1" i="0">
+                <a:solidFill>
+                  <a:srgbClr val="FFFFFF"/>
+                </a:solidFill>
+                <a:latin typeface="Calibri"/>
+              </a:rPr>
+              <a:t>— identical behaviour, local</a:t>
+            </a:r>
+          </a:p>
+        </p:txBody>
+      </p:sp>
+      <p:sp>
+        <p:nvSpPr>
+          <p:cNvPr id="1044" name="TextBox 1043"/>
+          <p:cNvSpPr txBox="1"/>
+          <p:nvPr/>
+        </p:nvSpPr>
+        <p:spPr>
+          <a:xfrm>
+            <a:off x="1188720" y="5349240"/>
+            <a:ext cx="9784080" cy="640080"/>
+          </a:xfrm>
+          <a:prstGeom prst="rect">
+            <a:avLst/>
+          </a:prstGeom>
+          <a:noFill/>
+        </p:spPr>
+        <p:txBody>
+          <a:bodyPr wrap="square" lIns="0" tIns="0" rIns="0" bIns="0" anchor="t">
+            <a:spAutoFit/>
+          </a:bodyPr>
+          <a:lstStyle/>
+          <a:p>
+            <a:pPr algn="ctr"/>
+            <a:r>
+              <a:rPr sz="1350" b="0" i="1">
+                <a:solidFill>
+                  <a:srgbClr val="5B6B6B"/>
+                </a:solidFill>
+                <a:latin typeface="Calibri"/>
+              </a:rPr>
+              <a:t>Both are a recorded ₹0 decision, not a missed requirement — and both remain a one-line config change away</a:t>
+            </a:r>
+          </a:p>
+        </p:txBody>
+      </p:sp>
+      <p:sp>
+        <p:nvSpPr>
+          <p:cNvPr id="5001" name="TextBox 5001"/>
+          <p:cNvSpPr txBox="1"/>
+          <p:nvPr/>
+        </p:nvSpPr>
+        <p:spPr>
+          <a:xfrm>
+            <a:off x="475488" y="768096"/>
+            <a:ext cx="10497312" cy="530352"/>
+          </a:xfrm>
+          <a:prstGeom prst="rect">
+            <a:avLst/>
+          </a:prstGeom>
+          <a:noFill/>
+        </p:spPr>
+        <p:txBody>
+          <a:bodyPr wrap="square" lIns="0" tIns="0" rIns="0" bIns="0" anchor="t">
+            <a:normAutofit/>
+          </a:bodyPr>
+          <a:lstStyle/>
+          <a:p>
+            <a:pPr algn="l">
+              <a:lnSpc>
+                <a:spcPct val="120000"/>
+              </a:lnSpc>
+            </a:pPr>
+            <a:r>
+              <a:rPr sz="1200" b="0" i="1">
+                <a:solidFill>
+                  <a:srgbClr val="5B6B6B"/>
+                </a:solidFill>
+                <a:latin typeface="Calibri"/>
+              </a:rPr>
+              <a:t>Two line items changed because paid inference and cloud hosting were never necessary to hit the proposal’s own targets — not because something was cut.</a:t>
+            </a:r>
+          </a:p>
+        </p:txBody>
+      </p:sp>
+    </p:spTree>
+    <p:extLst>
+      <p:ext uri="{BB962C8B-B14F-4D97-AF65-F5344CB8AC3E}">
+        <p14:creationId xmlns:p14="http://schemas.microsoft.com/office/powerpoint/2010/main" val="2305456350"/>
+      </p:ext>
+    </p:extLst>
+  </p:cSld>
+  <p:clrMapOvr>
+    <a:masterClrMapping/>
+  </p:clrMapOvr>
+</p:sld>
+</file>
+
+<file path=ppt/slides/slide9.xml><?xml version="1.0" encoding="utf-8"?>
+<p:sld xmlns:a="http://schemas.openxmlformats.org/drawingml/2006/main" xmlns:r="http://schemas.openxmlformats.org/officeDocument/2006/relationships" xmlns:p="http://schemas.openxmlformats.org/presentationml/2006/main">
+  <p:cSld>
+    <p:bg>
+      <p:bgPr>
+        <a:solidFill>
+          <a:schemeClr val="bg1"/>
+        </a:solidFill>
+        <a:effectLst/>
+      </p:bgPr>
+    </p:bg>
+    <p:spTree>
+      <p:nvGrpSpPr>
         <p:cNvPr id="1" name=""/>
         <p:cNvGrpSpPr/>
         <p:nvPr/>
@@ -11561,7 +13271,7 @@
           <a:p>
             <a:fld id="{F5612885-E222-46C0-A73A-0560EABD79A8}" type="slidenum">
               <a:rPr lang="en-IN" sz="1000" smtClean="0"/>
-              <a:t>8</a:t>
+              <a:t>9</a:t>
             </a:fld>
             <a:endParaRPr lang="en-IN" sz="1000"/>
           </a:p>
@@ -13769,6 +15479,23 @@
 </file>
 
 <file path=customXml/item1.xml><?xml version="1.0" encoding="utf-8"?>
+<?mso-contentType ?>
+<FormTemplates xmlns="http://schemas.microsoft.com/sharepoint/v3/contenttype/forms">
+  <Display>DocumentLibraryForm</Display>
+  <Edit>DocumentLibraryForm</Edit>
+  <New>DocumentLibraryForm</New>
+</FormTemplates>
+</file>
+
+<file path=customXml/item2.xml><?xml version="1.0" encoding="utf-8"?>
+<p:properties xmlns:p="http://schemas.microsoft.com/office/2006/metadata/properties" xmlns:xsi="http://www.w3.org/2001/XMLSchema-instance" xmlns:pc="http://schemas.microsoft.com/office/infopath/2007/PartnerControls">
+  <documentManagement>
+    <_activity xmlns="85917f08-b411-4c8c-b73b-478edaa64b5d" xsi:nil="true"/>
+  </documentManagement>
+</p:properties>
+</file>
+
+<file path=customXml/item3.xml><?xml version="1.0" encoding="utf-8"?>
 <ct:contentTypeSchema xmlns:ct="http://schemas.microsoft.com/office/2006/metadata/contentType" xmlns:ma="http://schemas.microsoft.com/office/2006/metadata/properties/metaAttributes" ct:_="" ma:_="" ma:contentTypeName="Document" ma:contentTypeID="0x0101004D2675B97AD28E4A84DDD15DAFC4C3BF" ma:contentTypeVersion="15" ma:contentTypeDescription="Create a new document." ma:contentTypeScope="" ma:versionID="34fe4ac9dce90b3ca86d44f51d6b599b">
   <xsd:schema xmlns:xsd="http://www.w3.org/2001/XMLSchema" xmlns:xs="http://www.w3.org/2001/XMLSchema" xmlns:p="http://schemas.microsoft.com/office/2006/metadata/properties" xmlns:ns3="85917f08-b411-4c8c-b73b-478edaa64b5d" xmlns:ns4="8acdb649-c3dc-403e-8f98-6d94a85edfed" targetNamespace="http://schemas.microsoft.com/office/2006/metadata/properties" ma:root="true" ma:fieldsID="32de2392117b035fb8469ae55c5d331a" ns3:_="" ns4:_="">
     <xsd:import namespace="85917f08-b411-4c8c-b73b-478edaa64b5d"/>
@@ -14001,39 +15728,9 @@
 </ct:contentTypeSchema>
 </file>
 
-<file path=customXml/item2.xml><?xml version="1.0" encoding="utf-8"?>
-<p:properties xmlns:p="http://schemas.microsoft.com/office/2006/metadata/properties" xmlns:xsi="http://www.w3.org/2001/XMLSchema-instance" xmlns:pc="http://schemas.microsoft.com/office/infopath/2007/PartnerControls">
-  <documentManagement>
-    <_activity xmlns="85917f08-b411-4c8c-b73b-478edaa64b5d" xsi:nil="true"/>
-  </documentManagement>
-</p:properties>
-</file>
-
-<file path=customXml/item3.xml><?xml version="1.0" encoding="utf-8"?>
-<?mso-contentType ?>
-<FormTemplates xmlns="http://schemas.microsoft.com/sharepoint/v3/contenttype/forms">
-  <Display>DocumentLibraryForm</Display>
-  <Edit>DocumentLibraryForm</Edit>
-  <New>DocumentLibraryForm</New>
-</FormTemplates>
-</file>
-
 <file path=customXml/itemProps1.xml><?xml version="1.0" encoding="utf-8"?>
-<ds:datastoreItem xmlns:ds="http://schemas.openxmlformats.org/officeDocument/2006/customXml" ds:itemID="{D64E5DF6-33F1-4CBE-90C8-28D1C505408E}">
-  <ds:schemaRefs>
-    <ds:schemaRef ds:uri="http://schemas.microsoft.com/office/2006/metadata/contentType"/>
-    <ds:schemaRef ds:uri="http://schemas.microsoft.com/office/2006/metadata/properties/metaAttributes"/>
-    <ds:schemaRef ds:uri="http://www.w3.org/2001/XMLSchema"/>
-    <ds:schemaRef ds:uri="http://schemas.microsoft.com/office/2006/metadata/properties"/>
-    <ds:schemaRef ds:uri="85917f08-b411-4c8c-b73b-478edaa64b5d"/>
-    <ds:schemaRef ds:uri="8acdb649-c3dc-403e-8f98-6d94a85edfed"/>
-    <ds:schemaRef ds:uri="http://schemas.microsoft.com/office/2006/documentManagement/types"/>
-    <ds:schemaRef ds:uri="http://schemas.microsoft.com/office/infopath/2007/PartnerControls"/>
-    <ds:schemaRef ds:uri="http://schemas.openxmlformats.org/package/2006/metadata/core-properties"/>
-    <ds:schemaRef ds:uri="http://purl.org/dc/elements/1.1/"/>
-    <ds:schemaRef ds:uri="http://purl.org/dc/terms/"/>
-    <ds:schemaRef ds:uri="http://schemas.microsoft.com/internal/obd"/>
-  </ds:schemaRefs>
+<ds:datastoreItem xmlns:ds="http://schemas.openxmlformats.org/officeDocument/2006/customXml" ds:itemID="{BDF03512-25DF-493B-9B53-51BE253359EC}">
+  <ds:schemaRefs/>
 </ds:datastoreItem>
 </file>
 
@@ -14055,7 +15752,20 @@
 </file>
 
 <file path=customXml/itemProps3.xml><?xml version="1.0" encoding="utf-8"?>
-<ds:datastoreItem xmlns:ds="http://schemas.openxmlformats.org/officeDocument/2006/customXml" ds:itemID="{BDF03512-25DF-493B-9B53-51BE253359EC}">
-  <ds:schemaRefs/>
+<ds:datastoreItem xmlns:ds="http://schemas.openxmlformats.org/officeDocument/2006/customXml" ds:itemID="{D64E5DF6-33F1-4CBE-90C8-28D1C505408E}">
+  <ds:schemaRefs>
+    <ds:schemaRef ds:uri="http://schemas.microsoft.com/office/2006/metadata/contentType"/>
+    <ds:schemaRef ds:uri="http://schemas.microsoft.com/office/2006/metadata/properties/metaAttributes"/>
+    <ds:schemaRef ds:uri="http://www.w3.org/2001/XMLSchema"/>
+    <ds:schemaRef ds:uri="http://schemas.microsoft.com/office/2006/metadata/properties"/>
+    <ds:schemaRef ds:uri="85917f08-b411-4c8c-b73b-478edaa64b5d"/>
+    <ds:schemaRef ds:uri="8acdb649-c3dc-403e-8f98-6d94a85edfed"/>
+    <ds:schemaRef ds:uri="http://schemas.microsoft.com/office/2006/documentManagement/types"/>
+    <ds:schemaRef ds:uri="http://schemas.microsoft.com/office/infopath/2007/PartnerControls"/>
+    <ds:schemaRef ds:uri="http://schemas.openxmlformats.org/package/2006/metadata/core-properties"/>
+    <ds:schemaRef ds:uri="http://purl.org/dc/elements/1.1/"/>
+    <ds:schemaRef ds:uri="http://purl.org/dc/terms/"/>
+    <ds:schemaRef ds:uri="http://schemas.microsoft.com/internal/obd"/>
+  </ds:schemaRefs>
 </ds:datastoreItem>
 </file>
--- a/docs/deck/S4-I-24_SridharVetrivel_LiveReview_RFPCriteria_v3.pptx
+++ b/docs/deck/S4-I-24_SridharVetrivel_LiveReview_RFPCriteria_v3.pptx
@@ -5997,7 +5997,7 @@
           <a:p>
             <a:pPr algn="l"/>
             <a:r>
-              <a:rPr sz="1400" b="0" i="0">
+              <a:rPr sz="1400" b="0" i="0" dirty="0">
                 <a:solidFill>
                   <a:srgbClr val="263030"/>
                 </a:solidFill>
@@ -6164,86 +6164,6 @@
                 <a:latin typeface="Calibri"/>
               </a:rPr>
               <a:t>Budget &amp; Cost Justification</a:t>
-            </a:r>
-          </a:p>
-        </p:txBody>
-      </p:sp>
-      <p:sp>
-        <p:nvSpPr>
-          <p:cNvPr id="1043" name="Oval 1042"/>
-          <p:cNvSpPr/>
-          <p:nvPr/>
-        </p:nvSpPr>
-        <p:spPr>
-          <a:xfrm>
-            <a:off x="548640" y="4251960"/>
-            <a:ext cx="73152" cy="73152"/>
-          </a:xfrm>
-          <a:prstGeom prst="ellipse">
-            <a:avLst/>
-          </a:prstGeom>
-          <a:solidFill>
-            <a:srgbClr val="2DB6BB"/>
-          </a:solidFill>
-          <a:ln>
-            <a:noFill/>
-          </a:ln>
-          <a:effectLst/>
-        </p:spPr>
-        <p:style>
-          <a:lnRef idx="1">
-            <a:schemeClr val="accent1"/>
-          </a:lnRef>
-          <a:fillRef idx="3">
-            <a:schemeClr val="accent1"/>
-          </a:fillRef>
-          <a:effectRef idx="2">
-            <a:schemeClr val="accent1"/>
-          </a:effectRef>
-          <a:fontRef idx="minor">
-            <a:schemeClr val="lt1"/>
-          </a:fontRef>
-        </p:style>
-        <p:txBody>
-          <a:bodyPr rtlCol="0" anchor="ctr"/>
-          <a:lstStyle/>
-          <a:p>
-            <a:pPr algn="ctr"/>
-            <a:endParaRPr/>
-          </a:p>
-        </p:txBody>
-      </p:sp>
-      <p:sp>
-        <p:nvSpPr>
-          <p:cNvPr id="1044" name="TextBox 1043"/>
-          <p:cNvSpPr txBox="1"/>
-          <p:nvPr/>
-        </p:nvSpPr>
-        <p:spPr>
-          <a:xfrm>
-            <a:off x="777240" y="4123944"/>
-            <a:ext cx="5212080" cy="365760"/>
-          </a:xfrm>
-          <a:prstGeom prst="rect">
-            <a:avLst/>
-          </a:prstGeom>
-          <a:noFill/>
-        </p:spPr>
-        <p:txBody>
-          <a:bodyPr wrap="square" lIns="0" tIns="0" rIns="0" bIns="0" anchor="t">
-            <a:spAutoFit/>
-          </a:bodyPr>
-          <a:lstStyle/>
-          <a:p>
-            <a:pPr algn="l"/>
-            <a:r>
-              <a:rPr sz="1400" b="0" i="0">
-                <a:solidFill>
-                  <a:srgbClr val="263030"/>
-                </a:solidFill>
-                <a:latin typeface="Calibri"/>
-              </a:rPr>
-              <a:t>Timeline Feasibility</a:t>
             </a:r>
           </a:p>
         </p:txBody>
@@ -8882,7 +8802,7 @@
           <a:p>
             <a:pPr algn="ctr"/>
             <a:r>
-              <a:rPr sz="1050" b="1" i="0">
+              <a:rPr sz="1050" b="1" i="0" dirty="0">
                 <a:solidFill>
                   <a:srgbClr val="1971C2"/>
                 </a:solidFill>
@@ -8952,9 +8872,9 @@
           <a:p>
             <a:pPr algn="ctr"/>
             <a:r>
-              <a:rPr sz="1050" b="1" i="0">
-                <a:solidFill>
-                  <a:srgbClr val="C92A2A"/>
+              <a:rPr sz="1050" b="1" i="0" strike="sngStrike">
+                <a:solidFill>
+                  <a:srgbClr val="FF0000"/>
                 </a:solidFill>
                 <a:latin typeface="Calibri"/>
               </a:rPr>
@@ -9092,7 +9012,7 @@
           <a:p>
             <a:pPr algn="ctr"/>
             <a:r>
-              <a:rPr sz="1050" b="1" i="0">
+              <a:rPr sz="1050" b="1" i="0" dirty="0">
                 <a:solidFill>
                   <a:srgbClr val="E67700"/>
                 </a:solidFill>
@@ -9145,6 +9065,41 @@
           </a:fontRef>
         </p:style>
       </p:cxnSp>
+      <p:sp>
+        <p:nvSpPr>
+          <p:cNvPr id="2" name="TextBox 1">
+            <a:extLst>
+              <a:ext uri="{FF2B5EF4-FFF2-40B4-BE49-F238E27FC236}">
+                <a16:creationId xmlns:a16="http://schemas.microsoft.com/office/drawing/2014/main" id="{0253BB2E-C1D5-C7DE-8415-78EEE9DE920F}"/>
+              </a:ext>
+            </a:extLst>
+          </p:cNvPr>
+          <p:cNvSpPr txBox="1"/>
+          <p:nvPr/>
+        </p:nvSpPr>
+        <p:spPr>
+          <a:xfrm>
+            <a:off x="402748" y="5353150"/>
+            <a:ext cx="4603592" cy="253916"/>
+          </a:xfrm>
+          <a:prstGeom prst="rect">
+            <a:avLst/>
+          </a:prstGeom>
+          <a:noFill/>
+        </p:spPr>
+        <p:txBody>
+          <a:bodyPr wrap="square" rtlCol="0">
+            <a:spAutoFit/>
+          </a:bodyPr>
+          <a:lstStyle/>
+          <a:p>
+            <a:r>
+              <a:rPr lang="en-IN" sz="1050" dirty="0"/>
+              <a:t>NOTE: All the data are synthetic*</a:t>
+            </a:r>
+          </a:p>
+        </p:txBody>
+      </p:sp>
     </p:spTree>
     <p:extLst>
       <p:ext uri="{BB962C8B-B14F-4D97-AF65-F5344CB8AC3E}">
@@ -15479,20 +15434,20 @@
 </file>
 
 <file path=customXml/item1.xml><?xml version="1.0" encoding="utf-8"?>
+<p:properties xmlns:p="http://schemas.microsoft.com/office/2006/metadata/properties" xmlns:xsi="http://www.w3.org/2001/XMLSchema-instance" xmlns:pc="http://schemas.microsoft.com/office/infopath/2007/PartnerControls">
+  <documentManagement>
+    <_activity xmlns="85917f08-b411-4c8c-b73b-478edaa64b5d" xsi:nil="true"/>
+  </documentManagement>
+</p:properties>
+</file>
+
+<file path=customXml/item2.xml><?xml version="1.0" encoding="utf-8"?>
 <?mso-contentType ?>
 <FormTemplates xmlns="http://schemas.microsoft.com/sharepoint/v3/contenttype/forms">
   <Display>DocumentLibraryForm</Display>
   <Edit>DocumentLibraryForm</Edit>
   <New>DocumentLibraryForm</New>
 </FormTemplates>
-</file>
-
-<file path=customXml/item2.xml><?xml version="1.0" encoding="utf-8"?>
-<p:properties xmlns:p="http://schemas.microsoft.com/office/2006/metadata/properties" xmlns:xsi="http://www.w3.org/2001/XMLSchema-instance" xmlns:pc="http://schemas.microsoft.com/office/infopath/2007/PartnerControls">
-  <documentManagement>
-    <_activity xmlns="85917f08-b411-4c8c-b73b-478edaa64b5d" xsi:nil="true"/>
-  </documentManagement>
-</p:properties>
 </file>
 
 <file path=customXml/item3.xml><?xml version="1.0" encoding="utf-8"?>
@@ -15729,12 +15684,6 @@
 </file>
 
 <file path=customXml/itemProps1.xml><?xml version="1.0" encoding="utf-8"?>
-<ds:datastoreItem xmlns:ds="http://schemas.openxmlformats.org/officeDocument/2006/customXml" ds:itemID="{BDF03512-25DF-493B-9B53-51BE253359EC}">
-  <ds:schemaRefs/>
-</ds:datastoreItem>
-</file>
-
-<file path=customXml/itemProps2.xml><?xml version="1.0" encoding="utf-8"?>
 <ds:datastoreItem xmlns:ds="http://schemas.openxmlformats.org/officeDocument/2006/customXml" ds:itemID="{66373FA7-71C7-4D16-9EDE-82A2EECC32F9}">
   <ds:schemaRefs>
     <ds:schemaRef ds:uri="http://schemas.microsoft.com/office/2006/documentManagement/types"/>
@@ -15748,6 +15697,12 @@
     <ds:schemaRef ds:uri="http://schemas.microsoft.com/office/infopath/2007/PartnerControls"/>
     <ds:schemaRef ds:uri="http://www.w3.org/XML/1998/namespace"/>
   </ds:schemaRefs>
+</ds:datastoreItem>
+</file>
+
+<file path=customXml/itemProps2.xml><?xml version="1.0" encoding="utf-8"?>
+<ds:datastoreItem xmlns:ds="http://schemas.openxmlformats.org/officeDocument/2006/customXml" ds:itemID="{BDF03512-25DF-493B-9B53-51BE253359EC}">
+  <ds:schemaRefs/>
 </ds:datastoreItem>
 </file>
 
